--- a/prezentacio.pptx
+++ b/prezentacio.pptx
@@ -8,6 +8,10 @@
     <p:sldId id="256" r:id="rId2"/>
     <p:sldId id="257" r:id="rId3"/>
     <p:sldId id="258" r:id="rId4"/>
+    <p:sldId id="261" r:id="rId5"/>
+    <p:sldId id="262" r:id="rId6"/>
+    <p:sldId id="259" r:id="rId7"/>
+    <p:sldId id="260" r:id="rId8"/>
   </p:sldIdLst>
   <p:sldSz cx="12192000" cy="6858000"/>
   <p:notesSz cx="6858000" cy="9144000"/>
@@ -106,6 +110,11 @@
       </a:defRPr>
     </a:lvl9pPr>
   </p:defaultTextStyle>
+  <p:extLst>
+    <p:ext uri="{EFAFB233-063F-42B5-8137-9DF3F51BA10A}">
+      <p15:sldGuideLst xmlns:p15="http://schemas.microsoft.com/office/powerpoint/2012/main"/>
+    </p:ext>
+  </p:extLst>
 </p:presentation>
 </file>
 
@@ -322,7 +331,7 @@
           <a:p>
             <a:fld id="{058E7FE3-1698-40CD-B987-742CA7C58AD7}" type="datetimeFigureOut">
               <a:rPr lang="hu-HU" smtClean="0"/>
-              <a:t>2026. 03. 20.</a:t>
+              <a:t>2026. 03. 27.</a:t>
             </a:fld>
             <a:endParaRPr lang="hu-HU"/>
           </a:p>
@@ -613,7 +622,7 @@
           <a:p>
             <a:fld id="{058E7FE3-1698-40CD-B987-742CA7C58AD7}" type="datetimeFigureOut">
               <a:rPr lang="hu-HU" smtClean="0"/>
-              <a:t>2026. 03. 20.</a:t>
+              <a:t>2026. 03. 27.</a:t>
             </a:fld>
             <a:endParaRPr lang="hu-HU"/>
           </a:p>
@@ -872,7 +881,7 @@
           <a:p>
             <a:fld id="{058E7FE3-1698-40CD-B987-742CA7C58AD7}" type="datetimeFigureOut">
               <a:rPr lang="hu-HU" smtClean="0"/>
-              <a:t>2026. 03. 20.</a:t>
+              <a:t>2026. 03. 27.</a:t>
             </a:fld>
             <a:endParaRPr lang="hu-HU"/>
           </a:p>
@@ -1341,7 +1350,7 @@
           <a:p>
             <a:fld id="{058E7FE3-1698-40CD-B987-742CA7C58AD7}" type="datetimeFigureOut">
               <a:rPr lang="hu-HU" smtClean="0"/>
-              <a:t>2026. 03. 20.</a:t>
+              <a:t>2026. 03. 27.</a:t>
             </a:fld>
             <a:endParaRPr lang="hu-HU"/>
           </a:p>
@@ -1521,7 +1530,7 @@
           <a:p>
             <a:fld id="{058E7FE3-1698-40CD-B987-742CA7C58AD7}" type="datetimeFigureOut">
               <a:rPr lang="hu-HU" smtClean="0"/>
-              <a:t>2026. 03. 20.</a:t>
+              <a:t>2026. 03. 27.</a:t>
             </a:fld>
             <a:endParaRPr lang="hu-HU"/>
           </a:p>
@@ -2097,7 +2106,7 @@
           <a:p>
             <a:fld id="{058E7FE3-1698-40CD-B987-742CA7C58AD7}" type="datetimeFigureOut">
               <a:rPr lang="hu-HU" smtClean="0"/>
-              <a:t>2026. 03. 20.</a:t>
+              <a:t>2026. 03. 27.</a:t>
             </a:fld>
             <a:endParaRPr lang="hu-HU"/>
           </a:p>
@@ -2429,7 +2438,7 @@
           <a:p>
             <a:fld id="{058E7FE3-1698-40CD-B987-742CA7C58AD7}" type="datetimeFigureOut">
               <a:rPr lang="hu-HU" smtClean="0"/>
-              <a:t>2026. 03. 20.</a:t>
+              <a:t>2026. 03. 27.</a:t>
             </a:fld>
             <a:endParaRPr lang="hu-HU"/>
           </a:p>
@@ -2604,7 +2613,7 @@
           <a:p>
             <a:fld id="{058E7FE3-1698-40CD-B987-742CA7C58AD7}" type="datetimeFigureOut">
               <a:rPr lang="hu-HU" smtClean="0"/>
-              <a:t>2026. 03. 20.</a:t>
+              <a:t>2026. 03. 27.</a:t>
             </a:fld>
             <a:endParaRPr lang="hu-HU"/>
           </a:p>
@@ -2784,7 +2793,7 @@
           <a:p>
             <a:fld id="{058E7FE3-1698-40CD-B987-742CA7C58AD7}" type="datetimeFigureOut">
               <a:rPr lang="hu-HU" smtClean="0"/>
-              <a:t>2026. 03. 20.</a:t>
+              <a:t>2026. 03. 27.</a:t>
             </a:fld>
             <a:endParaRPr lang="hu-HU"/>
           </a:p>
@@ -2954,7 +2963,7 @@
           <a:p>
             <a:fld id="{058E7FE3-1698-40CD-B987-742CA7C58AD7}" type="datetimeFigureOut">
               <a:rPr lang="hu-HU" smtClean="0"/>
-              <a:t>2026. 03. 20.</a:t>
+              <a:t>2026. 03. 27.</a:t>
             </a:fld>
             <a:endParaRPr lang="hu-HU"/>
           </a:p>
@@ -3211,7 +3220,7 @@
           <a:p>
             <a:fld id="{058E7FE3-1698-40CD-B987-742CA7C58AD7}" type="datetimeFigureOut">
               <a:rPr lang="hu-HU" smtClean="0"/>
-              <a:t>2026. 03. 20.</a:t>
+              <a:t>2026. 03. 27.</a:t>
             </a:fld>
             <a:endParaRPr lang="hu-HU"/>
           </a:p>
@@ -3503,7 +3512,7 @@
           <a:p>
             <a:fld id="{058E7FE3-1698-40CD-B987-742CA7C58AD7}" type="datetimeFigureOut">
               <a:rPr lang="hu-HU" smtClean="0"/>
-              <a:t>2026. 03. 20.</a:t>
+              <a:t>2026. 03. 27.</a:t>
             </a:fld>
             <a:endParaRPr lang="hu-HU"/>
           </a:p>
@@ -3933,7 +3942,7 @@
           <a:p>
             <a:fld id="{058E7FE3-1698-40CD-B987-742CA7C58AD7}" type="datetimeFigureOut">
               <a:rPr lang="hu-HU" smtClean="0"/>
-              <a:t>2026. 03. 20.</a:t>
+              <a:t>2026. 03. 27.</a:t>
             </a:fld>
             <a:endParaRPr lang="hu-HU"/>
           </a:p>
@@ -4051,7 +4060,7 @@
           <a:p>
             <a:fld id="{058E7FE3-1698-40CD-B987-742CA7C58AD7}" type="datetimeFigureOut">
               <a:rPr lang="hu-HU" smtClean="0"/>
-              <a:t>2026. 03. 20.</a:t>
+              <a:t>2026. 03. 27.</a:t>
             </a:fld>
             <a:endParaRPr lang="hu-HU"/>
           </a:p>
@@ -4146,7 +4155,7 @@
           <a:p>
             <a:fld id="{058E7FE3-1698-40CD-B987-742CA7C58AD7}" type="datetimeFigureOut">
               <a:rPr lang="hu-HU" smtClean="0"/>
-              <a:t>2026. 03. 20.</a:t>
+              <a:t>2026. 03. 27.</a:t>
             </a:fld>
             <a:endParaRPr lang="hu-HU"/>
           </a:p>
@@ -4429,7 +4438,7 @@
           <a:p>
             <a:fld id="{058E7FE3-1698-40CD-B987-742CA7C58AD7}" type="datetimeFigureOut">
               <a:rPr lang="hu-HU" smtClean="0"/>
-              <a:t>2026. 03. 20.</a:t>
+              <a:t>2026. 03. 27.</a:t>
             </a:fld>
             <a:endParaRPr lang="hu-HU"/>
           </a:p>
@@ -4720,7 +4729,7 @@
           <a:p>
             <a:fld id="{058E7FE3-1698-40CD-B987-742CA7C58AD7}" type="datetimeFigureOut">
               <a:rPr lang="hu-HU" smtClean="0"/>
-              <a:t>2026. 03. 20.</a:t>
+              <a:t>2026. 03. 27.</a:t>
             </a:fld>
             <a:endParaRPr lang="hu-HU"/>
           </a:p>
@@ -4951,7 +4960,7 @@
           <a:p>
             <a:fld id="{058E7FE3-1698-40CD-B987-742CA7C58AD7}" type="datetimeFigureOut">
               <a:rPr lang="hu-HU" smtClean="0"/>
-              <a:t>2026. 03. 20.</a:t>
+              <a:t>2026. 03. 27.</a:t>
             </a:fld>
             <a:endParaRPr lang="hu-HU"/>
           </a:p>
@@ -5738,7 +5747,7 @@
         </p:nvSpPr>
         <p:spPr>
           <a:xfrm>
-            <a:off x="0" y="0"/>
+            <a:off x="0" y="110066"/>
             <a:ext cx="10981267" cy="965201"/>
           </a:xfrm>
         </p:spPr>
@@ -5850,6 +5859,357 @@
   <p:clrMapOvr>
     <a:masterClrMapping/>
   </p:clrMapOvr>
+  <p:timing>
+    <p:tnLst>
+      <p:par>
+        <p:cTn id="1" dur="indefinite" restart="never" nodeType="tmRoot">
+          <p:childTnLst>
+            <p:seq concurrent="1" nextAc="seek">
+              <p:cTn id="2" dur="indefinite" nodeType="mainSeq">
+                <p:childTnLst>
+                  <p:par>
+                    <p:cTn id="3" fill="hold">
+                      <p:stCondLst>
+                        <p:cond delay="indefinite"/>
+                      </p:stCondLst>
+                      <p:childTnLst>
+                        <p:par>
+                          <p:cTn id="4" fill="hold">
+                            <p:stCondLst>
+                              <p:cond delay="0"/>
+                            </p:stCondLst>
+                            <p:childTnLst>
+                              <p:par>
+                                <p:cTn id="5" presetID="31" presetClass="entr" presetSubtype="0" fill="hold" grpId="0" nodeType="clickEffect">
+                                  <p:stCondLst>
+                                    <p:cond delay="0"/>
+                                  </p:stCondLst>
+                                  <p:childTnLst>
+                                    <p:set>
+                                      <p:cBhvr>
+                                        <p:cTn id="6" dur="1" fill="hold">
+                                          <p:stCondLst>
+                                            <p:cond delay="0"/>
+                                          </p:stCondLst>
+                                        </p:cTn>
+                                        <p:tgtEl>
+                                          <p:spTgt spid="2"/>
+                                        </p:tgtEl>
+                                        <p:attrNameLst>
+                                          <p:attrName>style.visibility</p:attrName>
+                                        </p:attrNameLst>
+                                      </p:cBhvr>
+                                      <p:to>
+                                        <p:strVal val="visible"/>
+                                      </p:to>
+                                    </p:set>
+                                    <p:anim calcmode="lin" valueType="num">
+                                      <p:cBhvr>
+                                        <p:cTn id="7" dur="1000" fill="hold"/>
+                                        <p:tgtEl>
+                                          <p:spTgt spid="2"/>
+                                        </p:tgtEl>
+                                        <p:attrNameLst>
+                                          <p:attrName>ppt_w</p:attrName>
+                                        </p:attrNameLst>
+                                      </p:cBhvr>
+                                      <p:tavLst>
+                                        <p:tav tm="0">
+                                          <p:val>
+                                            <p:fltVal val="0"/>
+                                          </p:val>
+                                        </p:tav>
+                                        <p:tav tm="100000">
+                                          <p:val>
+                                            <p:strVal val="#ppt_w"/>
+                                          </p:val>
+                                        </p:tav>
+                                      </p:tavLst>
+                                    </p:anim>
+                                    <p:anim calcmode="lin" valueType="num">
+                                      <p:cBhvr>
+                                        <p:cTn id="8" dur="1000" fill="hold"/>
+                                        <p:tgtEl>
+                                          <p:spTgt spid="2"/>
+                                        </p:tgtEl>
+                                        <p:attrNameLst>
+                                          <p:attrName>ppt_h</p:attrName>
+                                        </p:attrNameLst>
+                                      </p:cBhvr>
+                                      <p:tavLst>
+                                        <p:tav tm="0">
+                                          <p:val>
+                                            <p:fltVal val="0"/>
+                                          </p:val>
+                                        </p:tav>
+                                        <p:tav tm="100000">
+                                          <p:val>
+                                            <p:strVal val="#ppt_h"/>
+                                          </p:val>
+                                        </p:tav>
+                                      </p:tavLst>
+                                    </p:anim>
+                                    <p:anim calcmode="lin" valueType="num">
+                                      <p:cBhvr>
+                                        <p:cTn id="9" dur="1000" fill="hold"/>
+                                        <p:tgtEl>
+                                          <p:spTgt spid="2"/>
+                                        </p:tgtEl>
+                                        <p:attrNameLst>
+                                          <p:attrName>style.rotation</p:attrName>
+                                        </p:attrNameLst>
+                                      </p:cBhvr>
+                                      <p:tavLst>
+                                        <p:tav tm="0">
+                                          <p:val>
+                                            <p:fltVal val="90"/>
+                                          </p:val>
+                                        </p:tav>
+                                        <p:tav tm="100000">
+                                          <p:val>
+                                            <p:fltVal val="0"/>
+                                          </p:val>
+                                        </p:tav>
+                                      </p:tavLst>
+                                    </p:anim>
+                                    <p:animEffect transition="in" filter="fade">
+                                      <p:cBhvr>
+                                        <p:cTn id="10" dur="1000"/>
+                                        <p:tgtEl>
+                                          <p:spTgt spid="2"/>
+                                        </p:tgtEl>
+                                      </p:cBhvr>
+                                    </p:animEffect>
+                                  </p:childTnLst>
+                                </p:cTn>
+                              </p:par>
+                            </p:childTnLst>
+                          </p:cTn>
+                        </p:par>
+                      </p:childTnLst>
+                    </p:cTn>
+                  </p:par>
+                  <p:par>
+                    <p:cTn id="11" fill="hold">
+                      <p:stCondLst>
+                        <p:cond delay="indefinite"/>
+                      </p:stCondLst>
+                      <p:childTnLst>
+                        <p:par>
+                          <p:cTn id="12" fill="hold">
+                            <p:stCondLst>
+                              <p:cond delay="0"/>
+                            </p:stCondLst>
+                            <p:childTnLst>
+                              <p:par>
+                                <p:cTn id="13" presetID="31" presetClass="entr" presetSubtype="0" fill="hold" grpId="0" nodeType="clickEffect">
+                                  <p:stCondLst>
+                                    <p:cond delay="0"/>
+                                  </p:stCondLst>
+                                  <p:childTnLst>
+                                    <p:set>
+                                      <p:cBhvr>
+                                        <p:cTn id="14" dur="1" fill="hold">
+                                          <p:stCondLst>
+                                            <p:cond delay="0"/>
+                                          </p:stCondLst>
+                                        </p:cTn>
+                                        <p:tgtEl>
+                                          <p:spTgt spid="3">
+                                            <p:txEl>
+                                              <p:pRg st="0" end="0"/>
+                                            </p:txEl>
+                                          </p:spTgt>
+                                        </p:tgtEl>
+                                        <p:attrNameLst>
+                                          <p:attrName>style.visibility</p:attrName>
+                                        </p:attrNameLst>
+                                      </p:cBhvr>
+                                      <p:to>
+                                        <p:strVal val="visible"/>
+                                      </p:to>
+                                    </p:set>
+                                    <p:anim calcmode="lin" valueType="num">
+                                      <p:cBhvr>
+                                        <p:cTn id="15" dur="1000" fill="hold"/>
+                                        <p:tgtEl>
+                                          <p:spTgt spid="3">
+                                            <p:txEl>
+                                              <p:pRg st="0" end="0"/>
+                                            </p:txEl>
+                                          </p:spTgt>
+                                        </p:tgtEl>
+                                        <p:attrNameLst>
+                                          <p:attrName>ppt_w</p:attrName>
+                                        </p:attrNameLst>
+                                      </p:cBhvr>
+                                      <p:tavLst>
+                                        <p:tav tm="0">
+                                          <p:val>
+                                            <p:fltVal val="0"/>
+                                          </p:val>
+                                        </p:tav>
+                                        <p:tav tm="100000">
+                                          <p:val>
+                                            <p:strVal val="#ppt_w"/>
+                                          </p:val>
+                                        </p:tav>
+                                      </p:tavLst>
+                                    </p:anim>
+                                    <p:anim calcmode="lin" valueType="num">
+                                      <p:cBhvr>
+                                        <p:cTn id="16" dur="1000" fill="hold"/>
+                                        <p:tgtEl>
+                                          <p:spTgt spid="3">
+                                            <p:txEl>
+                                              <p:pRg st="0" end="0"/>
+                                            </p:txEl>
+                                          </p:spTgt>
+                                        </p:tgtEl>
+                                        <p:attrNameLst>
+                                          <p:attrName>ppt_h</p:attrName>
+                                        </p:attrNameLst>
+                                      </p:cBhvr>
+                                      <p:tavLst>
+                                        <p:tav tm="0">
+                                          <p:val>
+                                            <p:fltVal val="0"/>
+                                          </p:val>
+                                        </p:tav>
+                                        <p:tav tm="100000">
+                                          <p:val>
+                                            <p:strVal val="#ppt_h"/>
+                                          </p:val>
+                                        </p:tav>
+                                      </p:tavLst>
+                                    </p:anim>
+                                    <p:anim calcmode="lin" valueType="num">
+                                      <p:cBhvr>
+                                        <p:cTn id="17" dur="1000" fill="hold"/>
+                                        <p:tgtEl>
+                                          <p:spTgt spid="3">
+                                            <p:txEl>
+                                              <p:pRg st="0" end="0"/>
+                                            </p:txEl>
+                                          </p:spTgt>
+                                        </p:tgtEl>
+                                        <p:attrNameLst>
+                                          <p:attrName>style.rotation</p:attrName>
+                                        </p:attrNameLst>
+                                      </p:cBhvr>
+                                      <p:tavLst>
+                                        <p:tav tm="0">
+                                          <p:val>
+                                            <p:fltVal val="90"/>
+                                          </p:val>
+                                        </p:tav>
+                                        <p:tav tm="100000">
+                                          <p:val>
+                                            <p:fltVal val="0"/>
+                                          </p:val>
+                                        </p:tav>
+                                      </p:tavLst>
+                                    </p:anim>
+                                    <p:animEffect transition="in" filter="fade">
+                                      <p:cBhvr>
+                                        <p:cTn id="18" dur="1000"/>
+                                        <p:tgtEl>
+                                          <p:spTgt spid="3">
+                                            <p:txEl>
+                                              <p:pRg st="0" end="0"/>
+                                            </p:txEl>
+                                          </p:spTgt>
+                                        </p:tgtEl>
+                                      </p:cBhvr>
+                                    </p:animEffect>
+                                  </p:childTnLst>
+                                </p:cTn>
+                              </p:par>
+                            </p:childTnLst>
+                          </p:cTn>
+                        </p:par>
+                      </p:childTnLst>
+                    </p:cTn>
+                  </p:par>
+                  <p:par>
+                    <p:cTn id="19" fill="hold">
+                      <p:stCondLst>
+                        <p:cond delay="indefinite"/>
+                      </p:stCondLst>
+                      <p:childTnLst>
+                        <p:par>
+                          <p:cTn id="20" fill="hold">
+                            <p:stCondLst>
+                              <p:cond delay="0"/>
+                            </p:stCondLst>
+                            <p:childTnLst>
+                              <p:par>
+                                <p:cTn id="21" presetID="6" presetClass="entr" presetSubtype="16" fill="hold" nodeType="clickEffect">
+                                  <p:stCondLst>
+                                    <p:cond delay="0"/>
+                                  </p:stCondLst>
+                                  <p:childTnLst>
+                                    <p:set>
+                                      <p:cBhvr>
+                                        <p:cTn id="22" dur="1" fill="hold">
+                                          <p:stCondLst>
+                                            <p:cond delay="0"/>
+                                          </p:stCondLst>
+                                        </p:cTn>
+                                        <p:tgtEl>
+                                          <p:spTgt spid="5"/>
+                                        </p:tgtEl>
+                                        <p:attrNameLst>
+                                          <p:attrName>style.visibility</p:attrName>
+                                        </p:attrNameLst>
+                                      </p:cBhvr>
+                                      <p:to>
+                                        <p:strVal val="visible"/>
+                                      </p:to>
+                                    </p:set>
+                                    <p:animEffect transition="in" filter="circle(in)">
+                                      <p:cBhvr>
+                                        <p:cTn id="23" dur="2000"/>
+                                        <p:tgtEl>
+                                          <p:spTgt spid="5"/>
+                                        </p:tgtEl>
+                                      </p:cBhvr>
+                                    </p:animEffect>
+                                  </p:childTnLst>
+                                </p:cTn>
+                              </p:par>
+                            </p:childTnLst>
+                          </p:cTn>
+                        </p:par>
+                      </p:childTnLst>
+                    </p:cTn>
+                  </p:par>
+                </p:childTnLst>
+              </p:cTn>
+              <p:prevCondLst>
+                <p:cond evt="onPrev" delay="0">
+                  <p:tgtEl>
+                    <p:sldTgt/>
+                  </p:tgtEl>
+                </p:cond>
+              </p:prevCondLst>
+              <p:nextCondLst>
+                <p:cond evt="onNext" delay="0">
+                  <p:tgtEl>
+                    <p:sldTgt/>
+                  </p:tgtEl>
+                </p:cond>
+              </p:nextCondLst>
+            </p:seq>
+          </p:childTnLst>
+        </p:cTn>
+      </p:par>
+    </p:tnLst>
+    <p:bldLst>
+      <p:bldP spid="2" grpId="0"/>
+      <p:bldP spid="3" grpId="0" build="p"/>
+    </p:bldLst>
+  </p:timing>
 </p:sld>
 </file>
 
@@ -6130,6 +6490,854 @@
   <p:clrMapOvr>
     <a:masterClrMapping/>
   </p:clrMapOvr>
+  <p:timing>
+    <p:tnLst>
+      <p:par>
+        <p:cTn id="1" dur="indefinite" restart="never" nodeType="tmRoot">
+          <p:childTnLst>
+            <p:seq concurrent="1" nextAc="seek">
+              <p:cTn id="2" dur="indefinite" nodeType="mainSeq">
+                <p:childTnLst>
+                  <p:par>
+                    <p:cTn id="3" fill="hold">
+                      <p:stCondLst>
+                        <p:cond delay="indefinite"/>
+                      </p:stCondLst>
+                      <p:childTnLst>
+                        <p:par>
+                          <p:cTn id="4" fill="hold">
+                            <p:stCondLst>
+                              <p:cond delay="0"/>
+                            </p:stCondLst>
+                            <p:childTnLst>
+                              <p:par>
+                                <p:cTn id="5" presetID="31" presetClass="entr" presetSubtype="0" fill="hold" grpId="0" nodeType="clickEffect">
+                                  <p:stCondLst>
+                                    <p:cond delay="0"/>
+                                  </p:stCondLst>
+                                  <p:childTnLst>
+                                    <p:set>
+                                      <p:cBhvr>
+                                        <p:cTn id="6" dur="1" fill="hold">
+                                          <p:stCondLst>
+                                            <p:cond delay="0"/>
+                                          </p:stCondLst>
+                                        </p:cTn>
+                                        <p:tgtEl>
+                                          <p:spTgt spid="2"/>
+                                        </p:tgtEl>
+                                        <p:attrNameLst>
+                                          <p:attrName>style.visibility</p:attrName>
+                                        </p:attrNameLst>
+                                      </p:cBhvr>
+                                      <p:to>
+                                        <p:strVal val="visible"/>
+                                      </p:to>
+                                    </p:set>
+                                    <p:anim calcmode="lin" valueType="num">
+                                      <p:cBhvr>
+                                        <p:cTn id="7" dur="1000" fill="hold"/>
+                                        <p:tgtEl>
+                                          <p:spTgt spid="2"/>
+                                        </p:tgtEl>
+                                        <p:attrNameLst>
+                                          <p:attrName>ppt_w</p:attrName>
+                                        </p:attrNameLst>
+                                      </p:cBhvr>
+                                      <p:tavLst>
+                                        <p:tav tm="0">
+                                          <p:val>
+                                            <p:fltVal val="0"/>
+                                          </p:val>
+                                        </p:tav>
+                                        <p:tav tm="100000">
+                                          <p:val>
+                                            <p:strVal val="#ppt_w"/>
+                                          </p:val>
+                                        </p:tav>
+                                      </p:tavLst>
+                                    </p:anim>
+                                    <p:anim calcmode="lin" valueType="num">
+                                      <p:cBhvr>
+                                        <p:cTn id="8" dur="1000" fill="hold"/>
+                                        <p:tgtEl>
+                                          <p:spTgt spid="2"/>
+                                        </p:tgtEl>
+                                        <p:attrNameLst>
+                                          <p:attrName>ppt_h</p:attrName>
+                                        </p:attrNameLst>
+                                      </p:cBhvr>
+                                      <p:tavLst>
+                                        <p:tav tm="0">
+                                          <p:val>
+                                            <p:fltVal val="0"/>
+                                          </p:val>
+                                        </p:tav>
+                                        <p:tav tm="100000">
+                                          <p:val>
+                                            <p:strVal val="#ppt_h"/>
+                                          </p:val>
+                                        </p:tav>
+                                      </p:tavLst>
+                                    </p:anim>
+                                    <p:anim calcmode="lin" valueType="num">
+                                      <p:cBhvr>
+                                        <p:cTn id="9" dur="1000" fill="hold"/>
+                                        <p:tgtEl>
+                                          <p:spTgt spid="2"/>
+                                        </p:tgtEl>
+                                        <p:attrNameLst>
+                                          <p:attrName>style.rotation</p:attrName>
+                                        </p:attrNameLst>
+                                      </p:cBhvr>
+                                      <p:tavLst>
+                                        <p:tav tm="0">
+                                          <p:val>
+                                            <p:fltVal val="90"/>
+                                          </p:val>
+                                        </p:tav>
+                                        <p:tav tm="100000">
+                                          <p:val>
+                                            <p:fltVal val="0"/>
+                                          </p:val>
+                                        </p:tav>
+                                      </p:tavLst>
+                                    </p:anim>
+                                    <p:animEffect transition="in" filter="fade">
+                                      <p:cBhvr>
+                                        <p:cTn id="10" dur="1000"/>
+                                        <p:tgtEl>
+                                          <p:spTgt spid="2"/>
+                                        </p:tgtEl>
+                                      </p:cBhvr>
+                                    </p:animEffect>
+                                  </p:childTnLst>
+                                </p:cTn>
+                              </p:par>
+                            </p:childTnLst>
+                          </p:cTn>
+                        </p:par>
+                      </p:childTnLst>
+                    </p:cTn>
+                  </p:par>
+                  <p:par>
+                    <p:cTn id="11" fill="hold">
+                      <p:stCondLst>
+                        <p:cond delay="indefinite"/>
+                      </p:stCondLst>
+                      <p:childTnLst>
+                        <p:par>
+                          <p:cTn id="12" fill="hold">
+                            <p:stCondLst>
+                              <p:cond delay="0"/>
+                            </p:stCondLst>
+                            <p:childTnLst>
+                              <p:par>
+                                <p:cTn id="13" presetID="26" presetClass="entr" presetSubtype="0" fill="hold" grpId="0" nodeType="clickEffect">
+                                  <p:stCondLst>
+                                    <p:cond delay="0"/>
+                                  </p:stCondLst>
+                                  <p:childTnLst>
+                                    <p:set>
+                                      <p:cBhvr>
+                                        <p:cTn id="14" dur="1" fill="hold">
+                                          <p:stCondLst>
+                                            <p:cond delay="0"/>
+                                          </p:stCondLst>
+                                        </p:cTn>
+                                        <p:tgtEl>
+                                          <p:spTgt spid="3"/>
+                                        </p:tgtEl>
+                                        <p:attrNameLst>
+                                          <p:attrName>style.visibility</p:attrName>
+                                        </p:attrNameLst>
+                                      </p:cBhvr>
+                                      <p:to>
+                                        <p:strVal val="visible"/>
+                                      </p:to>
+                                    </p:set>
+                                    <p:animEffect transition="in" filter="wipe(down)">
+                                      <p:cBhvr>
+                                        <p:cTn id="15" dur="580">
+                                          <p:stCondLst>
+                                            <p:cond delay="0"/>
+                                          </p:stCondLst>
+                                        </p:cTn>
+                                        <p:tgtEl>
+                                          <p:spTgt spid="3"/>
+                                        </p:tgtEl>
+                                      </p:cBhvr>
+                                    </p:animEffect>
+                                    <p:anim calcmode="lin" valueType="num">
+                                      <p:cBhvr>
+                                        <p:cTn id="16" dur="1822" tmFilter="0,0; 0.14,0.36; 0.43,0.73; 0.71,0.91; 1.0,1.0">
+                                          <p:stCondLst>
+                                            <p:cond delay="0"/>
+                                          </p:stCondLst>
+                                        </p:cTn>
+                                        <p:tgtEl>
+                                          <p:spTgt spid="3"/>
+                                        </p:tgtEl>
+                                        <p:attrNameLst>
+                                          <p:attrName>ppt_x</p:attrName>
+                                        </p:attrNameLst>
+                                      </p:cBhvr>
+                                      <p:tavLst>
+                                        <p:tav tm="0">
+                                          <p:val>
+                                            <p:strVal val="#ppt_x-0.25"/>
+                                          </p:val>
+                                        </p:tav>
+                                        <p:tav tm="100000">
+                                          <p:val>
+                                            <p:strVal val="#ppt_x"/>
+                                          </p:val>
+                                        </p:tav>
+                                      </p:tavLst>
+                                    </p:anim>
+                                    <p:anim calcmode="lin" valueType="num">
+                                      <p:cBhvr>
+                                        <p:cTn id="17" dur="664" tmFilter="0.0,0.0; 0.25,0.07; 0.50,0.2; 0.75,0.467; 1.0,1.0">
+                                          <p:stCondLst>
+                                            <p:cond delay="0"/>
+                                          </p:stCondLst>
+                                        </p:cTn>
+                                        <p:tgtEl>
+                                          <p:spTgt spid="3"/>
+                                        </p:tgtEl>
+                                        <p:attrNameLst>
+                                          <p:attrName>ppt_y</p:attrName>
+                                        </p:attrNameLst>
+                                      </p:cBhvr>
+                                      <p:tavLst>
+                                        <p:tav tm="0" fmla="#ppt_y-sin(pi*$)/3">
+                                          <p:val>
+                                            <p:fltVal val="0.5"/>
+                                          </p:val>
+                                        </p:tav>
+                                        <p:tav tm="100000">
+                                          <p:val>
+                                            <p:fltVal val="1"/>
+                                          </p:val>
+                                        </p:tav>
+                                      </p:tavLst>
+                                    </p:anim>
+                                    <p:anim calcmode="lin" valueType="num">
+                                      <p:cBhvr>
+                                        <p:cTn id="18" dur="664" tmFilter="0, 0; 0.125,0.2665; 0.25,0.4; 0.375,0.465; 0.5,0.5;  0.625,0.535; 0.75,0.6; 0.875,0.7335; 1,1">
+                                          <p:stCondLst>
+                                            <p:cond delay="664"/>
+                                          </p:stCondLst>
+                                        </p:cTn>
+                                        <p:tgtEl>
+                                          <p:spTgt spid="3"/>
+                                        </p:tgtEl>
+                                        <p:attrNameLst>
+                                          <p:attrName>ppt_y</p:attrName>
+                                        </p:attrNameLst>
+                                      </p:cBhvr>
+                                      <p:tavLst>
+                                        <p:tav tm="0" fmla="#ppt_y-sin(pi*$)/9">
+                                          <p:val>
+                                            <p:fltVal val="0"/>
+                                          </p:val>
+                                        </p:tav>
+                                        <p:tav tm="100000">
+                                          <p:val>
+                                            <p:fltVal val="1"/>
+                                          </p:val>
+                                        </p:tav>
+                                      </p:tavLst>
+                                    </p:anim>
+                                    <p:anim calcmode="lin" valueType="num">
+                                      <p:cBhvr>
+                                        <p:cTn id="19" dur="332" tmFilter="0, 0; 0.125,0.2665; 0.25,0.4; 0.375,0.465; 0.5,0.5;  0.625,0.535; 0.75,0.6; 0.875,0.7335; 1,1">
+                                          <p:stCondLst>
+                                            <p:cond delay="1324"/>
+                                          </p:stCondLst>
+                                        </p:cTn>
+                                        <p:tgtEl>
+                                          <p:spTgt spid="3"/>
+                                        </p:tgtEl>
+                                        <p:attrNameLst>
+                                          <p:attrName>ppt_y</p:attrName>
+                                        </p:attrNameLst>
+                                      </p:cBhvr>
+                                      <p:tavLst>
+                                        <p:tav tm="0" fmla="#ppt_y-sin(pi*$)/27">
+                                          <p:val>
+                                            <p:fltVal val="0"/>
+                                          </p:val>
+                                        </p:tav>
+                                        <p:tav tm="100000">
+                                          <p:val>
+                                            <p:fltVal val="1"/>
+                                          </p:val>
+                                        </p:tav>
+                                      </p:tavLst>
+                                    </p:anim>
+                                    <p:anim calcmode="lin" valueType="num">
+                                      <p:cBhvr>
+                                        <p:cTn id="20" dur="164" tmFilter="0, 0; 0.125,0.2665; 0.25,0.4; 0.375,0.465; 0.5,0.5;  0.625,0.535; 0.75,0.6; 0.875,0.7335; 1,1">
+                                          <p:stCondLst>
+                                            <p:cond delay="1656"/>
+                                          </p:stCondLst>
+                                        </p:cTn>
+                                        <p:tgtEl>
+                                          <p:spTgt spid="3"/>
+                                        </p:tgtEl>
+                                        <p:attrNameLst>
+                                          <p:attrName>ppt_y</p:attrName>
+                                        </p:attrNameLst>
+                                      </p:cBhvr>
+                                      <p:tavLst>
+                                        <p:tav tm="0" fmla="#ppt_y-sin(pi*$)/81">
+                                          <p:val>
+                                            <p:fltVal val="0"/>
+                                          </p:val>
+                                        </p:tav>
+                                        <p:tav tm="100000">
+                                          <p:val>
+                                            <p:fltVal val="1"/>
+                                          </p:val>
+                                        </p:tav>
+                                      </p:tavLst>
+                                    </p:anim>
+                                    <p:animScale>
+                                      <p:cBhvr>
+                                        <p:cTn id="21" dur="26">
+                                          <p:stCondLst>
+                                            <p:cond delay="650"/>
+                                          </p:stCondLst>
+                                        </p:cTn>
+                                        <p:tgtEl>
+                                          <p:spTgt spid="3"/>
+                                        </p:tgtEl>
+                                      </p:cBhvr>
+                                      <p:to x="100000" y="60000"/>
+                                    </p:animScale>
+                                    <p:animScale>
+                                      <p:cBhvr>
+                                        <p:cTn id="22" dur="166" decel="50000">
+                                          <p:stCondLst>
+                                            <p:cond delay="676"/>
+                                          </p:stCondLst>
+                                        </p:cTn>
+                                        <p:tgtEl>
+                                          <p:spTgt spid="3"/>
+                                        </p:tgtEl>
+                                      </p:cBhvr>
+                                      <p:to x="100000" y="100000"/>
+                                    </p:animScale>
+                                    <p:animScale>
+                                      <p:cBhvr>
+                                        <p:cTn id="23" dur="26">
+                                          <p:stCondLst>
+                                            <p:cond delay="1312"/>
+                                          </p:stCondLst>
+                                        </p:cTn>
+                                        <p:tgtEl>
+                                          <p:spTgt spid="3"/>
+                                        </p:tgtEl>
+                                      </p:cBhvr>
+                                      <p:to x="100000" y="80000"/>
+                                    </p:animScale>
+                                    <p:animScale>
+                                      <p:cBhvr>
+                                        <p:cTn id="24" dur="166" decel="50000">
+                                          <p:stCondLst>
+                                            <p:cond delay="1338"/>
+                                          </p:stCondLst>
+                                        </p:cTn>
+                                        <p:tgtEl>
+                                          <p:spTgt spid="3"/>
+                                        </p:tgtEl>
+                                      </p:cBhvr>
+                                      <p:to x="100000" y="100000"/>
+                                    </p:animScale>
+                                    <p:animScale>
+                                      <p:cBhvr>
+                                        <p:cTn id="25" dur="26">
+                                          <p:stCondLst>
+                                            <p:cond delay="1642"/>
+                                          </p:stCondLst>
+                                        </p:cTn>
+                                        <p:tgtEl>
+                                          <p:spTgt spid="3"/>
+                                        </p:tgtEl>
+                                      </p:cBhvr>
+                                      <p:to x="100000" y="90000"/>
+                                    </p:animScale>
+                                    <p:animScale>
+                                      <p:cBhvr>
+                                        <p:cTn id="26" dur="166" decel="50000">
+                                          <p:stCondLst>
+                                            <p:cond delay="1668"/>
+                                          </p:stCondLst>
+                                        </p:cTn>
+                                        <p:tgtEl>
+                                          <p:spTgt spid="3"/>
+                                        </p:tgtEl>
+                                      </p:cBhvr>
+                                      <p:to x="100000" y="100000"/>
+                                    </p:animScale>
+                                    <p:animScale>
+                                      <p:cBhvr>
+                                        <p:cTn id="27" dur="26">
+                                          <p:stCondLst>
+                                            <p:cond delay="1808"/>
+                                          </p:stCondLst>
+                                        </p:cTn>
+                                        <p:tgtEl>
+                                          <p:spTgt spid="3"/>
+                                        </p:tgtEl>
+                                      </p:cBhvr>
+                                      <p:to x="100000" y="95000"/>
+                                    </p:animScale>
+                                    <p:animScale>
+                                      <p:cBhvr>
+                                        <p:cTn id="28" dur="166" decel="50000">
+                                          <p:stCondLst>
+                                            <p:cond delay="1834"/>
+                                          </p:stCondLst>
+                                        </p:cTn>
+                                        <p:tgtEl>
+                                          <p:spTgt spid="3"/>
+                                        </p:tgtEl>
+                                      </p:cBhvr>
+                                      <p:to x="100000" y="100000"/>
+                                    </p:animScale>
+                                  </p:childTnLst>
+                                </p:cTn>
+                              </p:par>
+                            </p:childTnLst>
+                          </p:cTn>
+                        </p:par>
+                      </p:childTnLst>
+                    </p:cTn>
+                  </p:par>
+                  <p:par>
+                    <p:cTn id="29" fill="hold">
+                      <p:stCondLst>
+                        <p:cond delay="indefinite"/>
+                      </p:stCondLst>
+                      <p:childTnLst>
+                        <p:par>
+                          <p:cTn id="30" fill="hold">
+                            <p:stCondLst>
+                              <p:cond delay="0"/>
+                            </p:stCondLst>
+                            <p:childTnLst>
+                              <p:par>
+                                <p:cTn id="31" presetID="26" presetClass="entr" presetSubtype="0" fill="hold" grpId="0" nodeType="clickEffect">
+                                  <p:stCondLst>
+                                    <p:cond delay="0"/>
+                                  </p:stCondLst>
+                                  <p:childTnLst>
+                                    <p:set>
+                                      <p:cBhvr>
+                                        <p:cTn id="32" dur="1" fill="hold">
+                                          <p:stCondLst>
+                                            <p:cond delay="0"/>
+                                          </p:stCondLst>
+                                        </p:cTn>
+                                        <p:tgtEl>
+                                          <p:spTgt spid="4"/>
+                                        </p:tgtEl>
+                                        <p:attrNameLst>
+                                          <p:attrName>style.visibility</p:attrName>
+                                        </p:attrNameLst>
+                                      </p:cBhvr>
+                                      <p:to>
+                                        <p:strVal val="visible"/>
+                                      </p:to>
+                                    </p:set>
+                                    <p:animEffect transition="in" filter="wipe(down)">
+                                      <p:cBhvr>
+                                        <p:cTn id="33" dur="580">
+                                          <p:stCondLst>
+                                            <p:cond delay="0"/>
+                                          </p:stCondLst>
+                                        </p:cTn>
+                                        <p:tgtEl>
+                                          <p:spTgt spid="4"/>
+                                        </p:tgtEl>
+                                      </p:cBhvr>
+                                    </p:animEffect>
+                                    <p:anim calcmode="lin" valueType="num">
+                                      <p:cBhvr>
+                                        <p:cTn id="34" dur="1822" tmFilter="0,0; 0.14,0.36; 0.43,0.73; 0.71,0.91; 1.0,1.0">
+                                          <p:stCondLst>
+                                            <p:cond delay="0"/>
+                                          </p:stCondLst>
+                                        </p:cTn>
+                                        <p:tgtEl>
+                                          <p:spTgt spid="4"/>
+                                        </p:tgtEl>
+                                        <p:attrNameLst>
+                                          <p:attrName>ppt_x</p:attrName>
+                                        </p:attrNameLst>
+                                      </p:cBhvr>
+                                      <p:tavLst>
+                                        <p:tav tm="0">
+                                          <p:val>
+                                            <p:strVal val="#ppt_x-0.25"/>
+                                          </p:val>
+                                        </p:tav>
+                                        <p:tav tm="100000">
+                                          <p:val>
+                                            <p:strVal val="#ppt_x"/>
+                                          </p:val>
+                                        </p:tav>
+                                      </p:tavLst>
+                                    </p:anim>
+                                    <p:anim calcmode="lin" valueType="num">
+                                      <p:cBhvr>
+                                        <p:cTn id="35" dur="664" tmFilter="0.0,0.0; 0.25,0.07; 0.50,0.2; 0.75,0.467; 1.0,1.0">
+                                          <p:stCondLst>
+                                            <p:cond delay="0"/>
+                                          </p:stCondLst>
+                                        </p:cTn>
+                                        <p:tgtEl>
+                                          <p:spTgt spid="4"/>
+                                        </p:tgtEl>
+                                        <p:attrNameLst>
+                                          <p:attrName>ppt_y</p:attrName>
+                                        </p:attrNameLst>
+                                      </p:cBhvr>
+                                      <p:tavLst>
+                                        <p:tav tm="0" fmla="#ppt_y-sin(pi*$)/3">
+                                          <p:val>
+                                            <p:fltVal val="0.5"/>
+                                          </p:val>
+                                        </p:tav>
+                                        <p:tav tm="100000">
+                                          <p:val>
+                                            <p:fltVal val="1"/>
+                                          </p:val>
+                                        </p:tav>
+                                      </p:tavLst>
+                                    </p:anim>
+                                    <p:anim calcmode="lin" valueType="num">
+                                      <p:cBhvr>
+                                        <p:cTn id="36" dur="664" tmFilter="0, 0; 0.125,0.2665; 0.25,0.4; 0.375,0.465; 0.5,0.5;  0.625,0.535; 0.75,0.6; 0.875,0.7335; 1,1">
+                                          <p:stCondLst>
+                                            <p:cond delay="664"/>
+                                          </p:stCondLst>
+                                        </p:cTn>
+                                        <p:tgtEl>
+                                          <p:spTgt spid="4"/>
+                                        </p:tgtEl>
+                                        <p:attrNameLst>
+                                          <p:attrName>ppt_y</p:attrName>
+                                        </p:attrNameLst>
+                                      </p:cBhvr>
+                                      <p:tavLst>
+                                        <p:tav tm="0" fmla="#ppt_y-sin(pi*$)/9">
+                                          <p:val>
+                                            <p:fltVal val="0"/>
+                                          </p:val>
+                                        </p:tav>
+                                        <p:tav tm="100000">
+                                          <p:val>
+                                            <p:fltVal val="1"/>
+                                          </p:val>
+                                        </p:tav>
+                                      </p:tavLst>
+                                    </p:anim>
+                                    <p:anim calcmode="lin" valueType="num">
+                                      <p:cBhvr>
+                                        <p:cTn id="37" dur="332" tmFilter="0, 0; 0.125,0.2665; 0.25,0.4; 0.375,0.465; 0.5,0.5;  0.625,0.535; 0.75,0.6; 0.875,0.7335; 1,1">
+                                          <p:stCondLst>
+                                            <p:cond delay="1324"/>
+                                          </p:stCondLst>
+                                        </p:cTn>
+                                        <p:tgtEl>
+                                          <p:spTgt spid="4"/>
+                                        </p:tgtEl>
+                                        <p:attrNameLst>
+                                          <p:attrName>ppt_y</p:attrName>
+                                        </p:attrNameLst>
+                                      </p:cBhvr>
+                                      <p:tavLst>
+                                        <p:tav tm="0" fmla="#ppt_y-sin(pi*$)/27">
+                                          <p:val>
+                                            <p:fltVal val="0"/>
+                                          </p:val>
+                                        </p:tav>
+                                        <p:tav tm="100000">
+                                          <p:val>
+                                            <p:fltVal val="1"/>
+                                          </p:val>
+                                        </p:tav>
+                                      </p:tavLst>
+                                    </p:anim>
+                                    <p:anim calcmode="lin" valueType="num">
+                                      <p:cBhvr>
+                                        <p:cTn id="38" dur="164" tmFilter="0, 0; 0.125,0.2665; 0.25,0.4; 0.375,0.465; 0.5,0.5;  0.625,0.535; 0.75,0.6; 0.875,0.7335; 1,1">
+                                          <p:stCondLst>
+                                            <p:cond delay="1656"/>
+                                          </p:stCondLst>
+                                        </p:cTn>
+                                        <p:tgtEl>
+                                          <p:spTgt spid="4"/>
+                                        </p:tgtEl>
+                                        <p:attrNameLst>
+                                          <p:attrName>ppt_y</p:attrName>
+                                        </p:attrNameLst>
+                                      </p:cBhvr>
+                                      <p:tavLst>
+                                        <p:tav tm="0" fmla="#ppt_y-sin(pi*$)/81">
+                                          <p:val>
+                                            <p:fltVal val="0"/>
+                                          </p:val>
+                                        </p:tav>
+                                        <p:tav tm="100000">
+                                          <p:val>
+                                            <p:fltVal val="1"/>
+                                          </p:val>
+                                        </p:tav>
+                                      </p:tavLst>
+                                    </p:anim>
+                                    <p:animScale>
+                                      <p:cBhvr>
+                                        <p:cTn id="39" dur="26">
+                                          <p:stCondLst>
+                                            <p:cond delay="650"/>
+                                          </p:stCondLst>
+                                        </p:cTn>
+                                        <p:tgtEl>
+                                          <p:spTgt spid="4"/>
+                                        </p:tgtEl>
+                                      </p:cBhvr>
+                                      <p:to x="100000" y="60000"/>
+                                    </p:animScale>
+                                    <p:animScale>
+                                      <p:cBhvr>
+                                        <p:cTn id="40" dur="166" decel="50000">
+                                          <p:stCondLst>
+                                            <p:cond delay="676"/>
+                                          </p:stCondLst>
+                                        </p:cTn>
+                                        <p:tgtEl>
+                                          <p:spTgt spid="4"/>
+                                        </p:tgtEl>
+                                      </p:cBhvr>
+                                      <p:to x="100000" y="100000"/>
+                                    </p:animScale>
+                                    <p:animScale>
+                                      <p:cBhvr>
+                                        <p:cTn id="41" dur="26">
+                                          <p:stCondLst>
+                                            <p:cond delay="1312"/>
+                                          </p:stCondLst>
+                                        </p:cTn>
+                                        <p:tgtEl>
+                                          <p:spTgt spid="4"/>
+                                        </p:tgtEl>
+                                      </p:cBhvr>
+                                      <p:to x="100000" y="80000"/>
+                                    </p:animScale>
+                                    <p:animScale>
+                                      <p:cBhvr>
+                                        <p:cTn id="42" dur="166" decel="50000">
+                                          <p:stCondLst>
+                                            <p:cond delay="1338"/>
+                                          </p:stCondLst>
+                                        </p:cTn>
+                                        <p:tgtEl>
+                                          <p:spTgt spid="4"/>
+                                        </p:tgtEl>
+                                      </p:cBhvr>
+                                      <p:to x="100000" y="100000"/>
+                                    </p:animScale>
+                                    <p:animScale>
+                                      <p:cBhvr>
+                                        <p:cTn id="43" dur="26">
+                                          <p:stCondLst>
+                                            <p:cond delay="1642"/>
+                                          </p:stCondLst>
+                                        </p:cTn>
+                                        <p:tgtEl>
+                                          <p:spTgt spid="4"/>
+                                        </p:tgtEl>
+                                      </p:cBhvr>
+                                      <p:to x="100000" y="90000"/>
+                                    </p:animScale>
+                                    <p:animScale>
+                                      <p:cBhvr>
+                                        <p:cTn id="44" dur="166" decel="50000">
+                                          <p:stCondLst>
+                                            <p:cond delay="1668"/>
+                                          </p:stCondLst>
+                                        </p:cTn>
+                                        <p:tgtEl>
+                                          <p:spTgt spid="4"/>
+                                        </p:tgtEl>
+                                      </p:cBhvr>
+                                      <p:to x="100000" y="100000"/>
+                                    </p:animScale>
+                                    <p:animScale>
+                                      <p:cBhvr>
+                                        <p:cTn id="45" dur="26">
+                                          <p:stCondLst>
+                                            <p:cond delay="1808"/>
+                                          </p:stCondLst>
+                                        </p:cTn>
+                                        <p:tgtEl>
+                                          <p:spTgt spid="4"/>
+                                        </p:tgtEl>
+                                      </p:cBhvr>
+                                      <p:to x="100000" y="95000"/>
+                                    </p:animScale>
+                                    <p:animScale>
+                                      <p:cBhvr>
+                                        <p:cTn id="46" dur="166" decel="50000">
+                                          <p:stCondLst>
+                                            <p:cond delay="1834"/>
+                                          </p:stCondLst>
+                                        </p:cTn>
+                                        <p:tgtEl>
+                                          <p:spTgt spid="4"/>
+                                        </p:tgtEl>
+                                      </p:cBhvr>
+                                      <p:to x="100000" y="100000"/>
+                                    </p:animScale>
+                                  </p:childTnLst>
+                                </p:cTn>
+                              </p:par>
+                            </p:childTnLst>
+                          </p:cTn>
+                        </p:par>
+                      </p:childTnLst>
+                    </p:cTn>
+                  </p:par>
+                  <p:par>
+                    <p:cTn id="47" fill="hold">
+                      <p:stCondLst>
+                        <p:cond delay="indefinite"/>
+                      </p:stCondLst>
+                      <p:childTnLst>
+                        <p:par>
+                          <p:cTn id="48" fill="hold">
+                            <p:stCondLst>
+                              <p:cond delay="0"/>
+                            </p:stCondLst>
+                            <p:childTnLst>
+                              <p:par>
+                                <p:cTn id="49" presetID="45" presetClass="entr" presetSubtype="0" fill="hold" nodeType="clickEffect">
+                                  <p:stCondLst>
+                                    <p:cond delay="0"/>
+                                  </p:stCondLst>
+                                  <p:childTnLst>
+                                    <p:set>
+                                      <p:cBhvr>
+                                        <p:cTn id="50" dur="1" fill="hold">
+                                          <p:stCondLst>
+                                            <p:cond delay="0"/>
+                                          </p:stCondLst>
+                                        </p:cTn>
+                                        <p:tgtEl>
+                                          <p:spTgt spid="6"/>
+                                        </p:tgtEl>
+                                        <p:attrNameLst>
+                                          <p:attrName>style.visibility</p:attrName>
+                                        </p:attrNameLst>
+                                      </p:cBhvr>
+                                      <p:to>
+                                        <p:strVal val="visible"/>
+                                      </p:to>
+                                    </p:set>
+                                    <p:animEffect transition="in" filter="fade">
+                                      <p:cBhvr>
+                                        <p:cTn id="51" dur="2000"/>
+                                        <p:tgtEl>
+                                          <p:spTgt spid="6"/>
+                                        </p:tgtEl>
+                                      </p:cBhvr>
+                                    </p:animEffect>
+                                    <p:anim calcmode="lin" valueType="num">
+                                      <p:cBhvr>
+                                        <p:cTn id="52" dur="2000" fill="hold"/>
+                                        <p:tgtEl>
+                                          <p:spTgt spid="6"/>
+                                        </p:tgtEl>
+                                        <p:attrNameLst>
+                                          <p:attrName>ppt_w</p:attrName>
+                                        </p:attrNameLst>
+                                      </p:cBhvr>
+                                      <p:tavLst>
+                                        <p:tav tm="0" fmla="#ppt_w*sin(2.5*pi*$)">
+                                          <p:val>
+                                            <p:fltVal val="0"/>
+                                          </p:val>
+                                        </p:tav>
+                                        <p:tav tm="100000">
+                                          <p:val>
+                                            <p:fltVal val="1"/>
+                                          </p:val>
+                                        </p:tav>
+                                      </p:tavLst>
+                                    </p:anim>
+                                    <p:anim calcmode="lin" valueType="num">
+                                      <p:cBhvr>
+                                        <p:cTn id="53" dur="2000" fill="hold"/>
+                                        <p:tgtEl>
+                                          <p:spTgt spid="6"/>
+                                        </p:tgtEl>
+                                        <p:attrNameLst>
+                                          <p:attrName>ppt_h</p:attrName>
+                                        </p:attrNameLst>
+                                      </p:cBhvr>
+                                      <p:tavLst>
+                                        <p:tav tm="0">
+                                          <p:val>
+                                            <p:strVal val="#ppt_h"/>
+                                          </p:val>
+                                        </p:tav>
+                                        <p:tav tm="100000">
+                                          <p:val>
+                                            <p:strVal val="#ppt_h"/>
+                                          </p:val>
+                                        </p:tav>
+                                      </p:tavLst>
+                                    </p:anim>
+                                  </p:childTnLst>
+                                </p:cTn>
+                              </p:par>
+                            </p:childTnLst>
+                          </p:cTn>
+                        </p:par>
+                      </p:childTnLst>
+                    </p:cTn>
+                  </p:par>
+                </p:childTnLst>
+              </p:cTn>
+              <p:prevCondLst>
+                <p:cond evt="onPrev" delay="0">
+                  <p:tgtEl>
+                    <p:sldTgt/>
+                  </p:tgtEl>
+                </p:cond>
+              </p:prevCondLst>
+              <p:nextCondLst>
+                <p:cond evt="onNext" delay="0">
+                  <p:tgtEl>
+                    <p:sldTgt/>
+                  </p:tgtEl>
+                </p:cond>
+              </p:nextCondLst>
+            </p:seq>
+          </p:childTnLst>
+        </p:cTn>
+      </p:par>
+    </p:tnLst>
+    <p:bldLst>
+      <p:bldP spid="2" grpId="0"/>
+      <p:bldP spid="3" grpId="0"/>
+      <p:bldP spid="4" grpId="0"/>
+    </p:bldLst>
+  </p:timing>
 </p:sld>
 </file>
 
@@ -6203,7 +7411,7 @@
         <p:spPr>
           <a:xfrm>
             <a:off x="461433" y="861774"/>
-            <a:ext cx="11269133" cy="3462486"/>
+            <a:ext cx="11269133" cy="4124206"/>
           </a:xfrm>
           <a:prstGeom prst="rect">
             <a:avLst/>
@@ -6337,11 +7545,65 @@
                 <a:latin typeface="Times New Roman" panose="02020603050405020304" pitchFamily="18" charset="0"/>
                 <a:cs typeface="Times New Roman" panose="02020603050405020304" pitchFamily="18" charset="0"/>
               </a:rPr>
-              <a:t>	-Dokumentáció, prezentáció elkészítése</a:t>
+              <a:t>	-Dokumentáció, prezentáció elkezdése</a:t>
+            </a:r>
+          </a:p>
+          <a:p>
+            <a:r>
+              <a:rPr lang="hu-HU" sz="2500" i="1" dirty="0">
+                <a:latin typeface="Times New Roman" panose="02020603050405020304" pitchFamily="18" charset="0"/>
+                <a:cs typeface="Times New Roman" panose="02020603050405020304" pitchFamily="18" charset="0"/>
+              </a:rPr>
+              <a:t>4. hét:</a:t>
+            </a:r>
+          </a:p>
+          <a:p>
+            <a:r>
+              <a:rPr lang="hu-HU" dirty="0">
+                <a:latin typeface="Times New Roman" panose="02020603050405020304" pitchFamily="18" charset="0"/>
+                <a:cs typeface="Times New Roman" panose="02020603050405020304" pitchFamily="18" charset="0"/>
+              </a:rPr>
+              <a:t>	-Dokumentáció, prezentáció befejezése</a:t>
             </a:r>
           </a:p>
         </p:txBody>
       </p:sp>
+      <p:pic>
+        <p:nvPicPr>
+          <p:cNvPr id="5" name="Kép 4">
+            <a:extLst>
+              <a:ext uri="{FF2B5EF4-FFF2-40B4-BE49-F238E27FC236}">
+                <a16:creationId xmlns:a16="http://schemas.microsoft.com/office/drawing/2014/main" id="{BD9492A4-0755-4B00-8C38-38F187AA7910}"/>
+              </a:ext>
+            </a:extLst>
+          </p:cNvPr>
+          <p:cNvPicPr>
+            <a:picLocks noChangeAspect="1"/>
+          </p:cNvPicPr>
+          <p:nvPr/>
+        </p:nvPicPr>
+        <p:blipFill>
+          <a:blip r:embed="rId2">
+            <a:extLst>
+              <a:ext uri="{28A0092B-C50C-407E-A947-70E740481C1C}">
+                <a14:useLocalDpi xmlns:a14="http://schemas.microsoft.com/office/drawing/2010/main" val="0"/>
+              </a:ext>
+            </a:extLst>
+          </a:blip>
+          <a:stretch>
+            <a:fillRect/>
+          </a:stretch>
+        </p:blipFill>
+        <p:spPr>
+          <a:xfrm>
+            <a:off x="6750050" y="1052446"/>
+            <a:ext cx="4686300" cy="4829175"/>
+          </a:xfrm>
+          <a:prstGeom prst="rect">
+            <a:avLst/>
+          </a:prstGeom>
+        </p:spPr>
+      </p:pic>
     </p:spTree>
     <p:extLst>
       <p:ext uri="{BB962C8B-B14F-4D97-AF65-F5344CB8AC3E}">
@@ -6352,6 +7614,4137 @@
   <p:clrMapOvr>
     <a:masterClrMapping/>
   </p:clrMapOvr>
+  <p:timing>
+    <p:tnLst>
+      <p:par>
+        <p:cTn id="1" dur="indefinite" restart="never" nodeType="tmRoot">
+          <p:childTnLst>
+            <p:seq concurrent="1" nextAc="seek">
+              <p:cTn id="2" dur="indefinite" nodeType="mainSeq">
+                <p:childTnLst>
+                  <p:par>
+                    <p:cTn id="3" fill="hold">
+                      <p:stCondLst>
+                        <p:cond delay="indefinite"/>
+                      </p:stCondLst>
+                      <p:childTnLst>
+                        <p:par>
+                          <p:cTn id="4" fill="hold">
+                            <p:stCondLst>
+                              <p:cond delay="0"/>
+                            </p:stCondLst>
+                            <p:childTnLst>
+                              <p:par>
+                                <p:cTn id="5" presetID="26" presetClass="entr" presetSubtype="0" fill="hold" grpId="0" nodeType="clickEffect">
+                                  <p:stCondLst>
+                                    <p:cond delay="0"/>
+                                  </p:stCondLst>
+                                  <p:childTnLst>
+                                    <p:set>
+                                      <p:cBhvr>
+                                        <p:cTn id="6" dur="1" fill="hold">
+                                          <p:stCondLst>
+                                            <p:cond delay="0"/>
+                                          </p:stCondLst>
+                                        </p:cTn>
+                                        <p:tgtEl>
+                                          <p:spTgt spid="2"/>
+                                        </p:tgtEl>
+                                        <p:attrNameLst>
+                                          <p:attrName>style.visibility</p:attrName>
+                                        </p:attrNameLst>
+                                      </p:cBhvr>
+                                      <p:to>
+                                        <p:strVal val="visible"/>
+                                      </p:to>
+                                    </p:set>
+                                    <p:animEffect transition="in" filter="wipe(down)">
+                                      <p:cBhvr>
+                                        <p:cTn id="7" dur="580">
+                                          <p:stCondLst>
+                                            <p:cond delay="0"/>
+                                          </p:stCondLst>
+                                        </p:cTn>
+                                        <p:tgtEl>
+                                          <p:spTgt spid="2"/>
+                                        </p:tgtEl>
+                                      </p:cBhvr>
+                                    </p:animEffect>
+                                    <p:anim calcmode="lin" valueType="num">
+                                      <p:cBhvr>
+                                        <p:cTn id="8" dur="1822" tmFilter="0,0; 0.14,0.36; 0.43,0.73; 0.71,0.91; 1.0,1.0">
+                                          <p:stCondLst>
+                                            <p:cond delay="0"/>
+                                          </p:stCondLst>
+                                        </p:cTn>
+                                        <p:tgtEl>
+                                          <p:spTgt spid="2"/>
+                                        </p:tgtEl>
+                                        <p:attrNameLst>
+                                          <p:attrName>ppt_x</p:attrName>
+                                        </p:attrNameLst>
+                                      </p:cBhvr>
+                                      <p:tavLst>
+                                        <p:tav tm="0">
+                                          <p:val>
+                                            <p:strVal val="#ppt_x-0.25"/>
+                                          </p:val>
+                                        </p:tav>
+                                        <p:tav tm="100000">
+                                          <p:val>
+                                            <p:strVal val="#ppt_x"/>
+                                          </p:val>
+                                        </p:tav>
+                                      </p:tavLst>
+                                    </p:anim>
+                                    <p:anim calcmode="lin" valueType="num">
+                                      <p:cBhvr>
+                                        <p:cTn id="9" dur="664" tmFilter="0.0,0.0; 0.25,0.07; 0.50,0.2; 0.75,0.467; 1.0,1.0">
+                                          <p:stCondLst>
+                                            <p:cond delay="0"/>
+                                          </p:stCondLst>
+                                        </p:cTn>
+                                        <p:tgtEl>
+                                          <p:spTgt spid="2"/>
+                                        </p:tgtEl>
+                                        <p:attrNameLst>
+                                          <p:attrName>ppt_y</p:attrName>
+                                        </p:attrNameLst>
+                                      </p:cBhvr>
+                                      <p:tavLst>
+                                        <p:tav tm="0" fmla="#ppt_y-sin(pi*$)/3">
+                                          <p:val>
+                                            <p:fltVal val="0.5"/>
+                                          </p:val>
+                                        </p:tav>
+                                        <p:tav tm="100000">
+                                          <p:val>
+                                            <p:fltVal val="1"/>
+                                          </p:val>
+                                        </p:tav>
+                                      </p:tavLst>
+                                    </p:anim>
+                                    <p:anim calcmode="lin" valueType="num">
+                                      <p:cBhvr>
+                                        <p:cTn id="10" dur="664" tmFilter="0, 0; 0.125,0.2665; 0.25,0.4; 0.375,0.465; 0.5,0.5;  0.625,0.535; 0.75,0.6; 0.875,0.7335; 1,1">
+                                          <p:stCondLst>
+                                            <p:cond delay="664"/>
+                                          </p:stCondLst>
+                                        </p:cTn>
+                                        <p:tgtEl>
+                                          <p:spTgt spid="2"/>
+                                        </p:tgtEl>
+                                        <p:attrNameLst>
+                                          <p:attrName>ppt_y</p:attrName>
+                                        </p:attrNameLst>
+                                      </p:cBhvr>
+                                      <p:tavLst>
+                                        <p:tav tm="0" fmla="#ppt_y-sin(pi*$)/9">
+                                          <p:val>
+                                            <p:fltVal val="0"/>
+                                          </p:val>
+                                        </p:tav>
+                                        <p:tav tm="100000">
+                                          <p:val>
+                                            <p:fltVal val="1"/>
+                                          </p:val>
+                                        </p:tav>
+                                      </p:tavLst>
+                                    </p:anim>
+                                    <p:anim calcmode="lin" valueType="num">
+                                      <p:cBhvr>
+                                        <p:cTn id="11" dur="332" tmFilter="0, 0; 0.125,0.2665; 0.25,0.4; 0.375,0.465; 0.5,0.5;  0.625,0.535; 0.75,0.6; 0.875,0.7335; 1,1">
+                                          <p:stCondLst>
+                                            <p:cond delay="1324"/>
+                                          </p:stCondLst>
+                                        </p:cTn>
+                                        <p:tgtEl>
+                                          <p:spTgt spid="2"/>
+                                        </p:tgtEl>
+                                        <p:attrNameLst>
+                                          <p:attrName>ppt_y</p:attrName>
+                                        </p:attrNameLst>
+                                      </p:cBhvr>
+                                      <p:tavLst>
+                                        <p:tav tm="0" fmla="#ppt_y-sin(pi*$)/27">
+                                          <p:val>
+                                            <p:fltVal val="0"/>
+                                          </p:val>
+                                        </p:tav>
+                                        <p:tav tm="100000">
+                                          <p:val>
+                                            <p:fltVal val="1"/>
+                                          </p:val>
+                                        </p:tav>
+                                      </p:tavLst>
+                                    </p:anim>
+                                    <p:anim calcmode="lin" valueType="num">
+                                      <p:cBhvr>
+                                        <p:cTn id="12" dur="164" tmFilter="0, 0; 0.125,0.2665; 0.25,0.4; 0.375,0.465; 0.5,0.5;  0.625,0.535; 0.75,0.6; 0.875,0.7335; 1,1">
+                                          <p:stCondLst>
+                                            <p:cond delay="1656"/>
+                                          </p:stCondLst>
+                                        </p:cTn>
+                                        <p:tgtEl>
+                                          <p:spTgt spid="2"/>
+                                        </p:tgtEl>
+                                        <p:attrNameLst>
+                                          <p:attrName>ppt_y</p:attrName>
+                                        </p:attrNameLst>
+                                      </p:cBhvr>
+                                      <p:tavLst>
+                                        <p:tav tm="0" fmla="#ppt_y-sin(pi*$)/81">
+                                          <p:val>
+                                            <p:fltVal val="0"/>
+                                          </p:val>
+                                        </p:tav>
+                                        <p:tav tm="100000">
+                                          <p:val>
+                                            <p:fltVal val="1"/>
+                                          </p:val>
+                                        </p:tav>
+                                      </p:tavLst>
+                                    </p:anim>
+                                    <p:animScale>
+                                      <p:cBhvr>
+                                        <p:cTn id="13" dur="26">
+                                          <p:stCondLst>
+                                            <p:cond delay="650"/>
+                                          </p:stCondLst>
+                                        </p:cTn>
+                                        <p:tgtEl>
+                                          <p:spTgt spid="2"/>
+                                        </p:tgtEl>
+                                      </p:cBhvr>
+                                      <p:to x="100000" y="60000"/>
+                                    </p:animScale>
+                                    <p:animScale>
+                                      <p:cBhvr>
+                                        <p:cTn id="14" dur="166" decel="50000">
+                                          <p:stCondLst>
+                                            <p:cond delay="676"/>
+                                          </p:stCondLst>
+                                        </p:cTn>
+                                        <p:tgtEl>
+                                          <p:spTgt spid="2"/>
+                                        </p:tgtEl>
+                                      </p:cBhvr>
+                                      <p:to x="100000" y="100000"/>
+                                    </p:animScale>
+                                    <p:animScale>
+                                      <p:cBhvr>
+                                        <p:cTn id="15" dur="26">
+                                          <p:stCondLst>
+                                            <p:cond delay="1312"/>
+                                          </p:stCondLst>
+                                        </p:cTn>
+                                        <p:tgtEl>
+                                          <p:spTgt spid="2"/>
+                                        </p:tgtEl>
+                                      </p:cBhvr>
+                                      <p:to x="100000" y="80000"/>
+                                    </p:animScale>
+                                    <p:animScale>
+                                      <p:cBhvr>
+                                        <p:cTn id="16" dur="166" decel="50000">
+                                          <p:stCondLst>
+                                            <p:cond delay="1338"/>
+                                          </p:stCondLst>
+                                        </p:cTn>
+                                        <p:tgtEl>
+                                          <p:spTgt spid="2"/>
+                                        </p:tgtEl>
+                                      </p:cBhvr>
+                                      <p:to x="100000" y="100000"/>
+                                    </p:animScale>
+                                    <p:animScale>
+                                      <p:cBhvr>
+                                        <p:cTn id="17" dur="26">
+                                          <p:stCondLst>
+                                            <p:cond delay="1642"/>
+                                          </p:stCondLst>
+                                        </p:cTn>
+                                        <p:tgtEl>
+                                          <p:spTgt spid="2"/>
+                                        </p:tgtEl>
+                                      </p:cBhvr>
+                                      <p:to x="100000" y="90000"/>
+                                    </p:animScale>
+                                    <p:animScale>
+                                      <p:cBhvr>
+                                        <p:cTn id="18" dur="166" decel="50000">
+                                          <p:stCondLst>
+                                            <p:cond delay="1668"/>
+                                          </p:stCondLst>
+                                        </p:cTn>
+                                        <p:tgtEl>
+                                          <p:spTgt spid="2"/>
+                                        </p:tgtEl>
+                                      </p:cBhvr>
+                                      <p:to x="100000" y="100000"/>
+                                    </p:animScale>
+                                    <p:animScale>
+                                      <p:cBhvr>
+                                        <p:cTn id="19" dur="26">
+                                          <p:stCondLst>
+                                            <p:cond delay="1808"/>
+                                          </p:stCondLst>
+                                        </p:cTn>
+                                        <p:tgtEl>
+                                          <p:spTgt spid="2"/>
+                                        </p:tgtEl>
+                                      </p:cBhvr>
+                                      <p:to x="100000" y="95000"/>
+                                    </p:animScale>
+                                    <p:animScale>
+                                      <p:cBhvr>
+                                        <p:cTn id="20" dur="166" decel="50000">
+                                          <p:stCondLst>
+                                            <p:cond delay="1834"/>
+                                          </p:stCondLst>
+                                        </p:cTn>
+                                        <p:tgtEl>
+                                          <p:spTgt spid="2"/>
+                                        </p:tgtEl>
+                                      </p:cBhvr>
+                                      <p:to x="100000" y="100000"/>
+                                    </p:animScale>
+                                  </p:childTnLst>
+                                </p:cTn>
+                              </p:par>
+                            </p:childTnLst>
+                          </p:cTn>
+                        </p:par>
+                      </p:childTnLst>
+                    </p:cTn>
+                  </p:par>
+                  <p:par>
+                    <p:cTn id="21" fill="hold">
+                      <p:stCondLst>
+                        <p:cond delay="indefinite"/>
+                      </p:stCondLst>
+                      <p:childTnLst>
+                        <p:par>
+                          <p:cTn id="22" fill="hold">
+                            <p:stCondLst>
+                              <p:cond delay="0"/>
+                            </p:stCondLst>
+                            <p:childTnLst>
+                              <p:par>
+                                <p:cTn id="23" presetID="26" presetClass="entr" presetSubtype="0" fill="hold" grpId="0" nodeType="clickEffect">
+                                  <p:stCondLst>
+                                    <p:cond delay="0"/>
+                                  </p:stCondLst>
+                                  <p:childTnLst>
+                                    <p:set>
+                                      <p:cBhvr>
+                                        <p:cTn id="24" dur="1" fill="hold">
+                                          <p:stCondLst>
+                                            <p:cond delay="0"/>
+                                          </p:stCondLst>
+                                        </p:cTn>
+                                        <p:tgtEl>
+                                          <p:spTgt spid="3"/>
+                                        </p:tgtEl>
+                                        <p:attrNameLst>
+                                          <p:attrName>style.visibility</p:attrName>
+                                        </p:attrNameLst>
+                                      </p:cBhvr>
+                                      <p:to>
+                                        <p:strVal val="visible"/>
+                                      </p:to>
+                                    </p:set>
+                                    <p:animEffect transition="in" filter="wipe(down)">
+                                      <p:cBhvr>
+                                        <p:cTn id="25" dur="580">
+                                          <p:stCondLst>
+                                            <p:cond delay="0"/>
+                                          </p:stCondLst>
+                                        </p:cTn>
+                                        <p:tgtEl>
+                                          <p:spTgt spid="3"/>
+                                        </p:tgtEl>
+                                      </p:cBhvr>
+                                    </p:animEffect>
+                                    <p:anim calcmode="lin" valueType="num">
+                                      <p:cBhvr>
+                                        <p:cTn id="26" dur="1822" tmFilter="0,0; 0.14,0.36; 0.43,0.73; 0.71,0.91; 1.0,1.0">
+                                          <p:stCondLst>
+                                            <p:cond delay="0"/>
+                                          </p:stCondLst>
+                                        </p:cTn>
+                                        <p:tgtEl>
+                                          <p:spTgt spid="3"/>
+                                        </p:tgtEl>
+                                        <p:attrNameLst>
+                                          <p:attrName>ppt_x</p:attrName>
+                                        </p:attrNameLst>
+                                      </p:cBhvr>
+                                      <p:tavLst>
+                                        <p:tav tm="0">
+                                          <p:val>
+                                            <p:strVal val="#ppt_x-0.25"/>
+                                          </p:val>
+                                        </p:tav>
+                                        <p:tav tm="100000">
+                                          <p:val>
+                                            <p:strVal val="#ppt_x"/>
+                                          </p:val>
+                                        </p:tav>
+                                      </p:tavLst>
+                                    </p:anim>
+                                    <p:anim calcmode="lin" valueType="num">
+                                      <p:cBhvr>
+                                        <p:cTn id="27" dur="664" tmFilter="0.0,0.0; 0.25,0.07; 0.50,0.2; 0.75,0.467; 1.0,1.0">
+                                          <p:stCondLst>
+                                            <p:cond delay="0"/>
+                                          </p:stCondLst>
+                                        </p:cTn>
+                                        <p:tgtEl>
+                                          <p:spTgt spid="3"/>
+                                        </p:tgtEl>
+                                        <p:attrNameLst>
+                                          <p:attrName>ppt_y</p:attrName>
+                                        </p:attrNameLst>
+                                      </p:cBhvr>
+                                      <p:tavLst>
+                                        <p:tav tm="0" fmla="#ppt_y-sin(pi*$)/3">
+                                          <p:val>
+                                            <p:fltVal val="0.5"/>
+                                          </p:val>
+                                        </p:tav>
+                                        <p:tav tm="100000">
+                                          <p:val>
+                                            <p:fltVal val="1"/>
+                                          </p:val>
+                                        </p:tav>
+                                      </p:tavLst>
+                                    </p:anim>
+                                    <p:anim calcmode="lin" valueType="num">
+                                      <p:cBhvr>
+                                        <p:cTn id="28" dur="664" tmFilter="0, 0; 0.125,0.2665; 0.25,0.4; 0.375,0.465; 0.5,0.5;  0.625,0.535; 0.75,0.6; 0.875,0.7335; 1,1">
+                                          <p:stCondLst>
+                                            <p:cond delay="664"/>
+                                          </p:stCondLst>
+                                        </p:cTn>
+                                        <p:tgtEl>
+                                          <p:spTgt spid="3"/>
+                                        </p:tgtEl>
+                                        <p:attrNameLst>
+                                          <p:attrName>ppt_y</p:attrName>
+                                        </p:attrNameLst>
+                                      </p:cBhvr>
+                                      <p:tavLst>
+                                        <p:tav tm="0" fmla="#ppt_y-sin(pi*$)/9">
+                                          <p:val>
+                                            <p:fltVal val="0"/>
+                                          </p:val>
+                                        </p:tav>
+                                        <p:tav tm="100000">
+                                          <p:val>
+                                            <p:fltVal val="1"/>
+                                          </p:val>
+                                        </p:tav>
+                                      </p:tavLst>
+                                    </p:anim>
+                                    <p:anim calcmode="lin" valueType="num">
+                                      <p:cBhvr>
+                                        <p:cTn id="29" dur="332" tmFilter="0, 0; 0.125,0.2665; 0.25,0.4; 0.375,0.465; 0.5,0.5;  0.625,0.535; 0.75,0.6; 0.875,0.7335; 1,1">
+                                          <p:stCondLst>
+                                            <p:cond delay="1324"/>
+                                          </p:stCondLst>
+                                        </p:cTn>
+                                        <p:tgtEl>
+                                          <p:spTgt spid="3"/>
+                                        </p:tgtEl>
+                                        <p:attrNameLst>
+                                          <p:attrName>ppt_y</p:attrName>
+                                        </p:attrNameLst>
+                                      </p:cBhvr>
+                                      <p:tavLst>
+                                        <p:tav tm="0" fmla="#ppt_y-sin(pi*$)/27">
+                                          <p:val>
+                                            <p:fltVal val="0"/>
+                                          </p:val>
+                                        </p:tav>
+                                        <p:tav tm="100000">
+                                          <p:val>
+                                            <p:fltVal val="1"/>
+                                          </p:val>
+                                        </p:tav>
+                                      </p:tavLst>
+                                    </p:anim>
+                                    <p:anim calcmode="lin" valueType="num">
+                                      <p:cBhvr>
+                                        <p:cTn id="30" dur="164" tmFilter="0, 0; 0.125,0.2665; 0.25,0.4; 0.375,0.465; 0.5,0.5;  0.625,0.535; 0.75,0.6; 0.875,0.7335; 1,1">
+                                          <p:stCondLst>
+                                            <p:cond delay="1656"/>
+                                          </p:stCondLst>
+                                        </p:cTn>
+                                        <p:tgtEl>
+                                          <p:spTgt spid="3"/>
+                                        </p:tgtEl>
+                                        <p:attrNameLst>
+                                          <p:attrName>ppt_y</p:attrName>
+                                        </p:attrNameLst>
+                                      </p:cBhvr>
+                                      <p:tavLst>
+                                        <p:tav tm="0" fmla="#ppt_y-sin(pi*$)/81">
+                                          <p:val>
+                                            <p:fltVal val="0"/>
+                                          </p:val>
+                                        </p:tav>
+                                        <p:tav tm="100000">
+                                          <p:val>
+                                            <p:fltVal val="1"/>
+                                          </p:val>
+                                        </p:tav>
+                                      </p:tavLst>
+                                    </p:anim>
+                                    <p:animScale>
+                                      <p:cBhvr>
+                                        <p:cTn id="31" dur="26">
+                                          <p:stCondLst>
+                                            <p:cond delay="650"/>
+                                          </p:stCondLst>
+                                        </p:cTn>
+                                        <p:tgtEl>
+                                          <p:spTgt spid="3"/>
+                                        </p:tgtEl>
+                                      </p:cBhvr>
+                                      <p:to x="100000" y="60000"/>
+                                    </p:animScale>
+                                    <p:animScale>
+                                      <p:cBhvr>
+                                        <p:cTn id="32" dur="166" decel="50000">
+                                          <p:stCondLst>
+                                            <p:cond delay="676"/>
+                                          </p:stCondLst>
+                                        </p:cTn>
+                                        <p:tgtEl>
+                                          <p:spTgt spid="3"/>
+                                        </p:tgtEl>
+                                      </p:cBhvr>
+                                      <p:to x="100000" y="100000"/>
+                                    </p:animScale>
+                                    <p:animScale>
+                                      <p:cBhvr>
+                                        <p:cTn id="33" dur="26">
+                                          <p:stCondLst>
+                                            <p:cond delay="1312"/>
+                                          </p:stCondLst>
+                                        </p:cTn>
+                                        <p:tgtEl>
+                                          <p:spTgt spid="3"/>
+                                        </p:tgtEl>
+                                      </p:cBhvr>
+                                      <p:to x="100000" y="80000"/>
+                                    </p:animScale>
+                                    <p:animScale>
+                                      <p:cBhvr>
+                                        <p:cTn id="34" dur="166" decel="50000">
+                                          <p:stCondLst>
+                                            <p:cond delay="1338"/>
+                                          </p:stCondLst>
+                                        </p:cTn>
+                                        <p:tgtEl>
+                                          <p:spTgt spid="3"/>
+                                        </p:tgtEl>
+                                      </p:cBhvr>
+                                      <p:to x="100000" y="100000"/>
+                                    </p:animScale>
+                                    <p:animScale>
+                                      <p:cBhvr>
+                                        <p:cTn id="35" dur="26">
+                                          <p:stCondLst>
+                                            <p:cond delay="1642"/>
+                                          </p:stCondLst>
+                                        </p:cTn>
+                                        <p:tgtEl>
+                                          <p:spTgt spid="3"/>
+                                        </p:tgtEl>
+                                      </p:cBhvr>
+                                      <p:to x="100000" y="90000"/>
+                                    </p:animScale>
+                                    <p:animScale>
+                                      <p:cBhvr>
+                                        <p:cTn id="36" dur="166" decel="50000">
+                                          <p:stCondLst>
+                                            <p:cond delay="1668"/>
+                                          </p:stCondLst>
+                                        </p:cTn>
+                                        <p:tgtEl>
+                                          <p:spTgt spid="3"/>
+                                        </p:tgtEl>
+                                      </p:cBhvr>
+                                      <p:to x="100000" y="100000"/>
+                                    </p:animScale>
+                                    <p:animScale>
+                                      <p:cBhvr>
+                                        <p:cTn id="37" dur="26">
+                                          <p:stCondLst>
+                                            <p:cond delay="1808"/>
+                                          </p:stCondLst>
+                                        </p:cTn>
+                                        <p:tgtEl>
+                                          <p:spTgt spid="3"/>
+                                        </p:tgtEl>
+                                      </p:cBhvr>
+                                      <p:to x="100000" y="95000"/>
+                                    </p:animScale>
+                                    <p:animScale>
+                                      <p:cBhvr>
+                                        <p:cTn id="38" dur="166" decel="50000">
+                                          <p:stCondLst>
+                                            <p:cond delay="1834"/>
+                                          </p:stCondLst>
+                                        </p:cTn>
+                                        <p:tgtEl>
+                                          <p:spTgt spid="3"/>
+                                        </p:tgtEl>
+                                      </p:cBhvr>
+                                      <p:to x="100000" y="100000"/>
+                                    </p:animScale>
+                                  </p:childTnLst>
+                                </p:cTn>
+                              </p:par>
+                            </p:childTnLst>
+                          </p:cTn>
+                        </p:par>
+                      </p:childTnLst>
+                    </p:cTn>
+                  </p:par>
+                  <p:par>
+                    <p:cTn id="39" fill="hold">
+                      <p:stCondLst>
+                        <p:cond delay="indefinite"/>
+                      </p:stCondLst>
+                      <p:childTnLst>
+                        <p:par>
+                          <p:cTn id="40" fill="hold">
+                            <p:stCondLst>
+                              <p:cond delay="0"/>
+                            </p:stCondLst>
+                            <p:childTnLst>
+                              <p:par>
+                                <p:cTn id="41" presetID="45" presetClass="entr" presetSubtype="0" fill="hold" nodeType="clickEffect">
+                                  <p:stCondLst>
+                                    <p:cond delay="0"/>
+                                  </p:stCondLst>
+                                  <p:childTnLst>
+                                    <p:set>
+                                      <p:cBhvr>
+                                        <p:cTn id="42" dur="1" fill="hold">
+                                          <p:stCondLst>
+                                            <p:cond delay="0"/>
+                                          </p:stCondLst>
+                                        </p:cTn>
+                                        <p:tgtEl>
+                                          <p:spTgt spid="5"/>
+                                        </p:tgtEl>
+                                        <p:attrNameLst>
+                                          <p:attrName>style.visibility</p:attrName>
+                                        </p:attrNameLst>
+                                      </p:cBhvr>
+                                      <p:to>
+                                        <p:strVal val="visible"/>
+                                      </p:to>
+                                    </p:set>
+                                    <p:animEffect transition="in" filter="fade">
+                                      <p:cBhvr>
+                                        <p:cTn id="43" dur="2000"/>
+                                        <p:tgtEl>
+                                          <p:spTgt spid="5"/>
+                                        </p:tgtEl>
+                                      </p:cBhvr>
+                                    </p:animEffect>
+                                    <p:anim calcmode="lin" valueType="num">
+                                      <p:cBhvr>
+                                        <p:cTn id="44" dur="2000" fill="hold"/>
+                                        <p:tgtEl>
+                                          <p:spTgt spid="5"/>
+                                        </p:tgtEl>
+                                        <p:attrNameLst>
+                                          <p:attrName>ppt_w</p:attrName>
+                                        </p:attrNameLst>
+                                      </p:cBhvr>
+                                      <p:tavLst>
+                                        <p:tav tm="0" fmla="#ppt_w*sin(2.5*pi*$)">
+                                          <p:val>
+                                            <p:fltVal val="0"/>
+                                          </p:val>
+                                        </p:tav>
+                                        <p:tav tm="100000">
+                                          <p:val>
+                                            <p:fltVal val="1"/>
+                                          </p:val>
+                                        </p:tav>
+                                      </p:tavLst>
+                                    </p:anim>
+                                    <p:anim calcmode="lin" valueType="num">
+                                      <p:cBhvr>
+                                        <p:cTn id="45" dur="2000" fill="hold"/>
+                                        <p:tgtEl>
+                                          <p:spTgt spid="5"/>
+                                        </p:tgtEl>
+                                        <p:attrNameLst>
+                                          <p:attrName>ppt_h</p:attrName>
+                                        </p:attrNameLst>
+                                      </p:cBhvr>
+                                      <p:tavLst>
+                                        <p:tav tm="0">
+                                          <p:val>
+                                            <p:strVal val="#ppt_h"/>
+                                          </p:val>
+                                        </p:tav>
+                                        <p:tav tm="100000">
+                                          <p:val>
+                                            <p:strVal val="#ppt_h"/>
+                                          </p:val>
+                                        </p:tav>
+                                      </p:tavLst>
+                                    </p:anim>
+                                  </p:childTnLst>
+                                </p:cTn>
+                              </p:par>
+                            </p:childTnLst>
+                          </p:cTn>
+                        </p:par>
+                      </p:childTnLst>
+                    </p:cTn>
+                  </p:par>
+                </p:childTnLst>
+              </p:cTn>
+              <p:prevCondLst>
+                <p:cond evt="onPrev" delay="0">
+                  <p:tgtEl>
+                    <p:sldTgt/>
+                  </p:tgtEl>
+                </p:cond>
+              </p:prevCondLst>
+              <p:nextCondLst>
+                <p:cond evt="onNext" delay="0">
+                  <p:tgtEl>
+                    <p:sldTgt/>
+                  </p:tgtEl>
+                </p:cond>
+              </p:nextCondLst>
+            </p:seq>
+          </p:childTnLst>
+        </p:cTn>
+      </p:par>
+    </p:tnLst>
+    <p:bldLst>
+      <p:bldP spid="2" grpId="0"/>
+      <p:bldP spid="3" grpId="0"/>
+    </p:bldLst>
+  </p:timing>
+</p:sld>
+</file>
+
+<file path=ppt/slides/slide4.xml><?xml version="1.0" encoding="utf-8"?>
+<p:sld xmlns:a="http://schemas.openxmlformats.org/drawingml/2006/main" xmlns:r="http://schemas.openxmlformats.org/officeDocument/2006/relationships" xmlns:p="http://schemas.openxmlformats.org/presentationml/2006/main">
+  <p:cSld>
+    <p:spTree>
+      <p:nvGrpSpPr>
+        <p:cNvPr id="1" name=""/>
+        <p:cNvGrpSpPr/>
+        <p:nvPr/>
+      </p:nvGrpSpPr>
+      <p:grpSpPr>
+        <a:xfrm>
+          <a:off x="0" y="0"/>
+          <a:ext cx="0" cy="0"/>
+          <a:chOff x="0" y="0"/>
+          <a:chExt cx="0" cy="0"/>
+        </a:xfrm>
+      </p:grpSpPr>
+      <p:sp>
+        <p:nvSpPr>
+          <p:cNvPr id="2" name="Szövegdoboz 1">
+            <a:extLst>
+              <a:ext uri="{FF2B5EF4-FFF2-40B4-BE49-F238E27FC236}">
+                <a16:creationId xmlns:a16="http://schemas.microsoft.com/office/drawing/2014/main" id="{52B3E699-F8D5-4682-93CA-7379E24A3666}"/>
+              </a:ext>
+            </a:extLst>
+          </p:cNvPr>
+          <p:cNvSpPr txBox="1"/>
+          <p:nvPr/>
+        </p:nvSpPr>
+        <p:spPr>
+          <a:xfrm>
+            <a:off x="0" y="-59267"/>
+            <a:ext cx="5723467" cy="861774"/>
+          </a:xfrm>
+          <a:prstGeom prst="rect">
+            <a:avLst/>
+          </a:prstGeom>
+          <a:noFill/>
+        </p:spPr>
+        <p:txBody>
+          <a:bodyPr wrap="square" rtlCol="0">
+            <a:spAutoFit/>
+          </a:bodyPr>
+          <a:lstStyle/>
+          <a:p>
+            <a:r>
+              <a:rPr lang="hu-HU" sz="5000" b="1" dirty="0">
+                <a:latin typeface="Times New Roman" panose="02020603050405020304" pitchFamily="18" charset="0"/>
+                <a:cs typeface="Times New Roman" panose="02020603050405020304" pitchFamily="18" charset="0"/>
+              </a:rPr>
+              <a:t>Használt szoftverek</a:t>
+            </a:r>
+          </a:p>
+        </p:txBody>
+      </p:sp>
+      <p:sp>
+        <p:nvSpPr>
+          <p:cNvPr id="3" name="Szövegdoboz 2">
+            <a:extLst>
+              <a:ext uri="{FF2B5EF4-FFF2-40B4-BE49-F238E27FC236}">
+                <a16:creationId xmlns:a16="http://schemas.microsoft.com/office/drawing/2014/main" id="{DAC6CE00-CE2F-4BB7-914B-A4CC4EF406C1}"/>
+              </a:ext>
+            </a:extLst>
+          </p:cNvPr>
+          <p:cNvSpPr txBox="1"/>
+          <p:nvPr/>
+        </p:nvSpPr>
+        <p:spPr>
+          <a:xfrm>
+            <a:off x="524932" y="802507"/>
+            <a:ext cx="10456335" cy="3400931"/>
+          </a:xfrm>
+          <a:prstGeom prst="rect">
+            <a:avLst/>
+          </a:prstGeom>
+          <a:noFill/>
+        </p:spPr>
+        <p:txBody>
+          <a:bodyPr wrap="square" rtlCol="0">
+            <a:spAutoFit/>
+          </a:bodyPr>
+          <a:lstStyle/>
+          <a:p>
+            <a:r>
+              <a:rPr lang="hu-HU" sz="2500" i="1" dirty="0" err="1">
+                <a:latin typeface="Times New Roman" panose="02020603050405020304" pitchFamily="18" charset="0"/>
+                <a:cs typeface="Times New Roman" panose="02020603050405020304" pitchFamily="18" charset="0"/>
+              </a:rPr>
+              <a:t>Github</a:t>
+            </a:r>
+            <a:endParaRPr lang="hu-HU" sz="2500" i="1" dirty="0">
+              <a:latin typeface="Times New Roman" panose="02020603050405020304" pitchFamily="18" charset="0"/>
+              <a:cs typeface="Times New Roman" panose="02020603050405020304" pitchFamily="18" charset="0"/>
+            </a:endParaRPr>
+          </a:p>
+          <a:p>
+            <a:r>
+              <a:rPr lang="hu-HU" dirty="0"/>
+              <a:t>	-A weboldal tartalmainak tárolása, hogy más gépekről is elérhetőek legyenek</a:t>
+            </a:r>
+          </a:p>
+          <a:p>
+            <a:r>
+              <a:rPr lang="hu-HU" sz="2500" i="1" dirty="0">
+                <a:latin typeface="Times New Roman" panose="02020603050405020304" pitchFamily="18" charset="0"/>
+                <a:cs typeface="Times New Roman" panose="02020603050405020304" pitchFamily="18" charset="0"/>
+              </a:rPr>
+              <a:t>VS </a:t>
+            </a:r>
+            <a:r>
+              <a:rPr lang="hu-HU" sz="2500" i="1" dirty="0" err="1">
+                <a:latin typeface="Times New Roman" panose="02020603050405020304" pitchFamily="18" charset="0"/>
+                <a:cs typeface="Times New Roman" panose="02020603050405020304" pitchFamily="18" charset="0"/>
+              </a:rPr>
+              <a:t>Code</a:t>
+            </a:r>
+            <a:endParaRPr lang="hu-HU" sz="2500" i="1" dirty="0">
+              <a:latin typeface="Times New Roman" panose="02020603050405020304" pitchFamily="18" charset="0"/>
+              <a:cs typeface="Times New Roman" panose="02020603050405020304" pitchFamily="18" charset="0"/>
+            </a:endParaRPr>
+          </a:p>
+          <a:p>
+            <a:r>
+              <a:rPr lang="hu-HU" dirty="0"/>
+              <a:t>	-A weboldal kódolása (HTML, CSS)</a:t>
+            </a:r>
+          </a:p>
+          <a:p>
+            <a:r>
+              <a:rPr lang="hu-HU" sz="2500" i="1" dirty="0" err="1">
+                <a:latin typeface="Times New Roman" panose="02020603050405020304" pitchFamily="18" charset="0"/>
+                <a:cs typeface="Times New Roman" panose="02020603050405020304" pitchFamily="18" charset="0"/>
+              </a:rPr>
+              <a:t>Excalidraw</a:t>
+            </a:r>
+            <a:endParaRPr lang="hu-HU" sz="2500" i="1" dirty="0">
+              <a:latin typeface="Times New Roman" panose="02020603050405020304" pitchFamily="18" charset="0"/>
+              <a:cs typeface="Times New Roman" panose="02020603050405020304" pitchFamily="18" charset="0"/>
+            </a:endParaRPr>
+          </a:p>
+          <a:p>
+            <a:r>
+              <a:rPr lang="hu-HU" dirty="0"/>
+              <a:t>	-A weboldal megtervezése</a:t>
+            </a:r>
+          </a:p>
+          <a:p>
+            <a:r>
+              <a:rPr lang="hu-HU" sz="2500" i="1" dirty="0" err="1">
+                <a:latin typeface="Times New Roman" panose="02020603050405020304" pitchFamily="18" charset="0"/>
+                <a:cs typeface="Times New Roman" panose="02020603050405020304" pitchFamily="18" charset="0"/>
+              </a:rPr>
+              <a:t>Background</a:t>
+            </a:r>
+            <a:r>
+              <a:rPr lang="hu-HU" sz="2500" i="1" dirty="0">
+                <a:latin typeface="Times New Roman" panose="02020603050405020304" pitchFamily="18" charset="0"/>
+                <a:cs typeface="Times New Roman" panose="02020603050405020304" pitchFamily="18" charset="0"/>
+              </a:rPr>
+              <a:t> </a:t>
+            </a:r>
+            <a:r>
+              <a:rPr lang="hu-HU" sz="2500" i="1" dirty="0" err="1">
+                <a:latin typeface="Times New Roman" panose="02020603050405020304" pitchFamily="18" charset="0"/>
+                <a:cs typeface="Times New Roman" panose="02020603050405020304" pitchFamily="18" charset="0"/>
+              </a:rPr>
+              <a:t>remover</a:t>
+            </a:r>
+            <a:endParaRPr lang="hu-HU" sz="2500" i="1" dirty="0">
+              <a:latin typeface="Times New Roman" panose="02020603050405020304" pitchFamily="18" charset="0"/>
+              <a:cs typeface="Times New Roman" panose="02020603050405020304" pitchFamily="18" charset="0"/>
+            </a:endParaRPr>
+          </a:p>
+          <a:p>
+            <a:r>
+              <a:rPr lang="hu-HU" dirty="0"/>
+              <a:t>	-A prezentáció és a weboldal képeinek hátterének eltávolítása</a:t>
+            </a:r>
+          </a:p>
+          <a:p>
+            <a:r>
+              <a:rPr lang="hu-HU" sz="2500" i="1" dirty="0" err="1">
+                <a:latin typeface="Times New Roman" panose="02020603050405020304" pitchFamily="18" charset="0"/>
+                <a:cs typeface="Times New Roman" panose="02020603050405020304" pitchFamily="18" charset="0"/>
+              </a:rPr>
+              <a:t>Copilot</a:t>
+            </a:r>
+            <a:endParaRPr lang="hu-HU" sz="2500" i="1" dirty="0">
+              <a:latin typeface="Times New Roman" panose="02020603050405020304" pitchFamily="18" charset="0"/>
+              <a:cs typeface="Times New Roman" panose="02020603050405020304" pitchFamily="18" charset="0"/>
+            </a:endParaRPr>
+          </a:p>
+          <a:p>
+            <a:r>
+              <a:rPr lang="hu-HU" dirty="0"/>
+              <a:t>	-Szöveg-, és képgenerálás</a:t>
+            </a:r>
+          </a:p>
+        </p:txBody>
+      </p:sp>
+      <p:pic>
+        <p:nvPicPr>
+          <p:cNvPr id="5" name="Kép 4">
+            <a:extLst>
+              <a:ext uri="{FF2B5EF4-FFF2-40B4-BE49-F238E27FC236}">
+                <a16:creationId xmlns:a16="http://schemas.microsoft.com/office/drawing/2014/main" id="{EAA466D1-F811-4FAB-88C0-58B271D074F8}"/>
+              </a:ext>
+            </a:extLst>
+          </p:cNvPr>
+          <p:cNvPicPr>
+            <a:picLocks noChangeAspect="1"/>
+          </p:cNvPicPr>
+          <p:nvPr/>
+        </p:nvPicPr>
+        <p:blipFill>
+          <a:blip r:embed="rId2">
+            <a:extLst>
+              <a:ext uri="{28A0092B-C50C-407E-A947-70E740481C1C}">
+                <a14:useLocalDpi xmlns:a14="http://schemas.microsoft.com/office/drawing/2010/main" val="0"/>
+              </a:ext>
+            </a:extLst>
+          </a:blip>
+          <a:stretch>
+            <a:fillRect/>
+          </a:stretch>
+        </p:blipFill>
+        <p:spPr>
+          <a:xfrm>
+            <a:off x="8286849" y="2502972"/>
+            <a:ext cx="3219350" cy="3166533"/>
+          </a:xfrm>
+          <a:prstGeom prst="rect">
+            <a:avLst/>
+          </a:prstGeom>
+        </p:spPr>
+      </p:pic>
+    </p:spTree>
+    <p:extLst>
+      <p:ext uri="{BB962C8B-B14F-4D97-AF65-F5344CB8AC3E}">
+        <p14:creationId xmlns:p14="http://schemas.microsoft.com/office/powerpoint/2010/main" val="3732063848"/>
+      </p:ext>
+    </p:extLst>
+  </p:cSld>
+  <p:clrMapOvr>
+    <a:masterClrMapping/>
+  </p:clrMapOvr>
+  <p:timing>
+    <p:tnLst>
+      <p:par>
+        <p:cTn id="1" dur="indefinite" restart="never" nodeType="tmRoot">
+          <p:childTnLst>
+            <p:seq concurrent="1" nextAc="seek">
+              <p:cTn id="2" dur="indefinite" nodeType="mainSeq">
+                <p:childTnLst>
+                  <p:par>
+                    <p:cTn id="3" fill="hold">
+                      <p:stCondLst>
+                        <p:cond delay="indefinite"/>
+                      </p:stCondLst>
+                      <p:childTnLst>
+                        <p:par>
+                          <p:cTn id="4" fill="hold">
+                            <p:stCondLst>
+                              <p:cond delay="0"/>
+                            </p:stCondLst>
+                            <p:childTnLst>
+                              <p:par>
+                                <p:cTn id="5" presetID="26" presetClass="entr" presetSubtype="0" fill="hold" grpId="0" nodeType="clickEffect">
+                                  <p:stCondLst>
+                                    <p:cond delay="0"/>
+                                  </p:stCondLst>
+                                  <p:childTnLst>
+                                    <p:set>
+                                      <p:cBhvr>
+                                        <p:cTn id="6" dur="1" fill="hold">
+                                          <p:stCondLst>
+                                            <p:cond delay="0"/>
+                                          </p:stCondLst>
+                                        </p:cTn>
+                                        <p:tgtEl>
+                                          <p:spTgt spid="2"/>
+                                        </p:tgtEl>
+                                        <p:attrNameLst>
+                                          <p:attrName>style.visibility</p:attrName>
+                                        </p:attrNameLst>
+                                      </p:cBhvr>
+                                      <p:to>
+                                        <p:strVal val="visible"/>
+                                      </p:to>
+                                    </p:set>
+                                    <p:animEffect transition="in" filter="wipe(down)">
+                                      <p:cBhvr>
+                                        <p:cTn id="7" dur="580">
+                                          <p:stCondLst>
+                                            <p:cond delay="0"/>
+                                          </p:stCondLst>
+                                        </p:cTn>
+                                        <p:tgtEl>
+                                          <p:spTgt spid="2"/>
+                                        </p:tgtEl>
+                                      </p:cBhvr>
+                                    </p:animEffect>
+                                    <p:anim calcmode="lin" valueType="num">
+                                      <p:cBhvr>
+                                        <p:cTn id="8" dur="1822" tmFilter="0,0; 0.14,0.36; 0.43,0.73; 0.71,0.91; 1.0,1.0">
+                                          <p:stCondLst>
+                                            <p:cond delay="0"/>
+                                          </p:stCondLst>
+                                        </p:cTn>
+                                        <p:tgtEl>
+                                          <p:spTgt spid="2"/>
+                                        </p:tgtEl>
+                                        <p:attrNameLst>
+                                          <p:attrName>ppt_x</p:attrName>
+                                        </p:attrNameLst>
+                                      </p:cBhvr>
+                                      <p:tavLst>
+                                        <p:tav tm="0">
+                                          <p:val>
+                                            <p:strVal val="#ppt_x-0.25"/>
+                                          </p:val>
+                                        </p:tav>
+                                        <p:tav tm="100000">
+                                          <p:val>
+                                            <p:strVal val="#ppt_x"/>
+                                          </p:val>
+                                        </p:tav>
+                                      </p:tavLst>
+                                    </p:anim>
+                                    <p:anim calcmode="lin" valueType="num">
+                                      <p:cBhvr>
+                                        <p:cTn id="9" dur="664" tmFilter="0.0,0.0; 0.25,0.07; 0.50,0.2; 0.75,0.467; 1.0,1.0">
+                                          <p:stCondLst>
+                                            <p:cond delay="0"/>
+                                          </p:stCondLst>
+                                        </p:cTn>
+                                        <p:tgtEl>
+                                          <p:spTgt spid="2"/>
+                                        </p:tgtEl>
+                                        <p:attrNameLst>
+                                          <p:attrName>ppt_y</p:attrName>
+                                        </p:attrNameLst>
+                                      </p:cBhvr>
+                                      <p:tavLst>
+                                        <p:tav tm="0" fmla="#ppt_y-sin(pi*$)/3">
+                                          <p:val>
+                                            <p:fltVal val="0.5"/>
+                                          </p:val>
+                                        </p:tav>
+                                        <p:tav tm="100000">
+                                          <p:val>
+                                            <p:fltVal val="1"/>
+                                          </p:val>
+                                        </p:tav>
+                                      </p:tavLst>
+                                    </p:anim>
+                                    <p:anim calcmode="lin" valueType="num">
+                                      <p:cBhvr>
+                                        <p:cTn id="10" dur="664" tmFilter="0, 0; 0.125,0.2665; 0.25,0.4; 0.375,0.465; 0.5,0.5;  0.625,0.535; 0.75,0.6; 0.875,0.7335; 1,1">
+                                          <p:stCondLst>
+                                            <p:cond delay="664"/>
+                                          </p:stCondLst>
+                                        </p:cTn>
+                                        <p:tgtEl>
+                                          <p:spTgt spid="2"/>
+                                        </p:tgtEl>
+                                        <p:attrNameLst>
+                                          <p:attrName>ppt_y</p:attrName>
+                                        </p:attrNameLst>
+                                      </p:cBhvr>
+                                      <p:tavLst>
+                                        <p:tav tm="0" fmla="#ppt_y-sin(pi*$)/9">
+                                          <p:val>
+                                            <p:fltVal val="0"/>
+                                          </p:val>
+                                        </p:tav>
+                                        <p:tav tm="100000">
+                                          <p:val>
+                                            <p:fltVal val="1"/>
+                                          </p:val>
+                                        </p:tav>
+                                      </p:tavLst>
+                                    </p:anim>
+                                    <p:anim calcmode="lin" valueType="num">
+                                      <p:cBhvr>
+                                        <p:cTn id="11" dur="332" tmFilter="0, 0; 0.125,0.2665; 0.25,0.4; 0.375,0.465; 0.5,0.5;  0.625,0.535; 0.75,0.6; 0.875,0.7335; 1,1">
+                                          <p:stCondLst>
+                                            <p:cond delay="1324"/>
+                                          </p:stCondLst>
+                                        </p:cTn>
+                                        <p:tgtEl>
+                                          <p:spTgt spid="2"/>
+                                        </p:tgtEl>
+                                        <p:attrNameLst>
+                                          <p:attrName>ppt_y</p:attrName>
+                                        </p:attrNameLst>
+                                      </p:cBhvr>
+                                      <p:tavLst>
+                                        <p:tav tm="0" fmla="#ppt_y-sin(pi*$)/27">
+                                          <p:val>
+                                            <p:fltVal val="0"/>
+                                          </p:val>
+                                        </p:tav>
+                                        <p:tav tm="100000">
+                                          <p:val>
+                                            <p:fltVal val="1"/>
+                                          </p:val>
+                                        </p:tav>
+                                      </p:tavLst>
+                                    </p:anim>
+                                    <p:anim calcmode="lin" valueType="num">
+                                      <p:cBhvr>
+                                        <p:cTn id="12" dur="164" tmFilter="0, 0; 0.125,0.2665; 0.25,0.4; 0.375,0.465; 0.5,0.5;  0.625,0.535; 0.75,0.6; 0.875,0.7335; 1,1">
+                                          <p:stCondLst>
+                                            <p:cond delay="1656"/>
+                                          </p:stCondLst>
+                                        </p:cTn>
+                                        <p:tgtEl>
+                                          <p:spTgt spid="2"/>
+                                        </p:tgtEl>
+                                        <p:attrNameLst>
+                                          <p:attrName>ppt_y</p:attrName>
+                                        </p:attrNameLst>
+                                      </p:cBhvr>
+                                      <p:tavLst>
+                                        <p:tav tm="0" fmla="#ppt_y-sin(pi*$)/81">
+                                          <p:val>
+                                            <p:fltVal val="0"/>
+                                          </p:val>
+                                        </p:tav>
+                                        <p:tav tm="100000">
+                                          <p:val>
+                                            <p:fltVal val="1"/>
+                                          </p:val>
+                                        </p:tav>
+                                      </p:tavLst>
+                                    </p:anim>
+                                    <p:animScale>
+                                      <p:cBhvr>
+                                        <p:cTn id="13" dur="26">
+                                          <p:stCondLst>
+                                            <p:cond delay="650"/>
+                                          </p:stCondLst>
+                                        </p:cTn>
+                                        <p:tgtEl>
+                                          <p:spTgt spid="2"/>
+                                        </p:tgtEl>
+                                      </p:cBhvr>
+                                      <p:to x="100000" y="60000"/>
+                                    </p:animScale>
+                                    <p:animScale>
+                                      <p:cBhvr>
+                                        <p:cTn id="14" dur="166" decel="50000">
+                                          <p:stCondLst>
+                                            <p:cond delay="676"/>
+                                          </p:stCondLst>
+                                        </p:cTn>
+                                        <p:tgtEl>
+                                          <p:spTgt spid="2"/>
+                                        </p:tgtEl>
+                                      </p:cBhvr>
+                                      <p:to x="100000" y="100000"/>
+                                    </p:animScale>
+                                    <p:animScale>
+                                      <p:cBhvr>
+                                        <p:cTn id="15" dur="26">
+                                          <p:stCondLst>
+                                            <p:cond delay="1312"/>
+                                          </p:stCondLst>
+                                        </p:cTn>
+                                        <p:tgtEl>
+                                          <p:spTgt spid="2"/>
+                                        </p:tgtEl>
+                                      </p:cBhvr>
+                                      <p:to x="100000" y="80000"/>
+                                    </p:animScale>
+                                    <p:animScale>
+                                      <p:cBhvr>
+                                        <p:cTn id="16" dur="166" decel="50000">
+                                          <p:stCondLst>
+                                            <p:cond delay="1338"/>
+                                          </p:stCondLst>
+                                        </p:cTn>
+                                        <p:tgtEl>
+                                          <p:spTgt spid="2"/>
+                                        </p:tgtEl>
+                                      </p:cBhvr>
+                                      <p:to x="100000" y="100000"/>
+                                    </p:animScale>
+                                    <p:animScale>
+                                      <p:cBhvr>
+                                        <p:cTn id="17" dur="26">
+                                          <p:stCondLst>
+                                            <p:cond delay="1642"/>
+                                          </p:stCondLst>
+                                        </p:cTn>
+                                        <p:tgtEl>
+                                          <p:spTgt spid="2"/>
+                                        </p:tgtEl>
+                                      </p:cBhvr>
+                                      <p:to x="100000" y="90000"/>
+                                    </p:animScale>
+                                    <p:animScale>
+                                      <p:cBhvr>
+                                        <p:cTn id="18" dur="166" decel="50000">
+                                          <p:stCondLst>
+                                            <p:cond delay="1668"/>
+                                          </p:stCondLst>
+                                        </p:cTn>
+                                        <p:tgtEl>
+                                          <p:spTgt spid="2"/>
+                                        </p:tgtEl>
+                                      </p:cBhvr>
+                                      <p:to x="100000" y="100000"/>
+                                    </p:animScale>
+                                    <p:animScale>
+                                      <p:cBhvr>
+                                        <p:cTn id="19" dur="26">
+                                          <p:stCondLst>
+                                            <p:cond delay="1808"/>
+                                          </p:stCondLst>
+                                        </p:cTn>
+                                        <p:tgtEl>
+                                          <p:spTgt spid="2"/>
+                                        </p:tgtEl>
+                                      </p:cBhvr>
+                                      <p:to x="100000" y="95000"/>
+                                    </p:animScale>
+                                    <p:animScale>
+                                      <p:cBhvr>
+                                        <p:cTn id="20" dur="166" decel="50000">
+                                          <p:stCondLst>
+                                            <p:cond delay="1834"/>
+                                          </p:stCondLst>
+                                        </p:cTn>
+                                        <p:tgtEl>
+                                          <p:spTgt spid="2"/>
+                                        </p:tgtEl>
+                                      </p:cBhvr>
+                                      <p:to x="100000" y="100000"/>
+                                    </p:animScale>
+                                  </p:childTnLst>
+                                </p:cTn>
+                              </p:par>
+                            </p:childTnLst>
+                          </p:cTn>
+                        </p:par>
+                      </p:childTnLst>
+                    </p:cTn>
+                  </p:par>
+                  <p:par>
+                    <p:cTn id="21" fill="hold">
+                      <p:stCondLst>
+                        <p:cond delay="indefinite"/>
+                      </p:stCondLst>
+                      <p:childTnLst>
+                        <p:par>
+                          <p:cTn id="22" fill="hold">
+                            <p:stCondLst>
+                              <p:cond delay="0"/>
+                            </p:stCondLst>
+                            <p:childTnLst>
+                              <p:par>
+                                <p:cTn id="23" presetID="26" presetClass="entr" presetSubtype="0" fill="hold" grpId="0" nodeType="clickEffect">
+                                  <p:stCondLst>
+                                    <p:cond delay="0"/>
+                                  </p:stCondLst>
+                                  <p:childTnLst>
+                                    <p:set>
+                                      <p:cBhvr>
+                                        <p:cTn id="24" dur="1" fill="hold">
+                                          <p:stCondLst>
+                                            <p:cond delay="0"/>
+                                          </p:stCondLst>
+                                        </p:cTn>
+                                        <p:tgtEl>
+                                          <p:spTgt spid="3"/>
+                                        </p:tgtEl>
+                                        <p:attrNameLst>
+                                          <p:attrName>style.visibility</p:attrName>
+                                        </p:attrNameLst>
+                                      </p:cBhvr>
+                                      <p:to>
+                                        <p:strVal val="visible"/>
+                                      </p:to>
+                                    </p:set>
+                                    <p:animEffect transition="in" filter="wipe(down)">
+                                      <p:cBhvr>
+                                        <p:cTn id="25" dur="580">
+                                          <p:stCondLst>
+                                            <p:cond delay="0"/>
+                                          </p:stCondLst>
+                                        </p:cTn>
+                                        <p:tgtEl>
+                                          <p:spTgt spid="3"/>
+                                        </p:tgtEl>
+                                      </p:cBhvr>
+                                    </p:animEffect>
+                                    <p:anim calcmode="lin" valueType="num">
+                                      <p:cBhvr>
+                                        <p:cTn id="26" dur="1822" tmFilter="0,0; 0.14,0.36; 0.43,0.73; 0.71,0.91; 1.0,1.0">
+                                          <p:stCondLst>
+                                            <p:cond delay="0"/>
+                                          </p:stCondLst>
+                                        </p:cTn>
+                                        <p:tgtEl>
+                                          <p:spTgt spid="3"/>
+                                        </p:tgtEl>
+                                        <p:attrNameLst>
+                                          <p:attrName>ppt_x</p:attrName>
+                                        </p:attrNameLst>
+                                      </p:cBhvr>
+                                      <p:tavLst>
+                                        <p:tav tm="0">
+                                          <p:val>
+                                            <p:strVal val="#ppt_x-0.25"/>
+                                          </p:val>
+                                        </p:tav>
+                                        <p:tav tm="100000">
+                                          <p:val>
+                                            <p:strVal val="#ppt_x"/>
+                                          </p:val>
+                                        </p:tav>
+                                      </p:tavLst>
+                                    </p:anim>
+                                    <p:anim calcmode="lin" valueType="num">
+                                      <p:cBhvr>
+                                        <p:cTn id="27" dur="664" tmFilter="0.0,0.0; 0.25,0.07; 0.50,0.2; 0.75,0.467; 1.0,1.0">
+                                          <p:stCondLst>
+                                            <p:cond delay="0"/>
+                                          </p:stCondLst>
+                                        </p:cTn>
+                                        <p:tgtEl>
+                                          <p:spTgt spid="3"/>
+                                        </p:tgtEl>
+                                        <p:attrNameLst>
+                                          <p:attrName>ppt_y</p:attrName>
+                                        </p:attrNameLst>
+                                      </p:cBhvr>
+                                      <p:tavLst>
+                                        <p:tav tm="0" fmla="#ppt_y-sin(pi*$)/3">
+                                          <p:val>
+                                            <p:fltVal val="0.5"/>
+                                          </p:val>
+                                        </p:tav>
+                                        <p:tav tm="100000">
+                                          <p:val>
+                                            <p:fltVal val="1"/>
+                                          </p:val>
+                                        </p:tav>
+                                      </p:tavLst>
+                                    </p:anim>
+                                    <p:anim calcmode="lin" valueType="num">
+                                      <p:cBhvr>
+                                        <p:cTn id="28" dur="664" tmFilter="0, 0; 0.125,0.2665; 0.25,0.4; 0.375,0.465; 0.5,0.5;  0.625,0.535; 0.75,0.6; 0.875,0.7335; 1,1">
+                                          <p:stCondLst>
+                                            <p:cond delay="664"/>
+                                          </p:stCondLst>
+                                        </p:cTn>
+                                        <p:tgtEl>
+                                          <p:spTgt spid="3"/>
+                                        </p:tgtEl>
+                                        <p:attrNameLst>
+                                          <p:attrName>ppt_y</p:attrName>
+                                        </p:attrNameLst>
+                                      </p:cBhvr>
+                                      <p:tavLst>
+                                        <p:tav tm="0" fmla="#ppt_y-sin(pi*$)/9">
+                                          <p:val>
+                                            <p:fltVal val="0"/>
+                                          </p:val>
+                                        </p:tav>
+                                        <p:tav tm="100000">
+                                          <p:val>
+                                            <p:fltVal val="1"/>
+                                          </p:val>
+                                        </p:tav>
+                                      </p:tavLst>
+                                    </p:anim>
+                                    <p:anim calcmode="lin" valueType="num">
+                                      <p:cBhvr>
+                                        <p:cTn id="29" dur="332" tmFilter="0, 0; 0.125,0.2665; 0.25,0.4; 0.375,0.465; 0.5,0.5;  0.625,0.535; 0.75,0.6; 0.875,0.7335; 1,1">
+                                          <p:stCondLst>
+                                            <p:cond delay="1324"/>
+                                          </p:stCondLst>
+                                        </p:cTn>
+                                        <p:tgtEl>
+                                          <p:spTgt spid="3"/>
+                                        </p:tgtEl>
+                                        <p:attrNameLst>
+                                          <p:attrName>ppt_y</p:attrName>
+                                        </p:attrNameLst>
+                                      </p:cBhvr>
+                                      <p:tavLst>
+                                        <p:tav tm="0" fmla="#ppt_y-sin(pi*$)/27">
+                                          <p:val>
+                                            <p:fltVal val="0"/>
+                                          </p:val>
+                                        </p:tav>
+                                        <p:tav tm="100000">
+                                          <p:val>
+                                            <p:fltVal val="1"/>
+                                          </p:val>
+                                        </p:tav>
+                                      </p:tavLst>
+                                    </p:anim>
+                                    <p:anim calcmode="lin" valueType="num">
+                                      <p:cBhvr>
+                                        <p:cTn id="30" dur="164" tmFilter="0, 0; 0.125,0.2665; 0.25,0.4; 0.375,0.465; 0.5,0.5;  0.625,0.535; 0.75,0.6; 0.875,0.7335; 1,1">
+                                          <p:stCondLst>
+                                            <p:cond delay="1656"/>
+                                          </p:stCondLst>
+                                        </p:cTn>
+                                        <p:tgtEl>
+                                          <p:spTgt spid="3"/>
+                                        </p:tgtEl>
+                                        <p:attrNameLst>
+                                          <p:attrName>ppt_y</p:attrName>
+                                        </p:attrNameLst>
+                                      </p:cBhvr>
+                                      <p:tavLst>
+                                        <p:tav tm="0" fmla="#ppt_y-sin(pi*$)/81">
+                                          <p:val>
+                                            <p:fltVal val="0"/>
+                                          </p:val>
+                                        </p:tav>
+                                        <p:tav tm="100000">
+                                          <p:val>
+                                            <p:fltVal val="1"/>
+                                          </p:val>
+                                        </p:tav>
+                                      </p:tavLst>
+                                    </p:anim>
+                                    <p:animScale>
+                                      <p:cBhvr>
+                                        <p:cTn id="31" dur="26">
+                                          <p:stCondLst>
+                                            <p:cond delay="650"/>
+                                          </p:stCondLst>
+                                        </p:cTn>
+                                        <p:tgtEl>
+                                          <p:spTgt spid="3"/>
+                                        </p:tgtEl>
+                                      </p:cBhvr>
+                                      <p:to x="100000" y="60000"/>
+                                    </p:animScale>
+                                    <p:animScale>
+                                      <p:cBhvr>
+                                        <p:cTn id="32" dur="166" decel="50000">
+                                          <p:stCondLst>
+                                            <p:cond delay="676"/>
+                                          </p:stCondLst>
+                                        </p:cTn>
+                                        <p:tgtEl>
+                                          <p:spTgt spid="3"/>
+                                        </p:tgtEl>
+                                      </p:cBhvr>
+                                      <p:to x="100000" y="100000"/>
+                                    </p:animScale>
+                                    <p:animScale>
+                                      <p:cBhvr>
+                                        <p:cTn id="33" dur="26">
+                                          <p:stCondLst>
+                                            <p:cond delay="1312"/>
+                                          </p:stCondLst>
+                                        </p:cTn>
+                                        <p:tgtEl>
+                                          <p:spTgt spid="3"/>
+                                        </p:tgtEl>
+                                      </p:cBhvr>
+                                      <p:to x="100000" y="80000"/>
+                                    </p:animScale>
+                                    <p:animScale>
+                                      <p:cBhvr>
+                                        <p:cTn id="34" dur="166" decel="50000">
+                                          <p:stCondLst>
+                                            <p:cond delay="1338"/>
+                                          </p:stCondLst>
+                                        </p:cTn>
+                                        <p:tgtEl>
+                                          <p:spTgt spid="3"/>
+                                        </p:tgtEl>
+                                      </p:cBhvr>
+                                      <p:to x="100000" y="100000"/>
+                                    </p:animScale>
+                                    <p:animScale>
+                                      <p:cBhvr>
+                                        <p:cTn id="35" dur="26">
+                                          <p:stCondLst>
+                                            <p:cond delay="1642"/>
+                                          </p:stCondLst>
+                                        </p:cTn>
+                                        <p:tgtEl>
+                                          <p:spTgt spid="3"/>
+                                        </p:tgtEl>
+                                      </p:cBhvr>
+                                      <p:to x="100000" y="90000"/>
+                                    </p:animScale>
+                                    <p:animScale>
+                                      <p:cBhvr>
+                                        <p:cTn id="36" dur="166" decel="50000">
+                                          <p:stCondLst>
+                                            <p:cond delay="1668"/>
+                                          </p:stCondLst>
+                                        </p:cTn>
+                                        <p:tgtEl>
+                                          <p:spTgt spid="3"/>
+                                        </p:tgtEl>
+                                      </p:cBhvr>
+                                      <p:to x="100000" y="100000"/>
+                                    </p:animScale>
+                                    <p:animScale>
+                                      <p:cBhvr>
+                                        <p:cTn id="37" dur="26">
+                                          <p:stCondLst>
+                                            <p:cond delay="1808"/>
+                                          </p:stCondLst>
+                                        </p:cTn>
+                                        <p:tgtEl>
+                                          <p:spTgt spid="3"/>
+                                        </p:tgtEl>
+                                      </p:cBhvr>
+                                      <p:to x="100000" y="95000"/>
+                                    </p:animScale>
+                                    <p:animScale>
+                                      <p:cBhvr>
+                                        <p:cTn id="38" dur="166" decel="50000">
+                                          <p:stCondLst>
+                                            <p:cond delay="1834"/>
+                                          </p:stCondLst>
+                                        </p:cTn>
+                                        <p:tgtEl>
+                                          <p:spTgt spid="3"/>
+                                        </p:tgtEl>
+                                      </p:cBhvr>
+                                      <p:to x="100000" y="100000"/>
+                                    </p:animScale>
+                                  </p:childTnLst>
+                                </p:cTn>
+                              </p:par>
+                            </p:childTnLst>
+                          </p:cTn>
+                        </p:par>
+                      </p:childTnLst>
+                    </p:cTn>
+                  </p:par>
+                  <p:par>
+                    <p:cTn id="39" fill="hold">
+                      <p:stCondLst>
+                        <p:cond delay="indefinite"/>
+                      </p:stCondLst>
+                      <p:childTnLst>
+                        <p:par>
+                          <p:cTn id="40" fill="hold">
+                            <p:stCondLst>
+                              <p:cond delay="0"/>
+                            </p:stCondLst>
+                            <p:childTnLst>
+                              <p:par>
+                                <p:cTn id="41" presetID="21" presetClass="entr" presetSubtype="1" fill="hold" nodeType="clickEffect">
+                                  <p:stCondLst>
+                                    <p:cond delay="0"/>
+                                  </p:stCondLst>
+                                  <p:childTnLst>
+                                    <p:set>
+                                      <p:cBhvr>
+                                        <p:cTn id="42" dur="1" fill="hold">
+                                          <p:stCondLst>
+                                            <p:cond delay="0"/>
+                                          </p:stCondLst>
+                                        </p:cTn>
+                                        <p:tgtEl>
+                                          <p:spTgt spid="5"/>
+                                        </p:tgtEl>
+                                        <p:attrNameLst>
+                                          <p:attrName>style.visibility</p:attrName>
+                                        </p:attrNameLst>
+                                      </p:cBhvr>
+                                      <p:to>
+                                        <p:strVal val="visible"/>
+                                      </p:to>
+                                    </p:set>
+                                    <p:animEffect transition="in" filter="wheel(1)">
+                                      <p:cBhvr>
+                                        <p:cTn id="43" dur="2000"/>
+                                        <p:tgtEl>
+                                          <p:spTgt spid="5"/>
+                                        </p:tgtEl>
+                                      </p:cBhvr>
+                                    </p:animEffect>
+                                  </p:childTnLst>
+                                </p:cTn>
+                              </p:par>
+                            </p:childTnLst>
+                          </p:cTn>
+                        </p:par>
+                      </p:childTnLst>
+                    </p:cTn>
+                  </p:par>
+                </p:childTnLst>
+              </p:cTn>
+              <p:prevCondLst>
+                <p:cond evt="onPrev" delay="0">
+                  <p:tgtEl>
+                    <p:sldTgt/>
+                  </p:tgtEl>
+                </p:cond>
+              </p:prevCondLst>
+              <p:nextCondLst>
+                <p:cond evt="onNext" delay="0">
+                  <p:tgtEl>
+                    <p:sldTgt/>
+                  </p:tgtEl>
+                </p:cond>
+              </p:nextCondLst>
+            </p:seq>
+          </p:childTnLst>
+        </p:cTn>
+      </p:par>
+    </p:tnLst>
+    <p:bldLst>
+      <p:bldP spid="2" grpId="0"/>
+      <p:bldP spid="3" grpId="0"/>
+    </p:bldLst>
+  </p:timing>
+</p:sld>
+</file>
+
+<file path=ppt/slides/slide5.xml><?xml version="1.0" encoding="utf-8"?>
+<p:sld xmlns:a="http://schemas.openxmlformats.org/drawingml/2006/main" xmlns:r="http://schemas.openxmlformats.org/officeDocument/2006/relationships" xmlns:p="http://schemas.openxmlformats.org/presentationml/2006/main">
+  <p:cSld>
+    <p:spTree>
+      <p:nvGrpSpPr>
+        <p:cNvPr id="1" name=""/>
+        <p:cNvGrpSpPr/>
+        <p:nvPr/>
+      </p:nvGrpSpPr>
+      <p:grpSpPr>
+        <a:xfrm>
+          <a:off x="0" y="0"/>
+          <a:ext cx="0" cy="0"/>
+          <a:chOff x="0" y="0"/>
+          <a:chExt cx="0" cy="0"/>
+        </a:xfrm>
+      </p:grpSpPr>
+      <p:sp>
+        <p:nvSpPr>
+          <p:cNvPr id="2" name="Szövegdoboz 1">
+            <a:extLst>
+              <a:ext uri="{FF2B5EF4-FFF2-40B4-BE49-F238E27FC236}">
+                <a16:creationId xmlns:a16="http://schemas.microsoft.com/office/drawing/2014/main" id="{DD238E23-0B2C-4EA6-8CAC-FC2AC9A12AFB}"/>
+              </a:ext>
+            </a:extLst>
+          </p:cNvPr>
+          <p:cNvSpPr txBox="1"/>
+          <p:nvPr/>
+        </p:nvSpPr>
+        <p:spPr>
+          <a:xfrm>
+            <a:off x="0" y="0"/>
+            <a:ext cx="8034866" cy="861774"/>
+          </a:xfrm>
+          <a:prstGeom prst="rect">
+            <a:avLst/>
+          </a:prstGeom>
+          <a:noFill/>
+        </p:spPr>
+        <p:txBody>
+          <a:bodyPr wrap="square" rtlCol="0">
+            <a:spAutoFit/>
+          </a:bodyPr>
+          <a:lstStyle/>
+          <a:p>
+            <a:r>
+              <a:rPr lang="hu-HU" sz="5000" b="1" dirty="0">
+                <a:latin typeface="Times New Roman" panose="02020603050405020304" pitchFamily="18" charset="0"/>
+                <a:cs typeface="Times New Roman" panose="02020603050405020304" pitchFamily="18" charset="0"/>
+              </a:rPr>
+              <a:t>Miért válasszon minket?</a:t>
+            </a:r>
+          </a:p>
+        </p:txBody>
+      </p:sp>
+      <p:sp>
+        <p:nvSpPr>
+          <p:cNvPr id="3" name="Szövegdoboz 2">
+            <a:extLst>
+              <a:ext uri="{FF2B5EF4-FFF2-40B4-BE49-F238E27FC236}">
+                <a16:creationId xmlns:a16="http://schemas.microsoft.com/office/drawing/2014/main" id="{9E63558D-292B-487D-9DCC-3E34125030F4}"/>
+              </a:ext>
+            </a:extLst>
+          </p:cNvPr>
+          <p:cNvSpPr txBox="1"/>
+          <p:nvPr/>
+        </p:nvSpPr>
+        <p:spPr>
+          <a:xfrm>
+            <a:off x="356713" y="843015"/>
+            <a:ext cx="7507705" cy="1200329"/>
+          </a:xfrm>
+          <a:prstGeom prst="rect">
+            <a:avLst/>
+          </a:prstGeom>
+          <a:noFill/>
+        </p:spPr>
+        <p:txBody>
+          <a:bodyPr wrap="square" rtlCol="0">
+            <a:spAutoFit/>
+          </a:bodyPr>
+          <a:lstStyle/>
+          <a:p>
+            <a:r>
+              <a:rPr lang="hu-HU" dirty="0">
+                <a:latin typeface="Times New Roman" panose="02020603050405020304" pitchFamily="18" charset="0"/>
+                <a:cs typeface="Times New Roman" panose="02020603050405020304" pitchFamily="18" charset="0"/>
+              </a:rPr>
+              <a:t>Ha olyan kőműves csapatot keres, amelyre valóban rábízhatja otthonát, vállalkozását vagy bármilyen építési projektjét, akkor a </a:t>
+            </a:r>
+            <a:r>
+              <a:rPr lang="hu-HU" dirty="0" err="1">
+                <a:latin typeface="Times New Roman" panose="02020603050405020304" pitchFamily="18" charset="0"/>
+                <a:cs typeface="Times New Roman" panose="02020603050405020304" pitchFamily="18" charset="0"/>
+              </a:rPr>
+              <a:t>KőművesGoston</a:t>
+            </a:r>
+            <a:r>
+              <a:rPr lang="hu-HU" dirty="0">
+                <a:latin typeface="Times New Roman" panose="02020603050405020304" pitchFamily="18" charset="0"/>
+                <a:cs typeface="Times New Roman" panose="02020603050405020304" pitchFamily="18" charset="0"/>
+              </a:rPr>
+              <a:t> Kft. a legjobb döntés. Nem csak dolgozunk - értéket teremtünk, minőséget adunk, és hosszú távú bizalmat építünk.</a:t>
+            </a:r>
+          </a:p>
+        </p:txBody>
+      </p:sp>
+      <p:sp>
+        <p:nvSpPr>
+          <p:cNvPr id="4" name="Szövegdoboz 3">
+            <a:extLst>
+              <a:ext uri="{FF2B5EF4-FFF2-40B4-BE49-F238E27FC236}">
+                <a16:creationId xmlns:a16="http://schemas.microsoft.com/office/drawing/2014/main" id="{D41E1369-A13C-4391-83C5-D686D675F6A0}"/>
+              </a:ext>
+            </a:extLst>
+          </p:cNvPr>
+          <p:cNvSpPr txBox="1"/>
+          <p:nvPr/>
+        </p:nvSpPr>
+        <p:spPr>
+          <a:xfrm>
+            <a:off x="356713" y="2121612"/>
+            <a:ext cx="11277600" cy="2693045"/>
+          </a:xfrm>
+          <a:prstGeom prst="rect">
+            <a:avLst/>
+          </a:prstGeom>
+          <a:noFill/>
+        </p:spPr>
+        <p:txBody>
+          <a:bodyPr wrap="square" rtlCol="0">
+            <a:spAutoFit/>
+          </a:bodyPr>
+          <a:lstStyle/>
+          <a:p>
+            <a:r>
+              <a:rPr lang="hu-HU" sz="2500" i="1" dirty="0">
+                <a:latin typeface="Times New Roman" panose="02020603050405020304" pitchFamily="18" charset="0"/>
+                <a:cs typeface="Times New Roman" panose="02020603050405020304" pitchFamily="18" charset="0"/>
+              </a:rPr>
+              <a:t>Mit kínálunk?</a:t>
+            </a:r>
+          </a:p>
+          <a:p>
+            <a:endParaRPr lang="hu-HU" dirty="0"/>
+          </a:p>
+          <a:p>
+            <a:pPr>
+              <a:buFont typeface="Arial" panose="020B0604020202020204" pitchFamily="34" charset="0"/>
+              <a:buChar char="•"/>
+            </a:pPr>
+            <a:r>
+              <a:rPr lang="hu-HU" dirty="0">
+                <a:effectLst/>
+                <a:latin typeface="Times New Roman" panose="02020603050405020304" pitchFamily="18" charset="0"/>
+                <a:cs typeface="Times New Roman" panose="02020603050405020304" pitchFamily="18" charset="0"/>
+              </a:rPr>
+              <a:t>Több éves szakmai tapasztalat - nálunk a rutin és a modern technológia kéz a kézben jár.</a:t>
+            </a:r>
+            <a:endParaRPr lang="hu-HU" dirty="0">
+              <a:latin typeface="Times New Roman" panose="02020603050405020304" pitchFamily="18" charset="0"/>
+              <a:cs typeface="Times New Roman" panose="02020603050405020304" pitchFamily="18" charset="0"/>
+            </a:endParaRPr>
+          </a:p>
+          <a:p>
+            <a:pPr>
+              <a:buFont typeface="Arial" panose="020B0604020202020204" pitchFamily="34" charset="0"/>
+              <a:buChar char="•"/>
+            </a:pPr>
+            <a:r>
+              <a:rPr lang="hu-HU" dirty="0">
+                <a:effectLst/>
+                <a:latin typeface="Times New Roman" panose="02020603050405020304" pitchFamily="18" charset="0"/>
+                <a:cs typeface="Times New Roman" panose="02020603050405020304" pitchFamily="18" charset="0"/>
+              </a:rPr>
+              <a:t>Precíz, igényes kivitelezés - minden munkánk mögött ott áll a szakmai alázat és a részletek iránti figyelem.</a:t>
+            </a:r>
+            <a:endParaRPr lang="hu-HU" dirty="0">
+              <a:latin typeface="Times New Roman" panose="02020603050405020304" pitchFamily="18" charset="0"/>
+              <a:cs typeface="Times New Roman" panose="02020603050405020304" pitchFamily="18" charset="0"/>
+            </a:endParaRPr>
+          </a:p>
+          <a:p>
+            <a:pPr>
+              <a:buFont typeface="Arial" panose="020B0604020202020204" pitchFamily="34" charset="0"/>
+              <a:buChar char="•"/>
+            </a:pPr>
+            <a:r>
+              <a:rPr lang="hu-HU" dirty="0">
+                <a:effectLst/>
+                <a:latin typeface="Times New Roman" panose="02020603050405020304" pitchFamily="18" charset="0"/>
+                <a:cs typeface="Times New Roman" panose="02020603050405020304" pitchFamily="18" charset="0"/>
+              </a:rPr>
+              <a:t>Megbízhatóság és pontosság - tartjuk a határidőt, tartjuk a </a:t>
+            </a:r>
+            <a:r>
+              <a:rPr lang="hu-HU" dirty="0" err="1">
+                <a:effectLst/>
+                <a:latin typeface="Times New Roman" panose="02020603050405020304" pitchFamily="18" charset="0"/>
+                <a:cs typeface="Times New Roman" panose="02020603050405020304" pitchFamily="18" charset="0"/>
+              </a:rPr>
+              <a:t>szavunkat</a:t>
+            </a:r>
+            <a:r>
+              <a:rPr lang="hu-HU" dirty="0">
+                <a:effectLst/>
+                <a:latin typeface="Times New Roman" panose="02020603050405020304" pitchFamily="18" charset="0"/>
+                <a:cs typeface="Times New Roman" panose="02020603050405020304" pitchFamily="18" charset="0"/>
+              </a:rPr>
+              <a:t>.</a:t>
+            </a:r>
+            <a:endParaRPr lang="hu-HU" dirty="0">
+              <a:latin typeface="Times New Roman" panose="02020603050405020304" pitchFamily="18" charset="0"/>
+              <a:cs typeface="Times New Roman" panose="02020603050405020304" pitchFamily="18" charset="0"/>
+            </a:endParaRPr>
+          </a:p>
+          <a:p>
+            <a:pPr>
+              <a:buFont typeface="Arial" panose="020B0604020202020204" pitchFamily="34" charset="0"/>
+              <a:buChar char="•"/>
+            </a:pPr>
+            <a:r>
+              <a:rPr lang="hu-HU" dirty="0">
+                <a:effectLst/>
+                <a:latin typeface="Times New Roman" panose="02020603050405020304" pitchFamily="18" charset="0"/>
+                <a:cs typeface="Times New Roman" panose="02020603050405020304" pitchFamily="18" charset="0"/>
+              </a:rPr>
+              <a:t>Korrekt árak, átlátható ajánlatok - nincsenek rejtett költségek, csak tiszta, egyenes kommunikáció.</a:t>
+            </a:r>
+            <a:endParaRPr lang="hu-HU" dirty="0">
+              <a:latin typeface="Times New Roman" panose="02020603050405020304" pitchFamily="18" charset="0"/>
+              <a:cs typeface="Times New Roman" panose="02020603050405020304" pitchFamily="18" charset="0"/>
+            </a:endParaRPr>
+          </a:p>
+          <a:p>
+            <a:pPr>
+              <a:buFont typeface="Arial" panose="020B0604020202020204" pitchFamily="34" charset="0"/>
+              <a:buChar char="•"/>
+            </a:pPr>
+            <a:r>
+              <a:rPr lang="hu-HU" dirty="0">
+                <a:effectLst/>
+                <a:latin typeface="Times New Roman" panose="02020603050405020304" pitchFamily="18" charset="0"/>
+                <a:cs typeface="Times New Roman" panose="02020603050405020304" pitchFamily="18" charset="0"/>
+              </a:rPr>
+              <a:t>Rugalmas hozzáállás - legyen szó kisebb javításról vagy teljes körű felújításról, minden projektet ugyanolyan komolyan veszünk.</a:t>
+            </a:r>
+            <a:endParaRPr lang="hu-HU" dirty="0">
+              <a:latin typeface="Times New Roman" panose="02020603050405020304" pitchFamily="18" charset="0"/>
+              <a:cs typeface="Times New Roman" panose="02020603050405020304" pitchFamily="18" charset="0"/>
+            </a:endParaRPr>
+          </a:p>
+          <a:p>
+            <a:endParaRPr lang="hu-HU" dirty="0"/>
+          </a:p>
+        </p:txBody>
+      </p:sp>
+      <p:sp>
+        <p:nvSpPr>
+          <p:cNvPr id="5" name="Szövegdoboz 4">
+            <a:extLst>
+              <a:ext uri="{FF2B5EF4-FFF2-40B4-BE49-F238E27FC236}">
+                <a16:creationId xmlns:a16="http://schemas.microsoft.com/office/drawing/2014/main" id="{9FD4A4C0-76B2-4E3E-95F7-5EBAF92B1C18}"/>
+              </a:ext>
+            </a:extLst>
+          </p:cNvPr>
+          <p:cNvSpPr txBox="1"/>
+          <p:nvPr/>
+        </p:nvSpPr>
+        <p:spPr>
+          <a:xfrm>
+            <a:off x="1232344" y="5391484"/>
+            <a:ext cx="10401969" cy="553998"/>
+          </a:xfrm>
+          <a:prstGeom prst="rect">
+            <a:avLst/>
+          </a:prstGeom>
+          <a:noFill/>
+        </p:spPr>
+        <p:txBody>
+          <a:bodyPr wrap="square" rtlCol="0">
+            <a:spAutoFit/>
+          </a:bodyPr>
+          <a:lstStyle/>
+          <a:p>
+            <a:r>
+              <a:rPr lang="hu-HU" sz="3000" b="1" i="1" dirty="0" err="1">
+                <a:latin typeface="Times New Roman" panose="02020603050405020304" pitchFamily="18" charset="0"/>
+                <a:cs typeface="Times New Roman" panose="02020603050405020304" pitchFamily="18" charset="0"/>
+              </a:rPr>
+              <a:t>KőművesGoston</a:t>
+            </a:r>
+            <a:r>
+              <a:rPr lang="hu-HU" sz="3000" b="1" i="1" dirty="0">
+                <a:latin typeface="Times New Roman" panose="02020603050405020304" pitchFamily="18" charset="0"/>
+                <a:cs typeface="Times New Roman" panose="02020603050405020304" pitchFamily="18" charset="0"/>
+              </a:rPr>
+              <a:t> Kft. - ahol a minőség nem extra, hanem alap!</a:t>
+            </a:r>
+            <a:r>
+              <a:rPr lang="hu-HU" sz="3000" i="1" dirty="0">
+                <a:latin typeface="Times New Roman" panose="02020603050405020304" pitchFamily="18" charset="0"/>
+                <a:cs typeface="Times New Roman" panose="02020603050405020304" pitchFamily="18" charset="0"/>
+              </a:rPr>
+              <a:t> </a:t>
+            </a:r>
+          </a:p>
+        </p:txBody>
+      </p:sp>
+      <p:pic>
+        <p:nvPicPr>
+          <p:cNvPr id="7" name="Kép 6">
+            <a:extLst>
+              <a:ext uri="{FF2B5EF4-FFF2-40B4-BE49-F238E27FC236}">
+                <a16:creationId xmlns:a16="http://schemas.microsoft.com/office/drawing/2014/main" id="{FD7DF2D0-75AD-4C37-BC76-496A708B84FD}"/>
+              </a:ext>
+            </a:extLst>
+          </p:cNvPr>
+          <p:cNvPicPr>
+            <a:picLocks noChangeAspect="1"/>
+          </p:cNvPicPr>
+          <p:nvPr/>
+        </p:nvPicPr>
+        <p:blipFill>
+          <a:blip r:embed="rId2">
+            <a:extLst>
+              <a:ext uri="{28A0092B-C50C-407E-A947-70E740481C1C}">
+                <a14:useLocalDpi xmlns:a14="http://schemas.microsoft.com/office/drawing/2010/main" val="0"/>
+              </a:ext>
+            </a:extLst>
+          </a:blip>
+          <a:stretch>
+            <a:fillRect/>
+          </a:stretch>
+        </p:blipFill>
+        <p:spPr>
+          <a:xfrm>
+            <a:off x="8690770" y="-78830"/>
+            <a:ext cx="3247229" cy="3247229"/>
+          </a:xfrm>
+          <a:prstGeom prst="rect">
+            <a:avLst/>
+          </a:prstGeom>
+        </p:spPr>
+      </p:pic>
+    </p:spTree>
+    <p:extLst>
+      <p:ext uri="{BB962C8B-B14F-4D97-AF65-F5344CB8AC3E}">
+        <p14:creationId xmlns:p14="http://schemas.microsoft.com/office/powerpoint/2010/main" val="2378791423"/>
+      </p:ext>
+    </p:extLst>
+  </p:cSld>
+  <p:clrMapOvr>
+    <a:masterClrMapping/>
+  </p:clrMapOvr>
+  <p:timing>
+    <p:tnLst>
+      <p:par>
+        <p:cTn id="1" dur="indefinite" restart="never" nodeType="tmRoot">
+          <p:childTnLst>
+            <p:seq concurrent="1" nextAc="seek">
+              <p:cTn id="2" dur="indefinite" nodeType="mainSeq">
+                <p:childTnLst>
+                  <p:par>
+                    <p:cTn id="3" fill="hold">
+                      <p:stCondLst>
+                        <p:cond delay="indefinite"/>
+                      </p:stCondLst>
+                      <p:childTnLst>
+                        <p:par>
+                          <p:cTn id="4" fill="hold">
+                            <p:stCondLst>
+                              <p:cond delay="0"/>
+                            </p:stCondLst>
+                            <p:childTnLst>
+                              <p:par>
+                                <p:cTn id="5" presetID="14" presetClass="entr" presetSubtype="10" fill="hold" grpId="0" nodeType="clickEffect">
+                                  <p:stCondLst>
+                                    <p:cond delay="0"/>
+                                  </p:stCondLst>
+                                  <p:childTnLst>
+                                    <p:set>
+                                      <p:cBhvr>
+                                        <p:cTn id="6" dur="1" fill="hold">
+                                          <p:stCondLst>
+                                            <p:cond delay="0"/>
+                                          </p:stCondLst>
+                                        </p:cTn>
+                                        <p:tgtEl>
+                                          <p:spTgt spid="2"/>
+                                        </p:tgtEl>
+                                        <p:attrNameLst>
+                                          <p:attrName>style.visibility</p:attrName>
+                                        </p:attrNameLst>
+                                      </p:cBhvr>
+                                      <p:to>
+                                        <p:strVal val="visible"/>
+                                      </p:to>
+                                    </p:set>
+                                    <p:animEffect transition="in" filter="randombar(horizontal)">
+                                      <p:cBhvr>
+                                        <p:cTn id="7" dur="500"/>
+                                        <p:tgtEl>
+                                          <p:spTgt spid="2"/>
+                                        </p:tgtEl>
+                                      </p:cBhvr>
+                                    </p:animEffect>
+                                  </p:childTnLst>
+                                </p:cTn>
+                              </p:par>
+                            </p:childTnLst>
+                          </p:cTn>
+                        </p:par>
+                      </p:childTnLst>
+                    </p:cTn>
+                  </p:par>
+                  <p:par>
+                    <p:cTn id="8" fill="hold">
+                      <p:stCondLst>
+                        <p:cond delay="indefinite"/>
+                      </p:stCondLst>
+                      <p:childTnLst>
+                        <p:par>
+                          <p:cTn id="9" fill="hold">
+                            <p:stCondLst>
+                              <p:cond delay="0"/>
+                            </p:stCondLst>
+                            <p:childTnLst>
+                              <p:par>
+                                <p:cTn id="10" presetID="45" presetClass="entr" presetSubtype="0" fill="hold" grpId="0" nodeType="clickEffect">
+                                  <p:stCondLst>
+                                    <p:cond delay="0"/>
+                                  </p:stCondLst>
+                                  <p:childTnLst>
+                                    <p:set>
+                                      <p:cBhvr>
+                                        <p:cTn id="11" dur="1" fill="hold">
+                                          <p:stCondLst>
+                                            <p:cond delay="0"/>
+                                          </p:stCondLst>
+                                        </p:cTn>
+                                        <p:tgtEl>
+                                          <p:spTgt spid="3"/>
+                                        </p:tgtEl>
+                                        <p:attrNameLst>
+                                          <p:attrName>style.visibility</p:attrName>
+                                        </p:attrNameLst>
+                                      </p:cBhvr>
+                                      <p:to>
+                                        <p:strVal val="visible"/>
+                                      </p:to>
+                                    </p:set>
+                                    <p:animEffect transition="in" filter="fade">
+                                      <p:cBhvr>
+                                        <p:cTn id="12" dur="2000"/>
+                                        <p:tgtEl>
+                                          <p:spTgt spid="3"/>
+                                        </p:tgtEl>
+                                      </p:cBhvr>
+                                    </p:animEffect>
+                                    <p:anim calcmode="lin" valueType="num">
+                                      <p:cBhvr>
+                                        <p:cTn id="13" dur="2000" fill="hold"/>
+                                        <p:tgtEl>
+                                          <p:spTgt spid="3"/>
+                                        </p:tgtEl>
+                                        <p:attrNameLst>
+                                          <p:attrName>ppt_w</p:attrName>
+                                        </p:attrNameLst>
+                                      </p:cBhvr>
+                                      <p:tavLst>
+                                        <p:tav tm="0" fmla="#ppt_w*sin(2.5*pi*$)">
+                                          <p:val>
+                                            <p:fltVal val="0"/>
+                                          </p:val>
+                                        </p:tav>
+                                        <p:tav tm="100000">
+                                          <p:val>
+                                            <p:fltVal val="1"/>
+                                          </p:val>
+                                        </p:tav>
+                                      </p:tavLst>
+                                    </p:anim>
+                                    <p:anim calcmode="lin" valueType="num">
+                                      <p:cBhvr>
+                                        <p:cTn id="14" dur="2000" fill="hold"/>
+                                        <p:tgtEl>
+                                          <p:spTgt spid="3"/>
+                                        </p:tgtEl>
+                                        <p:attrNameLst>
+                                          <p:attrName>ppt_h</p:attrName>
+                                        </p:attrNameLst>
+                                      </p:cBhvr>
+                                      <p:tavLst>
+                                        <p:tav tm="0">
+                                          <p:val>
+                                            <p:strVal val="#ppt_h"/>
+                                          </p:val>
+                                        </p:tav>
+                                        <p:tav tm="100000">
+                                          <p:val>
+                                            <p:strVal val="#ppt_h"/>
+                                          </p:val>
+                                        </p:tav>
+                                      </p:tavLst>
+                                    </p:anim>
+                                  </p:childTnLst>
+                                </p:cTn>
+                              </p:par>
+                            </p:childTnLst>
+                          </p:cTn>
+                        </p:par>
+                      </p:childTnLst>
+                    </p:cTn>
+                  </p:par>
+                  <p:par>
+                    <p:cTn id="15" fill="hold">
+                      <p:stCondLst>
+                        <p:cond delay="indefinite"/>
+                      </p:stCondLst>
+                      <p:childTnLst>
+                        <p:par>
+                          <p:cTn id="16" fill="hold">
+                            <p:stCondLst>
+                              <p:cond delay="0"/>
+                            </p:stCondLst>
+                            <p:childTnLst>
+                              <p:par>
+                                <p:cTn id="17" presetID="26" presetClass="entr" presetSubtype="0" fill="hold" grpId="0" nodeType="clickEffect">
+                                  <p:stCondLst>
+                                    <p:cond delay="0"/>
+                                  </p:stCondLst>
+                                  <p:childTnLst>
+                                    <p:set>
+                                      <p:cBhvr>
+                                        <p:cTn id="18" dur="1" fill="hold">
+                                          <p:stCondLst>
+                                            <p:cond delay="0"/>
+                                          </p:stCondLst>
+                                        </p:cTn>
+                                        <p:tgtEl>
+                                          <p:spTgt spid="4"/>
+                                        </p:tgtEl>
+                                        <p:attrNameLst>
+                                          <p:attrName>style.visibility</p:attrName>
+                                        </p:attrNameLst>
+                                      </p:cBhvr>
+                                      <p:to>
+                                        <p:strVal val="visible"/>
+                                      </p:to>
+                                    </p:set>
+                                    <p:animEffect transition="in" filter="wipe(down)">
+                                      <p:cBhvr>
+                                        <p:cTn id="19" dur="580">
+                                          <p:stCondLst>
+                                            <p:cond delay="0"/>
+                                          </p:stCondLst>
+                                        </p:cTn>
+                                        <p:tgtEl>
+                                          <p:spTgt spid="4"/>
+                                        </p:tgtEl>
+                                      </p:cBhvr>
+                                    </p:animEffect>
+                                    <p:anim calcmode="lin" valueType="num">
+                                      <p:cBhvr>
+                                        <p:cTn id="20" dur="1822" tmFilter="0,0; 0.14,0.36; 0.43,0.73; 0.71,0.91; 1.0,1.0">
+                                          <p:stCondLst>
+                                            <p:cond delay="0"/>
+                                          </p:stCondLst>
+                                        </p:cTn>
+                                        <p:tgtEl>
+                                          <p:spTgt spid="4"/>
+                                        </p:tgtEl>
+                                        <p:attrNameLst>
+                                          <p:attrName>ppt_x</p:attrName>
+                                        </p:attrNameLst>
+                                      </p:cBhvr>
+                                      <p:tavLst>
+                                        <p:tav tm="0">
+                                          <p:val>
+                                            <p:strVal val="#ppt_x-0.25"/>
+                                          </p:val>
+                                        </p:tav>
+                                        <p:tav tm="100000">
+                                          <p:val>
+                                            <p:strVal val="#ppt_x"/>
+                                          </p:val>
+                                        </p:tav>
+                                      </p:tavLst>
+                                    </p:anim>
+                                    <p:anim calcmode="lin" valueType="num">
+                                      <p:cBhvr>
+                                        <p:cTn id="21" dur="664" tmFilter="0.0,0.0; 0.25,0.07; 0.50,0.2; 0.75,0.467; 1.0,1.0">
+                                          <p:stCondLst>
+                                            <p:cond delay="0"/>
+                                          </p:stCondLst>
+                                        </p:cTn>
+                                        <p:tgtEl>
+                                          <p:spTgt spid="4"/>
+                                        </p:tgtEl>
+                                        <p:attrNameLst>
+                                          <p:attrName>ppt_y</p:attrName>
+                                        </p:attrNameLst>
+                                      </p:cBhvr>
+                                      <p:tavLst>
+                                        <p:tav tm="0" fmla="#ppt_y-sin(pi*$)/3">
+                                          <p:val>
+                                            <p:fltVal val="0.5"/>
+                                          </p:val>
+                                        </p:tav>
+                                        <p:tav tm="100000">
+                                          <p:val>
+                                            <p:fltVal val="1"/>
+                                          </p:val>
+                                        </p:tav>
+                                      </p:tavLst>
+                                    </p:anim>
+                                    <p:anim calcmode="lin" valueType="num">
+                                      <p:cBhvr>
+                                        <p:cTn id="22" dur="664" tmFilter="0, 0; 0.125,0.2665; 0.25,0.4; 0.375,0.465; 0.5,0.5;  0.625,0.535; 0.75,0.6; 0.875,0.7335; 1,1">
+                                          <p:stCondLst>
+                                            <p:cond delay="664"/>
+                                          </p:stCondLst>
+                                        </p:cTn>
+                                        <p:tgtEl>
+                                          <p:spTgt spid="4"/>
+                                        </p:tgtEl>
+                                        <p:attrNameLst>
+                                          <p:attrName>ppt_y</p:attrName>
+                                        </p:attrNameLst>
+                                      </p:cBhvr>
+                                      <p:tavLst>
+                                        <p:tav tm="0" fmla="#ppt_y-sin(pi*$)/9">
+                                          <p:val>
+                                            <p:fltVal val="0"/>
+                                          </p:val>
+                                        </p:tav>
+                                        <p:tav tm="100000">
+                                          <p:val>
+                                            <p:fltVal val="1"/>
+                                          </p:val>
+                                        </p:tav>
+                                      </p:tavLst>
+                                    </p:anim>
+                                    <p:anim calcmode="lin" valueType="num">
+                                      <p:cBhvr>
+                                        <p:cTn id="23" dur="332" tmFilter="0, 0; 0.125,0.2665; 0.25,0.4; 0.375,0.465; 0.5,0.5;  0.625,0.535; 0.75,0.6; 0.875,0.7335; 1,1">
+                                          <p:stCondLst>
+                                            <p:cond delay="1324"/>
+                                          </p:stCondLst>
+                                        </p:cTn>
+                                        <p:tgtEl>
+                                          <p:spTgt spid="4"/>
+                                        </p:tgtEl>
+                                        <p:attrNameLst>
+                                          <p:attrName>ppt_y</p:attrName>
+                                        </p:attrNameLst>
+                                      </p:cBhvr>
+                                      <p:tavLst>
+                                        <p:tav tm="0" fmla="#ppt_y-sin(pi*$)/27">
+                                          <p:val>
+                                            <p:fltVal val="0"/>
+                                          </p:val>
+                                        </p:tav>
+                                        <p:tav tm="100000">
+                                          <p:val>
+                                            <p:fltVal val="1"/>
+                                          </p:val>
+                                        </p:tav>
+                                      </p:tavLst>
+                                    </p:anim>
+                                    <p:anim calcmode="lin" valueType="num">
+                                      <p:cBhvr>
+                                        <p:cTn id="24" dur="164" tmFilter="0, 0; 0.125,0.2665; 0.25,0.4; 0.375,0.465; 0.5,0.5;  0.625,0.535; 0.75,0.6; 0.875,0.7335; 1,1">
+                                          <p:stCondLst>
+                                            <p:cond delay="1656"/>
+                                          </p:stCondLst>
+                                        </p:cTn>
+                                        <p:tgtEl>
+                                          <p:spTgt spid="4"/>
+                                        </p:tgtEl>
+                                        <p:attrNameLst>
+                                          <p:attrName>ppt_y</p:attrName>
+                                        </p:attrNameLst>
+                                      </p:cBhvr>
+                                      <p:tavLst>
+                                        <p:tav tm="0" fmla="#ppt_y-sin(pi*$)/81">
+                                          <p:val>
+                                            <p:fltVal val="0"/>
+                                          </p:val>
+                                        </p:tav>
+                                        <p:tav tm="100000">
+                                          <p:val>
+                                            <p:fltVal val="1"/>
+                                          </p:val>
+                                        </p:tav>
+                                      </p:tavLst>
+                                    </p:anim>
+                                    <p:animScale>
+                                      <p:cBhvr>
+                                        <p:cTn id="25" dur="26">
+                                          <p:stCondLst>
+                                            <p:cond delay="650"/>
+                                          </p:stCondLst>
+                                        </p:cTn>
+                                        <p:tgtEl>
+                                          <p:spTgt spid="4"/>
+                                        </p:tgtEl>
+                                      </p:cBhvr>
+                                      <p:to x="100000" y="60000"/>
+                                    </p:animScale>
+                                    <p:animScale>
+                                      <p:cBhvr>
+                                        <p:cTn id="26" dur="166" decel="50000">
+                                          <p:stCondLst>
+                                            <p:cond delay="676"/>
+                                          </p:stCondLst>
+                                        </p:cTn>
+                                        <p:tgtEl>
+                                          <p:spTgt spid="4"/>
+                                        </p:tgtEl>
+                                      </p:cBhvr>
+                                      <p:to x="100000" y="100000"/>
+                                    </p:animScale>
+                                    <p:animScale>
+                                      <p:cBhvr>
+                                        <p:cTn id="27" dur="26">
+                                          <p:stCondLst>
+                                            <p:cond delay="1312"/>
+                                          </p:stCondLst>
+                                        </p:cTn>
+                                        <p:tgtEl>
+                                          <p:spTgt spid="4"/>
+                                        </p:tgtEl>
+                                      </p:cBhvr>
+                                      <p:to x="100000" y="80000"/>
+                                    </p:animScale>
+                                    <p:animScale>
+                                      <p:cBhvr>
+                                        <p:cTn id="28" dur="166" decel="50000">
+                                          <p:stCondLst>
+                                            <p:cond delay="1338"/>
+                                          </p:stCondLst>
+                                        </p:cTn>
+                                        <p:tgtEl>
+                                          <p:spTgt spid="4"/>
+                                        </p:tgtEl>
+                                      </p:cBhvr>
+                                      <p:to x="100000" y="100000"/>
+                                    </p:animScale>
+                                    <p:animScale>
+                                      <p:cBhvr>
+                                        <p:cTn id="29" dur="26">
+                                          <p:stCondLst>
+                                            <p:cond delay="1642"/>
+                                          </p:stCondLst>
+                                        </p:cTn>
+                                        <p:tgtEl>
+                                          <p:spTgt spid="4"/>
+                                        </p:tgtEl>
+                                      </p:cBhvr>
+                                      <p:to x="100000" y="90000"/>
+                                    </p:animScale>
+                                    <p:animScale>
+                                      <p:cBhvr>
+                                        <p:cTn id="30" dur="166" decel="50000">
+                                          <p:stCondLst>
+                                            <p:cond delay="1668"/>
+                                          </p:stCondLst>
+                                        </p:cTn>
+                                        <p:tgtEl>
+                                          <p:spTgt spid="4"/>
+                                        </p:tgtEl>
+                                      </p:cBhvr>
+                                      <p:to x="100000" y="100000"/>
+                                    </p:animScale>
+                                    <p:animScale>
+                                      <p:cBhvr>
+                                        <p:cTn id="31" dur="26">
+                                          <p:stCondLst>
+                                            <p:cond delay="1808"/>
+                                          </p:stCondLst>
+                                        </p:cTn>
+                                        <p:tgtEl>
+                                          <p:spTgt spid="4"/>
+                                        </p:tgtEl>
+                                      </p:cBhvr>
+                                      <p:to x="100000" y="95000"/>
+                                    </p:animScale>
+                                    <p:animScale>
+                                      <p:cBhvr>
+                                        <p:cTn id="32" dur="166" decel="50000">
+                                          <p:stCondLst>
+                                            <p:cond delay="1834"/>
+                                          </p:stCondLst>
+                                        </p:cTn>
+                                        <p:tgtEl>
+                                          <p:spTgt spid="4"/>
+                                        </p:tgtEl>
+                                      </p:cBhvr>
+                                      <p:to x="100000" y="100000"/>
+                                    </p:animScale>
+                                  </p:childTnLst>
+                                </p:cTn>
+                              </p:par>
+                            </p:childTnLst>
+                          </p:cTn>
+                        </p:par>
+                      </p:childTnLst>
+                    </p:cTn>
+                  </p:par>
+                  <p:par>
+                    <p:cTn id="33" fill="hold">
+                      <p:stCondLst>
+                        <p:cond delay="indefinite"/>
+                      </p:stCondLst>
+                      <p:childTnLst>
+                        <p:par>
+                          <p:cTn id="34" fill="hold">
+                            <p:stCondLst>
+                              <p:cond delay="0"/>
+                            </p:stCondLst>
+                            <p:childTnLst>
+                              <p:par>
+                                <p:cTn id="35" presetID="2" presetClass="entr" presetSubtype="4" fill="hold" grpId="0" nodeType="clickEffect">
+                                  <p:stCondLst>
+                                    <p:cond delay="0"/>
+                                  </p:stCondLst>
+                                  <p:childTnLst>
+                                    <p:set>
+                                      <p:cBhvr>
+                                        <p:cTn id="36" dur="1" fill="hold">
+                                          <p:stCondLst>
+                                            <p:cond delay="0"/>
+                                          </p:stCondLst>
+                                        </p:cTn>
+                                        <p:tgtEl>
+                                          <p:spTgt spid="5"/>
+                                        </p:tgtEl>
+                                        <p:attrNameLst>
+                                          <p:attrName>style.visibility</p:attrName>
+                                        </p:attrNameLst>
+                                      </p:cBhvr>
+                                      <p:to>
+                                        <p:strVal val="visible"/>
+                                      </p:to>
+                                    </p:set>
+                                    <p:anim calcmode="lin" valueType="num">
+                                      <p:cBhvr additive="base">
+                                        <p:cTn id="37" dur="500" fill="hold"/>
+                                        <p:tgtEl>
+                                          <p:spTgt spid="5"/>
+                                        </p:tgtEl>
+                                        <p:attrNameLst>
+                                          <p:attrName>ppt_x</p:attrName>
+                                        </p:attrNameLst>
+                                      </p:cBhvr>
+                                      <p:tavLst>
+                                        <p:tav tm="0">
+                                          <p:val>
+                                            <p:strVal val="#ppt_x"/>
+                                          </p:val>
+                                        </p:tav>
+                                        <p:tav tm="100000">
+                                          <p:val>
+                                            <p:strVal val="#ppt_x"/>
+                                          </p:val>
+                                        </p:tav>
+                                      </p:tavLst>
+                                    </p:anim>
+                                    <p:anim calcmode="lin" valueType="num">
+                                      <p:cBhvr additive="base">
+                                        <p:cTn id="38" dur="500" fill="hold"/>
+                                        <p:tgtEl>
+                                          <p:spTgt spid="5"/>
+                                        </p:tgtEl>
+                                        <p:attrNameLst>
+                                          <p:attrName>ppt_y</p:attrName>
+                                        </p:attrNameLst>
+                                      </p:cBhvr>
+                                      <p:tavLst>
+                                        <p:tav tm="0">
+                                          <p:val>
+                                            <p:strVal val="1+#ppt_h/2"/>
+                                          </p:val>
+                                        </p:tav>
+                                        <p:tav tm="100000">
+                                          <p:val>
+                                            <p:strVal val="#ppt_y"/>
+                                          </p:val>
+                                        </p:tav>
+                                      </p:tavLst>
+                                    </p:anim>
+                                  </p:childTnLst>
+                                </p:cTn>
+                              </p:par>
+                            </p:childTnLst>
+                          </p:cTn>
+                        </p:par>
+                      </p:childTnLst>
+                    </p:cTn>
+                  </p:par>
+                  <p:par>
+                    <p:cTn id="39" fill="hold">
+                      <p:stCondLst>
+                        <p:cond delay="indefinite"/>
+                      </p:stCondLst>
+                      <p:childTnLst>
+                        <p:par>
+                          <p:cTn id="40" fill="hold">
+                            <p:stCondLst>
+                              <p:cond delay="0"/>
+                            </p:stCondLst>
+                            <p:childTnLst>
+                              <p:par>
+                                <p:cTn id="41" presetID="26" presetClass="entr" presetSubtype="0" fill="hold" nodeType="clickEffect">
+                                  <p:stCondLst>
+                                    <p:cond delay="0"/>
+                                  </p:stCondLst>
+                                  <p:childTnLst>
+                                    <p:set>
+                                      <p:cBhvr>
+                                        <p:cTn id="42" dur="1" fill="hold">
+                                          <p:stCondLst>
+                                            <p:cond delay="0"/>
+                                          </p:stCondLst>
+                                        </p:cTn>
+                                        <p:tgtEl>
+                                          <p:spTgt spid="7"/>
+                                        </p:tgtEl>
+                                        <p:attrNameLst>
+                                          <p:attrName>style.visibility</p:attrName>
+                                        </p:attrNameLst>
+                                      </p:cBhvr>
+                                      <p:to>
+                                        <p:strVal val="visible"/>
+                                      </p:to>
+                                    </p:set>
+                                    <p:animEffect transition="in" filter="wipe(down)">
+                                      <p:cBhvr>
+                                        <p:cTn id="43" dur="580">
+                                          <p:stCondLst>
+                                            <p:cond delay="0"/>
+                                          </p:stCondLst>
+                                        </p:cTn>
+                                        <p:tgtEl>
+                                          <p:spTgt spid="7"/>
+                                        </p:tgtEl>
+                                      </p:cBhvr>
+                                    </p:animEffect>
+                                    <p:anim calcmode="lin" valueType="num">
+                                      <p:cBhvr>
+                                        <p:cTn id="44" dur="1822" tmFilter="0,0; 0.14,0.36; 0.43,0.73; 0.71,0.91; 1.0,1.0">
+                                          <p:stCondLst>
+                                            <p:cond delay="0"/>
+                                          </p:stCondLst>
+                                        </p:cTn>
+                                        <p:tgtEl>
+                                          <p:spTgt spid="7"/>
+                                        </p:tgtEl>
+                                        <p:attrNameLst>
+                                          <p:attrName>ppt_x</p:attrName>
+                                        </p:attrNameLst>
+                                      </p:cBhvr>
+                                      <p:tavLst>
+                                        <p:tav tm="0">
+                                          <p:val>
+                                            <p:strVal val="#ppt_x-0.25"/>
+                                          </p:val>
+                                        </p:tav>
+                                        <p:tav tm="100000">
+                                          <p:val>
+                                            <p:strVal val="#ppt_x"/>
+                                          </p:val>
+                                        </p:tav>
+                                      </p:tavLst>
+                                    </p:anim>
+                                    <p:anim calcmode="lin" valueType="num">
+                                      <p:cBhvr>
+                                        <p:cTn id="45" dur="664" tmFilter="0.0,0.0; 0.25,0.07; 0.50,0.2; 0.75,0.467; 1.0,1.0">
+                                          <p:stCondLst>
+                                            <p:cond delay="0"/>
+                                          </p:stCondLst>
+                                        </p:cTn>
+                                        <p:tgtEl>
+                                          <p:spTgt spid="7"/>
+                                        </p:tgtEl>
+                                        <p:attrNameLst>
+                                          <p:attrName>ppt_y</p:attrName>
+                                        </p:attrNameLst>
+                                      </p:cBhvr>
+                                      <p:tavLst>
+                                        <p:tav tm="0" fmla="#ppt_y-sin(pi*$)/3">
+                                          <p:val>
+                                            <p:fltVal val="0.5"/>
+                                          </p:val>
+                                        </p:tav>
+                                        <p:tav tm="100000">
+                                          <p:val>
+                                            <p:fltVal val="1"/>
+                                          </p:val>
+                                        </p:tav>
+                                      </p:tavLst>
+                                    </p:anim>
+                                    <p:anim calcmode="lin" valueType="num">
+                                      <p:cBhvr>
+                                        <p:cTn id="46" dur="664" tmFilter="0, 0; 0.125,0.2665; 0.25,0.4; 0.375,0.465; 0.5,0.5;  0.625,0.535; 0.75,0.6; 0.875,0.7335; 1,1">
+                                          <p:stCondLst>
+                                            <p:cond delay="664"/>
+                                          </p:stCondLst>
+                                        </p:cTn>
+                                        <p:tgtEl>
+                                          <p:spTgt spid="7"/>
+                                        </p:tgtEl>
+                                        <p:attrNameLst>
+                                          <p:attrName>ppt_y</p:attrName>
+                                        </p:attrNameLst>
+                                      </p:cBhvr>
+                                      <p:tavLst>
+                                        <p:tav tm="0" fmla="#ppt_y-sin(pi*$)/9">
+                                          <p:val>
+                                            <p:fltVal val="0"/>
+                                          </p:val>
+                                        </p:tav>
+                                        <p:tav tm="100000">
+                                          <p:val>
+                                            <p:fltVal val="1"/>
+                                          </p:val>
+                                        </p:tav>
+                                      </p:tavLst>
+                                    </p:anim>
+                                    <p:anim calcmode="lin" valueType="num">
+                                      <p:cBhvr>
+                                        <p:cTn id="47" dur="332" tmFilter="0, 0; 0.125,0.2665; 0.25,0.4; 0.375,0.465; 0.5,0.5;  0.625,0.535; 0.75,0.6; 0.875,0.7335; 1,1">
+                                          <p:stCondLst>
+                                            <p:cond delay="1324"/>
+                                          </p:stCondLst>
+                                        </p:cTn>
+                                        <p:tgtEl>
+                                          <p:spTgt spid="7"/>
+                                        </p:tgtEl>
+                                        <p:attrNameLst>
+                                          <p:attrName>ppt_y</p:attrName>
+                                        </p:attrNameLst>
+                                      </p:cBhvr>
+                                      <p:tavLst>
+                                        <p:tav tm="0" fmla="#ppt_y-sin(pi*$)/27">
+                                          <p:val>
+                                            <p:fltVal val="0"/>
+                                          </p:val>
+                                        </p:tav>
+                                        <p:tav tm="100000">
+                                          <p:val>
+                                            <p:fltVal val="1"/>
+                                          </p:val>
+                                        </p:tav>
+                                      </p:tavLst>
+                                    </p:anim>
+                                    <p:anim calcmode="lin" valueType="num">
+                                      <p:cBhvr>
+                                        <p:cTn id="48" dur="164" tmFilter="0, 0; 0.125,0.2665; 0.25,0.4; 0.375,0.465; 0.5,0.5;  0.625,0.535; 0.75,0.6; 0.875,0.7335; 1,1">
+                                          <p:stCondLst>
+                                            <p:cond delay="1656"/>
+                                          </p:stCondLst>
+                                        </p:cTn>
+                                        <p:tgtEl>
+                                          <p:spTgt spid="7"/>
+                                        </p:tgtEl>
+                                        <p:attrNameLst>
+                                          <p:attrName>ppt_y</p:attrName>
+                                        </p:attrNameLst>
+                                      </p:cBhvr>
+                                      <p:tavLst>
+                                        <p:tav tm="0" fmla="#ppt_y-sin(pi*$)/81">
+                                          <p:val>
+                                            <p:fltVal val="0"/>
+                                          </p:val>
+                                        </p:tav>
+                                        <p:tav tm="100000">
+                                          <p:val>
+                                            <p:fltVal val="1"/>
+                                          </p:val>
+                                        </p:tav>
+                                      </p:tavLst>
+                                    </p:anim>
+                                    <p:animScale>
+                                      <p:cBhvr>
+                                        <p:cTn id="49" dur="26">
+                                          <p:stCondLst>
+                                            <p:cond delay="650"/>
+                                          </p:stCondLst>
+                                        </p:cTn>
+                                        <p:tgtEl>
+                                          <p:spTgt spid="7"/>
+                                        </p:tgtEl>
+                                      </p:cBhvr>
+                                      <p:to x="100000" y="60000"/>
+                                    </p:animScale>
+                                    <p:animScale>
+                                      <p:cBhvr>
+                                        <p:cTn id="50" dur="166" decel="50000">
+                                          <p:stCondLst>
+                                            <p:cond delay="676"/>
+                                          </p:stCondLst>
+                                        </p:cTn>
+                                        <p:tgtEl>
+                                          <p:spTgt spid="7"/>
+                                        </p:tgtEl>
+                                      </p:cBhvr>
+                                      <p:to x="100000" y="100000"/>
+                                    </p:animScale>
+                                    <p:animScale>
+                                      <p:cBhvr>
+                                        <p:cTn id="51" dur="26">
+                                          <p:stCondLst>
+                                            <p:cond delay="1312"/>
+                                          </p:stCondLst>
+                                        </p:cTn>
+                                        <p:tgtEl>
+                                          <p:spTgt spid="7"/>
+                                        </p:tgtEl>
+                                      </p:cBhvr>
+                                      <p:to x="100000" y="80000"/>
+                                    </p:animScale>
+                                    <p:animScale>
+                                      <p:cBhvr>
+                                        <p:cTn id="52" dur="166" decel="50000">
+                                          <p:stCondLst>
+                                            <p:cond delay="1338"/>
+                                          </p:stCondLst>
+                                        </p:cTn>
+                                        <p:tgtEl>
+                                          <p:spTgt spid="7"/>
+                                        </p:tgtEl>
+                                      </p:cBhvr>
+                                      <p:to x="100000" y="100000"/>
+                                    </p:animScale>
+                                    <p:animScale>
+                                      <p:cBhvr>
+                                        <p:cTn id="53" dur="26">
+                                          <p:stCondLst>
+                                            <p:cond delay="1642"/>
+                                          </p:stCondLst>
+                                        </p:cTn>
+                                        <p:tgtEl>
+                                          <p:spTgt spid="7"/>
+                                        </p:tgtEl>
+                                      </p:cBhvr>
+                                      <p:to x="100000" y="90000"/>
+                                    </p:animScale>
+                                    <p:animScale>
+                                      <p:cBhvr>
+                                        <p:cTn id="54" dur="166" decel="50000">
+                                          <p:stCondLst>
+                                            <p:cond delay="1668"/>
+                                          </p:stCondLst>
+                                        </p:cTn>
+                                        <p:tgtEl>
+                                          <p:spTgt spid="7"/>
+                                        </p:tgtEl>
+                                      </p:cBhvr>
+                                      <p:to x="100000" y="100000"/>
+                                    </p:animScale>
+                                    <p:animScale>
+                                      <p:cBhvr>
+                                        <p:cTn id="55" dur="26">
+                                          <p:stCondLst>
+                                            <p:cond delay="1808"/>
+                                          </p:stCondLst>
+                                        </p:cTn>
+                                        <p:tgtEl>
+                                          <p:spTgt spid="7"/>
+                                        </p:tgtEl>
+                                      </p:cBhvr>
+                                      <p:to x="100000" y="95000"/>
+                                    </p:animScale>
+                                    <p:animScale>
+                                      <p:cBhvr>
+                                        <p:cTn id="56" dur="166" decel="50000">
+                                          <p:stCondLst>
+                                            <p:cond delay="1834"/>
+                                          </p:stCondLst>
+                                        </p:cTn>
+                                        <p:tgtEl>
+                                          <p:spTgt spid="7"/>
+                                        </p:tgtEl>
+                                      </p:cBhvr>
+                                      <p:to x="100000" y="100000"/>
+                                    </p:animScale>
+                                  </p:childTnLst>
+                                </p:cTn>
+                              </p:par>
+                            </p:childTnLst>
+                          </p:cTn>
+                        </p:par>
+                      </p:childTnLst>
+                    </p:cTn>
+                  </p:par>
+                </p:childTnLst>
+              </p:cTn>
+              <p:prevCondLst>
+                <p:cond evt="onPrev" delay="0">
+                  <p:tgtEl>
+                    <p:sldTgt/>
+                  </p:tgtEl>
+                </p:cond>
+              </p:prevCondLst>
+              <p:nextCondLst>
+                <p:cond evt="onNext" delay="0">
+                  <p:tgtEl>
+                    <p:sldTgt/>
+                  </p:tgtEl>
+                </p:cond>
+              </p:nextCondLst>
+            </p:seq>
+          </p:childTnLst>
+        </p:cTn>
+      </p:par>
+    </p:tnLst>
+    <p:bldLst>
+      <p:bldP spid="2" grpId="0"/>
+      <p:bldP spid="3" grpId="0"/>
+      <p:bldP spid="4" grpId="0"/>
+      <p:bldP spid="5" grpId="0"/>
+    </p:bldLst>
+  </p:timing>
+</p:sld>
+</file>
+
+<file path=ppt/slides/slide6.xml><?xml version="1.0" encoding="utf-8"?>
+<p:sld xmlns:a="http://schemas.openxmlformats.org/drawingml/2006/main" xmlns:r="http://schemas.openxmlformats.org/officeDocument/2006/relationships" xmlns:p="http://schemas.openxmlformats.org/presentationml/2006/main">
+  <p:cSld>
+    <p:spTree>
+      <p:nvGrpSpPr>
+        <p:cNvPr id="1" name=""/>
+        <p:cNvGrpSpPr/>
+        <p:nvPr/>
+      </p:nvGrpSpPr>
+      <p:grpSpPr>
+        <a:xfrm>
+          <a:off x="0" y="0"/>
+          <a:ext cx="0" cy="0"/>
+          <a:chOff x="0" y="0"/>
+          <a:chExt cx="0" cy="0"/>
+        </a:xfrm>
+      </p:grpSpPr>
+      <p:sp>
+        <p:nvSpPr>
+          <p:cNvPr id="2" name="Szövegdoboz 1">
+            <a:extLst>
+              <a:ext uri="{FF2B5EF4-FFF2-40B4-BE49-F238E27FC236}">
+                <a16:creationId xmlns:a16="http://schemas.microsoft.com/office/drawing/2014/main" id="{A8DC394D-9ECD-413E-A5D0-7DBBFE824DAD}"/>
+              </a:ext>
+            </a:extLst>
+          </p:cNvPr>
+          <p:cNvSpPr txBox="1"/>
+          <p:nvPr/>
+        </p:nvSpPr>
+        <p:spPr>
+          <a:xfrm>
+            <a:off x="0" y="0"/>
+            <a:ext cx="6731000" cy="861774"/>
+          </a:xfrm>
+          <a:prstGeom prst="rect">
+            <a:avLst/>
+          </a:prstGeom>
+          <a:noFill/>
+        </p:spPr>
+        <p:txBody>
+          <a:bodyPr wrap="square" rtlCol="0">
+            <a:spAutoFit/>
+          </a:bodyPr>
+          <a:lstStyle/>
+          <a:p>
+            <a:r>
+              <a:rPr lang="hu-HU" sz="5000" b="1" dirty="0">
+                <a:latin typeface="Times New Roman" panose="02020603050405020304" pitchFamily="18" charset="0"/>
+                <a:cs typeface="Times New Roman" panose="02020603050405020304" pitchFamily="18" charset="0"/>
+              </a:rPr>
+              <a:t>Az oldal bemutatása</a:t>
+            </a:r>
+          </a:p>
+        </p:txBody>
+      </p:sp>
+      <p:sp>
+        <p:nvSpPr>
+          <p:cNvPr id="3" name="Szövegdoboz 2">
+            <a:extLst>
+              <a:ext uri="{FF2B5EF4-FFF2-40B4-BE49-F238E27FC236}">
+                <a16:creationId xmlns:a16="http://schemas.microsoft.com/office/drawing/2014/main" id="{C255EF36-8689-43FE-BA54-87831A9898A4}"/>
+              </a:ext>
+            </a:extLst>
+          </p:cNvPr>
+          <p:cNvSpPr txBox="1"/>
+          <p:nvPr/>
+        </p:nvSpPr>
+        <p:spPr>
+          <a:xfrm>
+            <a:off x="279401" y="861774"/>
+            <a:ext cx="9067800" cy="2169825"/>
+          </a:xfrm>
+          <a:prstGeom prst="rect">
+            <a:avLst/>
+          </a:prstGeom>
+          <a:noFill/>
+        </p:spPr>
+        <p:txBody>
+          <a:bodyPr wrap="square" rtlCol="0">
+            <a:spAutoFit/>
+          </a:bodyPr>
+          <a:lstStyle/>
+          <a:p>
+            <a:r>
+              <a:rPr lang="hu-HU" sz="2300" dirty="0">
+                <a:latin typeface="Times New Roman" panose="02020603050405020304" pitchFamily="18" charset="0"/>
+                <a:cs typeface="Times New Roman" panose="02020603050405020304" pitchFamily="18" charset="0"/>
+              </a:rPr>
+              <a:t>A</a:t>
+            </a:r>
+            <a:r>
+              <a:rPr lang="hu-HU" sz="2000" dirty="0">
+                <a:latin typeface="Times New Roman" panose="02020603050405020304" pitchFamily="18" charset="0"/>
+                <a:cs typeface="Times New Roman" panose="02020603050405020304" pitchFamily="18" charset="0"/>
+              </a:rPr>
+              <a:t> weboldal fejlécében a bal oldalon található a cég logója, a jobb oldalon a cég neve.</a:t>
+            </a:r>
+          </a:p>
+          <a:p>
+            <a:r>
+              <a:rPr lang="hu-HU" sz="2300" dirty="0">
+                <a:latin typeface="Times New Roman" panose="02020603050405020304" pitchFamily="18" charset="0"/>
+                <a:cs typeface="Times New Roman" panose="02020603050405020304" pitchFamily="18" charset="0"/>
+              </a:rPr>
+              <a:t>A</a:t>
+            </a:r>
+            <a:r>
+              <a:rPr lang="hu-HU" sz="2000" dirty="0">
+                <a:latin typeface="Times New Roman" panose="02020603050405020304" pitchFamily="18" charset="0"/>
+                <a:cs typeface="Times New Roman" panose="02020603050405020304" pitchFamily="18" charset="0"/>
+              </a:rPr>
+              <a:t> fejléc alatt található egy bemutatkozás című kártya, amely tartalmaz egy profilképet és egy rövid bemutatkozást.</a:t>
+            </a:r>
+          </a:p>
+          <a:p>
+            <a:r>
+              <a:rPr lang="hu-HU" sz="2300" dirty="0">
+                <a:latin typeface="Times New Roman" panose="02020603050405020304" pitchFamily="18" charset="0"/>
+                <a:cs typeface="Times New Roman" panose="02020603050405020304" pitchFamily="18" charset="0"/>
+              </a:rPr>
+              <a:t>A</a:t>
+            </a:r>
+            <a:r>
+              <a:rPr lang="hu-HU" sz="2000" dirty="0">
+                <a:latin typeface="Times New Roman" panose="02020603050405020304" pitchFamily="18" charset="0"/>
+                <a:cs typeface="Times New Roman" panose="02020603050405020304" pitchFamily="18" charset="0"/>
+              </a:rPr>
+              <a:t> bemutatkozás után található  a cég 3 legfőbb szolgáltatása, azoknak kezdőárai.</a:t>
+            </a:r>
+          </a:p>
+          <a:p>
+            <a:r>
+              <a:rPr lang="hu-HU" sz="2300" dirty="0">
+                <a:latin typeface="Times New Roman" panose="02020603050405020304" pitchFamily="18" charset="0"/>
+                <a:cs typeface="Times New Roman" panose="02020603050405020304" pitchFamily="18" charset="0"/>
+              </a:rPr>
+              <a:t>A</a:t>
+            </a:r>
+            <a:r>
+              <a:rPr lang="hu-HU" sz="2000" dirty="0">
+                <a:latin typeface="Times New Roman" panose="02020603050405020304" pitchFamily="18" charset="0"/>
+                <a:cs typeface="Times New Roman" panose="02020603050405020304" pitchFamily="18" charset="0"/>
+              </a:rPr>
+              <a:t> szolgáltatások alatt találhatóak a vélemények és a kapcsolatfelvétel szekció</a:t>
+            </a:r>
+          </a:p>
+          <a:p>
+            <a:r>
+              <a:rPr lang="hu-HU" sz="2300" dirty="0">
+                <a:latin typeface="Times New Roman" panose="02020603050405020304" pitchFamily="18" charset="0"/>
+                <a:cs typeface="Times New Roman" panose="02020603050405020304" pitchFamily="18" charset="0"/>
+              </a:rPr>
+              <a:t>Az</a:t>
+            </a:r>
+            <a:r>
+              <a:rPr lang="hu-HU" sz="2000" dirty="0">
+                <a:latin typeface="Times New Roman" panose="02020603050405020304" pitchFamily="18" charset="0"/>
+                <a:cs typeface="Times New Roman" panose="02020603050405020304" pitchFamily="18" charset="0"/>
+              </a:rPr>
+              <a:t> oldal láblécében Copyright jogok vannak.</a:t>
+            </a:r>
+          </a:p>
+        </p:txBody>
+      </p:sp>
+      <p:pic>
+        <p:nvPicPr>
+          <p:cNvPr id="5" name="Kép 4">
+            <a:extLst>
+              <a:ext uri="{FF2B5EF4-FFF2-40B4-BE49-F238E27FC236}">
+                <a16:creationId xmlns:a16="http://schemas.microsoft.com/office/drawing/2014/main" id="{1BA46A09-1E89-4FFF-A1D7-CB3FFFDC45FD}"/>
+              </a:ext>
+            </a:extLst>
+          </p:cNvPr>
+          <p:cNvPicPr>
+            <a:picLocks noChangeAspect="1"/>
+          </p:cNvPicPr>
+          <p:nvPr/>
+        </p:nvPicPr>
+        <p:blipFill>
+          <a:blip r:embed="rId2">
+            <a:extLst>
+              <a:ext uri="{28A0092B-C50C-407E-A947-70E740481C1C}">
+                <a14:useLocalDpi xmlns:a14="http://schemas.microsoft.com/office/drawing/2010/main" val="0"/>
+              </a:ext>
+            </a:extLst>
+          </a:blip>
+          <a:stretch>
+            <a:fillRect/>
+          </a:stretch>
+        </p:blipFill>
+        <p:spPr>
+          <a:xfrm>
+            <a:off x="279401" y="3200401"/>
+            <a:ext cx="5418667" cy="3312228"/>
+          </a:xfrm>
+          <a:prstGeom prst="rect">
+            <a:avLst/>
+          </a:prstGeom>
+        </p:spPr>
+      </p:pic>
+      <p:pic>
+        <p:nvPicPr>
+          <p:cNvPr id="7" name="Kép 6">
+            <a:extLst>
+              <a:ext uri="{FF2B5EF4-FFF2-40B4-BE49-F238E27FC236}">
+                <a16:creationId xmlns:a16="http://schemas.microsoft.com/office/drawing/2014/main" id="{86A641C6-BCEA-47C5-8ED1-D96CBB534398}"/>
+              </a:ext>
+            </a:extLst>
+          </p:cNvPr>
+          <p:cNvPicPr>
+            <a:picLocks noChangeAspect="1"/>
+          </p:cNvPicPr>
+          <p:nvPr/>
+        </p:nvPicPr>
+        <p:blipFill>
+          <a:blip r:embed="rId3">
+            <a:extLst>
+              <a:ext uri="{28A0092B-C50C-407E-A947-70E740481C1C}">
+                <a14:useLocalDpi xmlns:a14="http://schemas.microsoft.com/office/drawing/2010/main" val="0"/>
+              </a:ext>
+            </a:extLst>
+          </a:blip>
+          <a:stretch>
+            <a:fillRect/>
+          </a:stretch>
+        </p:blipFill>
+        <p:spPr>
+          <a:xfrm>
+            <a:off x="6417733" y="3200401"/>
+            <a:ext cx="5418668" cy="3245247"/>
+          </a:xfrm>
+          <a:prstGeom prst="rect">
+            <a:avLst/>
+          </a:prstGeom>
+        </p:spPr>
+      </p:pic>
+    </p:spTree>
+    <p:extLst>
+      <p:ext uri="{BB962C8B-B14F-4D97-AF65-F5344CB8AC3E}">
+        <p14:creationId xmlns:p14="http://schemas.microsoft.com/office/powerpoint/2010/main" val="33115491"/>
+      </p:ext>
+    </p:extLst>
+  </p:cSld>
+  <p:clrMapOvr>
+    <a:masterClrMapping/>
+  </p:clrMapOvr>
+  <p:timing>
+    <p:tnLst>
+      <p:par>
+        <p:cTn id="1" dur="indefinite" restart="never" nodeType="tmRoot">
+          <p:childTnLst>
+            <p:seq concurrent="1" nextAc="seek">
+              <p:cTn id="2" dur="indefinite" nodeType="mainSeq">
+                <p:childTnLst>
+                  <p:par>
+                    <p:cTn id="3" fill="hold">
+                      <p:stCondLst>
+                        <p:cond delay="indefinite"/>
+                      </p:stCondLst>
+                      <p:childTnLst>
+                        <p:par>
+                          <p:cTn id="4" fill="hold">
+                            <p:stCondLst>
+                              <p:cond delay="0"/>
+                            </p:stCondLst>
+                            <p:childTnLst>
+                              <p:par>
+                                <p:cTn id="5" presetID="2" presetClass="entr" presetSubtype="4" fill="hold" grpId="0" nodeType="clickEffect">
+                                  <p:stCondLst>
+                                    <p:cond delay="0"/>
+                                  </p:stCondLst>
+                                  <p:childTnLst>
+                                    <p:set>
+                                      <p:cBhvr>
+                                        <p:cTn id="6" dur="1" fill="hold">
+                                          <p:stCondLst>
+                                            <p:cond delay="0"/>
+                                          </p:stCondLst>
+                                        </p:cTn>
+                                        <p:tgtEl>
+                                          <p:spTgt spid="2"/>
+                                        </p:tgtEl>
+                                        <p:attrNameLst>
+                                          <p:attrName>style.visibility</p:attrName>
+                                        </p:attrNameLst>
+                                      </p:cBhvr>
+                                      <p:to>
+                                        <p:strVal val="visible"/>
+                                      </p:to>
+                                    </p:set>
+                                    <p:anim calcmode="lin" valueType="num">
+                                      <p:cBhvr additive="base">
+                                        <p:cTn id="7" dur="500" fill="hold"/>
+                                        <p:tgtEl>
+                                          <p:spTgt spid="2"/>
+                                        </p:tgtEl>
+                                        <p:attrNameLst>
+                                          <p:attrName>ppt_x</p:attrName>
+                                        </p:attrNameLst>
+                                      </p:cBhvr>
+                                      <p:tavLst>
+                                        <p:tav tm="0">
+                                          <p:val>
+                                            <p:strVal val="#ppt_x"/>
+                                          </p:val>
+                                        </p:tav>
+                                        <p:tav tm="100000">
+                                          <p:val>
+                                            <p:strVal val="#ppt_x"/>
+                                          </p:val>
+                                        </p:tav>
+                                      </p:tavLst>
+                                    </p:anim>
+                                    <p:anim calcmode="lin" valueType="num">
+                                      <p:cBhvr additive="base">
+                                        <p:cTn id="8" dur="500" fill="hold"/>
+                                        <p:tgtEl>
+                                          <p:spTgt spid="2"/>
+                                        </p:tgtEl>
+                                        <p:attrNameLst>
+                                          <p:attrName>ppt_y</p:attrName>
+                                        </p:attrNameLst>
+                                      </p:cBhvr>
+                                      <p:tavLst>
+                                        <p:tav tm="0">
+                                          <p:val>
+                                            <p:strVal val="1+#ppt_h/2"/>
+                                          </p:val>
+                                        </p:tav>
+                                        <p:tav tm="100000">
+                                          <p:val>
+                                            <p:strVal val="#ppt_y"/>
+                                          </p:val>
+                                        </p:tav>
+                                      </p:tavLst>
+                                    </p:anim>
+                                  </p:childTnLst>
+                                </p:cTn>
+                              </p:par>
+                            </p:childTnLst>
+                          </p:cTn>
+                        </p:par>
+                      </p:childTnLst>
+                    </p:cTn>
+                  </p:par>
+                  <p:par>
+                    <p:cTn id="9" fill="hold">
+                      <p:stCondLst>
+                        <p:cond delay="indefinite"/>
+                      </p:stCondLst>
+                      <p:childTnLst>
+                        <p:par>
+                          <p:cTn id="10" fill="hold">
+                            <p:stCondLst>
+                              <p:cond delay="0"/>
+                            </p:stCondLst>
+                            <p:childTnLst>
+                              <p:par>
+                                <p:cTn id="11" presetID="26" presetClass="entr" presetSubtype="0" fill="hold" grpId="0" nodeType="clickEffect">
+                                  <p:stCondLst>
+                                    <p:cond delay="0"/>
+                                  </p:stCondLst>
+                                  <p:childTnLst>
+                                    <p:set>
+                                      <p:cBhvr>
+                                        <p:cTn id="12" dur="1" fill="hold">
+                                          <p:stCondLst>
+                                            <p:cond delay="0"/>
+                                          </p:stCondLst>
+                                        </p:cTn>
+                                        <p:tgtEl>
+                                          <p:spTgt spid="3"/>
+                                        </p:tgtEl>
+                                        <p:attrNameLst>
+                                          <p:attrName>style.visibility</p:attrName>
+                                        </p:attrNameLst>
+                                      </p:cBhvr>
+                                      <p:to>
+                                        <p:strVal val="visible"/>
+                                      </p:to>
+                                    </p:set>
+                                    <p:animEffect transition="in" filter="wipe(down)">
+                                      <p:cBhvr>
+                                        <p:cTn id="13" dur="580">
+                                          <p:stCondLst>
+                                            <p:cond delay="0"/>
+                                          </p:stCondLst>
+                                        </p:cTn>
+                                        <p:tgtEl>
+                                          <p:spTgt spid="3"/>
+                                        </p:tgtEl>
+                                      </p:cBhvr>
+                                    </p:animEffect>
+                                    <p:anim calcmode="lin" valueType="num">
+                                      <p:cBhvr>
+                                        <p:cTn id="14" dur="1822" tmFilter="0,0; 0.14,0.36; 0.43,0.73; 0.71,0.91; 1.0,1.0">
+                                          <p:stCondLst>
+                                            <p:cond delay="0"/>
+                                          </p:stCondLst>
+                                        </p:cTn>
+                                        <p:tgtEl>
+                                          <p:spTgt spid="3"/>
+                                        </p:tgtEl>
+                                        <p:attrNameLst>
+                                          <p:attrName>ppt_x</p:attrName>
+                                        </p:attrNameLst>
+                                      </p:cBhvr>
+                                      <p:tavLst>
+                                        <p:tav tm="0">
+                                          <p:val>
+                                            <p:strVal val="#ppt_x-0.25"/>
+                                          </p:val>
+                                        </p:tav>
+                                        <p:tav tm="100000">
+                                          <p:val>
+                                            <p:strVal val="#ppt_x"/>
+                                          </p:val>
+                                        </p:tav>
+                                      </p:tavLst>
+                                    </p:anim>
+                                    <p:anim calcmode="lin" valueType="num">
+                                      <p:cBhvr>
+                                        <p:cTn id="15" dur="664" tmFilter="0.0,0.0; 0.25,0.07; 0.50,0.2; 0.75,0.467; 1.0,1.0">
+                                          <p:stCondLst>
+                                            <p:cond delay="0"/>
+                                          </p:stCondLst>
+                                        </p:cTn>
+                                        <p:tgtEl>
+                                          <p:spTgt spid="3"/>
+                                        </p:tgtEl>
+                                        <p:attrNameLst>
+                                          <p:attrName>ppt_y</p:attrName>
+                                        </p:attrNameLst>
+                                      </p:cBhvr>
+                                      <p:tavLst>
+                                        <p:tav tm="0" fmla="#ppt_y-sin(pi*$)/3">
+                                          <p:val>
+                                            <p:fltVal val="0.5"/>
+                                          </p:val>
+                                        </p:tav>
+                                        <p:tav tm="100000">
+                                          <p:val>
+                                            <p:fltVal val="1"/>
+                                          </p:val>
+                                        </p:tav>
+                                      </p:tavLst>
+                                    </p:anim>
+                                    <p:anim calcmode="lin" valueType="num">
+                                      <p:cBhvr>
+                                        <p:cTn id="16" dur="664" tmFilter="0, 0; 0.125,0.2665; 0.25,0.4; 0.375,0.465; 0.5,0.5;  0.625,0.535; 0.75,0.6; 0.875,0.7335; 1,1">
+                                          <p:stCondLst>
+                                            <p:cond delay="664"/>
+                                          </p:stCondLst>
+                                        </p:cTn>
+                                        <p:tgtEl>
+                                          <p:spTgt spid="3"/>
+                                        </p:tgtEl>
+                                        <p:attrNameLst>
+                                          <p:attrName>ppt_y</p:attrName>
+                                        </p:attrNameLst>
+                                      </p:cBhvr>
+                                      <p:tavLst>
+                                        <p:tav tm="0" fmla="#ppt_y-sin(pi*$)/9">
+                                          <p:val>
+                                            <p:fltVal val="0"/>
+                                          </p:val>
+                                        </p:tav>
+                                        <p:tav tm="100000">
+                                          <p:val>
+                                            <p:fltVal val="1"/>
+                                          </p:val>
+                                        </p:tav>
+                                      </p:tavLst>
+                                    </p:anim>
+                                    <p:anim calcmode="lin" valueType="num">
+                                      <p:cBhvr>
+                                        <p:cTn id="17" dur="332" tmFilter="0, 0; 0.125,0.2665; 0.25,0.4; 0.375,0.465; 0.5,0.5;  0.625,0.535; 0.75,0.6; 0.875,0.7335; 1,1">
+                                          <p:stCondLst>
+                                            <p:cond delay="1324"/>
+                                          </p:stCondLst>
+                                        </p:cTn>
+                                        <p:tgtEl>
+                                          <p:spTgt spid="3"/>
+                                        </p:tgtEl>
+                                        <p:attrNameLst>
+                                          <p:attrName>ppt_y</p:attrName>
+                                        </p:attrNameLst>
+                                      </p:cBhvr>
+                                      <p:tavLst>
+                                        <p:tav tm="0" fmla="#ppt_y-sin(pi*$)/27">
+                                          <p:val>
+                                            <p:fltVal val="0"/>
+                                          </p:val>
+                                        </p:tav>
+                                        <p:tav tm="100000">
+                                          <p:val>
+                                            <p:fltVal val="1"/>
+                                          </p:val>
+                                        </p:tav>
+                                      </p:tavLst>
+                                    </p:anim>
+                                    <p:anim calcmode="lin" valueType="num">
+                                      <p:cBhvr>
+                                        <p:cTn id="18" dur="164" tmFilter="0, 0; 0.125,0.2665; 0.25,0.4; 0.375,0.465; 0.5,0.5;  0.625,0.535; 0.75,0.6; 0.875,0.7335; 1,1">
+                                          <p:stCondLst>
+                                            <p:cond delay="1656"/>
+                                          </p:stCondLst>
+                                        </p:cTn>
+                                        <p:tgtEl>
+                                          <p:spTgt spid="3"/>
+                                        </p:tgtEl>
+                                        <p:attrNameLst>
+                                          <p:attrName>ppt_y</p:attrName>
+                                        </p:attrNameLst>
+                                      </p:cBhvr>
+                                      <p:tavLst>
+                                        <p:tav tm="0" fmla="#ppt_y-sin(pi*$)/81">
+                                          <p:val>
+                                            <p:fltVal val="0"/>
+                                          </p:val>
+                                        </p:tav>
+                                        <p:tav tm="100000">
+                                          <p:val>
+                                            <p:fltVal val="1"/>
+                                          </p:val>
+                                        </p:tav>
+                                      </p:tavLst>
+                                    </p:anim>
+                                    <p:animScale>
+                                      <p:cBhvr>
+                                        <p:cTn id="19" dur="26">
+                                          <p:stCondLst>
+                                            <p:cond delay="650"/>
+                                          </p:stCondLst>
+                                        </p:cTn>
+                                        <p:tgtEl>
+                                          <p:spTgt spid="3"/>
+                                        </p:tgtEl>
+                                      </p:cBhvr>
+                                      <p:to x="100000" y="60000"/>
+                                    </p:animScale>
+                                    <p:animScale>
+                                      <p:cBhvr>
+                                        <p:cTn id="20" dur="166" decel="50000">
+                                          <p:stCondLst>
+                                            <p:cond delay="676"/>
+                                          </p:stCondLst>
+                                        </p:cTn>
+                                        <p:tgtEl>
+                                          <p:spTgt spid="3"/>
+                                        </p:tgtEl>
+                                      </p:cBhvr>
+                                      <p:to x="100000" y="100000"/>
+                                    </p:animScale>
+                                    <p:animScale>
+                                      <p:cBhvr>
+                                        <p:cTn id="21" dur="26">
+                                          <p:stCondLst>
+                                            <p:cond delay="1312"/>
+                                          </p:stCondLst>
+                                        </p:cTn>
+                                        <p:tgtEl>
+                                          <p:spTgt spid="3"/>
+                                        </p:tgtEl>
+                                      </p:cBhvr>
+                                      <p:to x="100000" y="80000"/>
+                                    </p:animScale>
+                                    <p:animScale>
+                                      <p:cBhvr>
+                                        <p:cTn id="22" dur="166" decel="50000">
+                                          <p:stCondLst>
+                                            <p:cond delay="1338"/>
+                                          </p:stCondLst>
+                                        </p:cTn>
+                                        <p:tgtEl>
+                                          <p:spTgt spid="3"/>
+                                        </p:tgtEl>
+                                      </p:cBhvr>
+                                      <p:to x="100000" y="100000"/>
+                                    </p:animScale>
+                                    <p:animScale>
+                                      <p:cBhvr>
+                                        <p:cTn id="23" dur="26">
+                                          <p:stCondLst>
+                                            <p:cond delay="1642"/>
+                                          </p:stCondLst>
+                                        </p:cTn>
+                                        <p:tgtEl>
+                                          <p:spTgt spid="3"/>
+                                        </p:tgtEl>
+                                      </p:cBhvr>
+                                      <p:to x="100000" y="90000"/>
+                                    </p:animScale>
+                                    <p:animScale>
+                                      <p:cBhvr>
+                                        <p:cTn id="24" dur="166" decel="50000">
+                                          <p:stCondLst>
+                                            <p:cond delay="1668"/>
+                                          </p:stCondLst>
+                                        </p:cTn>
+                                        <p:tgtEl>
+                                          <p:spTgt spid="3"/>
+                                        </p:tgtEl>
+                                      </p:cBhvr>
+                                      <p:to x="100000" y="100000"/>
+                                    </p:animScale>
+                                    <p:animScale>
+                                      <p:cBhvr>
+                                        <p:cTn id="25" dur="26">
+                                          <p:stCondLst>
+                                            <p:cond delay="1808"/>
+                                          </p:stCondLst>
+                                        </p:cTn>
+                                        <p:tgtEl>
+                                          <p:spTgt spid="3"/>
+                                        </p:tgtEl>
+                                      </p:cBhvr>
+                                      <p:to x="100000" y="95000"/>
+                                    </p:animScale>
+                                    <p:animScale>
+                                      <p:cBhvr>
+                                        <p:cTn id="26" dur="166" decel="50000">
+                                          <p:stCondLst>
+                                            <p:cond delay="1834"/>
+                                          </p:stCondLst>
+                                        </p:cTn>
+                                        <p:tgtEl>
+                                          <p:spTgt spid="3"/>
+                                        </p:tgtEl>
+                                      </p:cBhvr>
+                                      <p:to x="100000" y="100000"/>
+                                    </p:animScale>
+                                  </p:childTnLst>
+                                </p:cTn>
+                              </p:par>
+                            </p:childTnLst>
+                          </p:cTn>
+                        </p:par>
+                      </p:childTnLst>
+                    </p:cTn>
+                  </p:par>
+                  <p:par>
+                    <p:cTn id="27" fill="hold">
+                      <p:stCondLst>
+                        <p:cond delay="indefinite"/>
+                      </p:stCondLst>
+                      <p:childTnLst>
+                        <p:par>
+                          <p:cTn id="28" fill="hold">
+                            <p:stCondLst>
+                              <p:cond delay="0"/>
+                            </p:stCondLst>
+                            <p:childTnLst>
+                              <p:par>
+                                <p:cTn id="29" presetID="31" presetClass="entr" presetSubtype="0" fill="hold" nodeType="clickEffect">
+                                  <p:stCondLst>
+                                    <p:cond delay="0"/>
+                                  </p:stCondLst>
+                                  <p:childTnLst>
+                                    <p:set>
+                                      <p:cBhvr>
+                                        <p:cTn id="30" dur="1" fill="hold">
+                                          <p:stCondLst>
+                                            <p:cond delay="0"/>
+                                          </p:stCondLst>
+                                        </p:cTn>
+                                        <p:tgtEl>
+                                          <p:spTgt spid="5"/>
+                                        </p:tgtEl>
+                                        <p:attrNameLst>
+                                          <p:attrName>style.visibility</p:attrName>
+                                        </p:attrNameLst>
+                                      </p:cBhvr>
+                                      <p:to>
+                                        <p:strVal val="visible"/>
+                                      </p:to>
+                                    </p:set>
+                                    <p:anim calcmode="lin" valueType="num">
+                                      <p:cBhvr>
+                                        <p:cTn id="31" dur="1000" fill="hold"/>
+                                        <p:tgtEl>
+                                          <p:spTgt spid="5"/>
+                                        </p:tgtEl>
+                                        <p:attrNameLst>
+                                          <p:attrName>ppt_w</p:attrName>
+                                        </p:attrNameLst>
+                                      </p:cBhvr>
+                                      <p:tavLst>
+                                        <p:tav tm="0">
+                                          <p:val>
+                                            <p:fltVal val="0"/>
+                                          </p:val>
+                                        </p:tav>
+                                        <p:tav tm="100000">
+                                          <p:val>
+                                            <p:strVal val="#ppt_w"/>
+                                          </p:val>
+                                        </p:tav>
+                                      </p:tavLst>
+                                    </p:anim>
+                                    <p:anim calcmode="lin" valueType="num">
+                                      <p:cBhvr>
+                                        <p:cTn id="32" dur="1000" fill="hold"/>
+                                        <p:tgtEl>
+                                          <p:spTgt spid="5"/>
+                                        </p:tgtEl>
+                                        <p:attrNameLst>
+                                          <p:attrName>ppt_h</p:attrName>
+                                        </p:attrNameLst>
+                                      </p:cBhvr>
+                                      <p:tavLst>
+                                        <p:tav tm="0">
+                                          <p:val>
+                                            <p:fltVal val="0"/>
+                                          </p:val>
+                                        </p:tav>
+                                        <p:tav tm="100000">
+                                          <p:val>
+                                            <p:strVal val="#ppt_h"/>
+                                          </p:val>
+                                        </p:tav>
+                                      </p:tavLst>
+                                    </p:anim>
+                                    <p:anim calcmode="lin" valueType="num">
+                                      <p:cBhvr>
+                                        <p:cTn id="33" dur="1000" fill="hold"/>
+                                        <p:tgtEl>
+                                          <p:spTgt spid="5"/>
+                                        </p:tgtEl>
+                                        <p:attrNameLst>
+                                          <p:attrName>style.rotation</p:attrName>
+                                        </p:attrNameLst>
+                                      </p:cBhvr>
+                                      <p:tavLst>
+                                        <p:tav tm="0">
+                                          <p:val>
+                                            <p:fltVal val="90"/>
+                                          </p:val>
+                                        </p:tav>
+                                        <p:tav tm="100000">
+                                          <p:val>
+                                            <p:fltVal val="0"/>
+                                          </p:val>
+                                        </p:tav>
+                                      </p:tavLst>
+                                    </p:anim>
+                                    <p:animEffect transition="in" filter="fade">
+                                      <p:cBhvr>
+                                        <p:cTn id="34" dur="1000"/>
+                                        <p:tgtEl>
+                                          <p:spTgt spid="5"/>
+                                        </p:tgtEl>
+                                      </p:cBhvr>
+                                    </p:animEffect>
+                                  </p:childTnLst>
+                                </p:cTn>
+                              </p:par>
+                            </p:childTnLst>
+                          </p:cTn>
+                        </p:par>
+                      </p:childTnLst>
+                    </p:cTn>
+                  </p:par>
+                  <p:par>
+                    <p:cTn id="35" fill="hold">
+                      <p:stCondLst>
+                        <p:cond delay="indefinite"/>
+                      </p:stCondLst>
+                      <p:childTnLst>
+                        <p:par>
+                          <p:cTn id="36" fill="hold">
+                            <p:stCondLst>
+                              <p:cond delay="0"/>
+                            </p:stCondLst>
+                            <p:childTnLst>
+                              <p:par>
+                                <p:cTn id="37" presetID="31" presetClass="entr" presetSubtype="0" fill="hold" nodeType="clickEffect">
+                                  <p:stCondLst>
+                                    <p:cond delay="0"/>
+                                  </p:stCondLst>
+                                  <p:childTnLst>
+                                    <p:set>
+                                      <p:cBhvr>
+                                        <p:cTn id="38" dur="1" fill="hold">
+                                          <p:stCondLst>
+                                            <p:cond delay="0"/>
+                                          </p:stCondLst>
+                                        </p:cTn>
+                                        <p:tgtEl>
+                                          <p:spTgt spid="7"/>
+                                        </p:tgtEl>
+                                        <p:attrNameLst>
+                                          <p:attrName>style.visibility</p:attrName>
+                                        </p:attrNameLst>
+                                      </p:cBhvr>
+                                      <p:to>
+                                        <p:strVal val="visible"/>
+                                      </p:to>
+                                    </p:set>
+                                    <p:anim calcmode="lin" valueType="num">
+                                      <p:cBhvr>
+                                        <p:cTn id="39" dur="1000" fill="hold"/>
+                                        <p:tgtEl>
+                                          <p:spTgt spid="7"/>
+                                        </p:tgtEl>
+                                        <p:attrNameLst>
+                                          <p:attrName>ppt_w</p:attrName>
+                                        </p:attrNameLst>
+                                      </p:cBhvr>
+                                      <p:tavLst>
+                                        <p:tav tm="0">
+                                          <p:val>
+                                            <p:fltVal val="0"/>
+                                          </p:val>
+                                        </p:tav>
+                                        <p:tav tm="100000">
+                                          <p:val>
+                                            <p:strVal val="#ppt_w"/>
+                                          </p:val>
+                                        </p:tav>
+                                      </p:tavLst>
+                                    </p:anim>
+                                    <p:anim calcmode="lin" valueType="num">
+                                      <p:cBhvr>
+                                        <p:cTn id="40" dur="1000" fill="hold"/>
+                                        <p:tgtEl>
+                                          <p:spTgt spid="7"/>
+                                        </p:tgtEl>
+                                        <p:attrNameLst>
+                                          <p:attrName>ppt_h</p:attrName>
+                                        </p:attrNameLst>
+                                      </p:cBhvr>
+                                      <p:tavLst>
+                                        <p:tav tm="0">
+                                          <p:val>
+                                            <p:fltVal val="0"/>
+                                          </p:val>
+                                        </p:tav>
+                                        <p:tav tm="100000">
+                                          <p:val>
+                                            <p:strVal val="#ppt_h"/>
+                                          </p:val>
+                                        </p:tav>
+                                      </p:tavLst>
+                                    </p:anim>
+                                    <p:anim calcmode="lin" valueType="num">
+                                      <p:cBhvr>
+                                        <p:cTn id="41" dur="1000" fill="hold"/>
+                                        <p:tgtEl>
+                                          <p:spTgt spid="7"/>
+                                        </p:tgtEl>
+                                        <p:attrNameLst>
+                                          <p:attrName>style.rotation</p:attrName>
+                                        </p:attrNameLst>
+                                      </p:cBhvr>
+                                      <p:tavLst>
+                                        <p:tav tm="0">
+                                          <p:val>
+                                            <p:fltVal val="90"/>
+                                          </p:val>
+                                        </p:tav>
+                                        <p:tav tm="100000">
+                                          <p:val>
+                                            <p:fltVal val="0"/>
+                                          </p:val>
+                                        </p:tav>
+                                      </p:tavLst>
+                                    </p:anim>
+                                    <p:animEffect transition="in" filter="fade">
+                                      <p:cBhvr>
+                                        <p:cTn id="42" dur="1000"/>
+                                        <p:tgtEl>
+                                          <p:spTgt spid="7"/>
+                                        </p:tgtEl>
+                                      </p:cBhvr>
+                                    </p:animEffect>
+                                  </p:childTnLst>
+                                </p:cTn>
+                              </p:par>
+                            </p:childTnLst>
+                          </p:cTn>
+                        </p:par>
+                      </p:childTnLst>
+                    </p:cTn>
+                  </p:par>
+                </p:childTnLst>
+              </p:cTn>
+              <p:prevCondLst>
+                <p:cond evt="onPrev" delay="0">
+                  <p:tgtEl>
+                    <p:sldTgt/>
+                  </p:tgtEl>
+                </p:cond>
+              </p:prevCondLst>
+              <p:nextCondLst>
+                <p:cond evt="onNext" delay="0">
+                  <p:tgtEl>
+                    <p:sldTgt/>
+                  </p:tgtEl>
+                </p:cond>
+              </p:nextCondLst>
+            </p:seq>
+          </p:childTnLst>
+        </p:cTn>
+      </p:par>
+    </p:tnLst>
+    <p:bldLst>
+      <p:bldP spid="2" grpId="0"/>
+      <p:bldP spid="3" grpId="0"/>
+    </p:bldLst>
+  </p:timing>
+</p:sld>
+</file>
+
+<file path=ppt/slides/slide7.xml><?xml version="1.0" encoding="utf-8"?>
+<p:sld xmlns:a="http://schemas.openxmlformats.org/drawingml/2006/main" xmlns:r="http://schemas.openxmlformats.org/officeDocument/2006/relationships" xmlns:p="http://schemas.openxmlformats.org/presentationml/2006/main">
+  <p:cSld>
+    <p:spTree>
+      <p:nvGrpSpPr>
+        <p:cNvPr id="1" name=""/>
+        <p:cNvGrpSpPr/>
+        <p:nvPr/>
+      </p:nvGrpSpPr>
+      <p:grpSpPr>
+        <a:xfrm>
+          <a:off x="0" y="0"/>
+          <a:ext cx="0" cy="0"/>
+          <a:chOff x="0" y="0"/>
+          <a:chExt cx="0" cy="0"/>
+        </a:xfrm>
+      </p:grpSpPr>
+      <p:sp>
+        <p:nvSpPr>
+          <p:cNvPr id="2" name="Szövegdoboz 1">
+            <a:extLst>
+              <a:ext uri="{FF2B5EF4-FFF2-40B4-BE49-F238E27FC236}">
+                <a16:creationId xmlns:a16="http://schemas.microsoft.com/office/drawing/2014/main" id="{0B1135DE-56A0-41A5-B8BC-56BE0221CD76}"/>
+              </a:ext>
+            </a:extLst>
+          </p:cNvPr>
+          <p:cNvSpPr txBox="1"/>
+          <p:nvPr/>
+        </p:nvSpPr>
+        <p:spPr>
+          <a:xfrm>
+            <a:off x="2523066" y="103426"/>
+            <a:ext cx="7145867" cy="861774"/>
+          </a:xfrm>
+          <a:prstGeom prst="rect">
+            <a:avLst/>
+          </a:prstGeom>
+          <a:noFill/>
+        </p:spPr>
+        <p:txBody>
+          <a:bodyPr wrap="square" rtlCol="0">
+            <a:spAutoFit/>
+          </a:bodyPr>
+          <a:lstStyle/>
+          <a:p>
+            <a:r>
+              <a:rPr lang="hu-HU" sz="5000" b="1" dirty="0">
+                <a:latin typeface="Times New Roman" panose="02020603050405020304" pitchFamily="18" charset="0"/>
+                <a:cs typeface="Times New Roman" panose="02020603050405020304" pitchFamily="18" charset="0"/>
+              </a:rPr>
+              <a:t>Köszönjük a figyelmet!</a:t>
+            </a:r>
+          </a:p>
+        </p:txBody>
+      </p:sp>
+      <p:pic>
+        <p:nvPicPr>
+          <p:cNvPr id="8" name="Kép 7">
+            <a:extLst>
+              <a:ext uri="{FF2B5EF4-FFF2-40B4-BE49-F238E27FC236}">
+                <a16:creationId xmlns:a16="http://schemas.microsoft.com/office/drawing/2014/main" id="{61CA9C3C-3087-4A04-A529-C2B1DB8788A3}"/>
+              </a:ext>
+            </a:extLst>
+          </p:cNvPr>
+          <p:cNvPicPr>
+            <a:picLocks noChangeAspect="1"/>
+          </p:cNvPicPr>
+          <p:nvPr/>
+        </p:nvPicPr>
+        <p:blipFill>
+          <a:blip r:embed="rId2">
+            <a:extLst>
+              <a:ext uri="{28A0092B-C50C-407E-A947-70E740481C1C}">
+                <a14:useLocalDpi xmlns:a14="http://schemas.microsoft.com/office/drawing/2010/main" val="0"/>
+              </a:ext>
+            </a:extLst>
+          </a:blip>
+          <a:stretch>
+            <a:fillRect/>
+          </a:stretch>
+        </p:blipFill>
+        <p:spPr>
+          <a:xfrm>
+            <a:off x="3036357" y="1624686"/>
+            <a:ext cx="5404909" cy="4263027"/>
+          </a:xfrm>
+          <a:prstGeom prst="rect">
+            <a:avLst/>
+          </a:prstGeom>
+        </p:spPr>
+      </p:pic>
+    </p:spTree>
+    <p:extLst>
+      <p:ext uri="{BB962C8B-B14F-4D97-AF65-F5344CB8AC3E}">
+        <p14:creationId xmlns:p14="http://schemas.microsoft.com/office/powerpoint/2010/main" val="3517506594"/>
+      </p:ext>
+    </p:extLst>
+  </p:cSld>
+  <p:clrMapOvr>
+    <a:masterClrMapping/>
+  </p:clrMapOvr>
+  <p:timing>
+    <p:tnLst>
+      <p:par>
+        <p:cTn id="1" dur="indefinite" restart="never" nodeType="tmRoot">
+          <p:childTnLst>
+            <p:seq concurrent="1" nextAc="seek">
+              <p:cTn id="2" dur="indefinite" nodeType="mainSeq">
+                <p:childTnLst>
+                  <p:par>
+                    <p:cTn id="3" fill="hold">
+                      <p:stCondLst>
+                        <p:cond delay="indefinite"/>
+                      </p:stCondLst>
+                      <p:childTnLst>
+                        <p:par>
+                          <p:cTn id="4" fill="hold">
+                            <p:stCondLst>
+                              <p:cond delay="0"/>
+                            </p:stCondLst>
+                            <p:childTnLst>
+                              <p:par>
+                                <p:cTn id="5" presetID="53" presetClass="entr" presetSubtype="16" fill="hold" grpId="0" nodeType="clickEffect">
+                                  <p:stCondLst>
+                                    <p:cond delay="0"/>
+                                  </p:stCondLst>
+                                  <p:childTnLst>
+                                    <p:set>
+                                      <p:cBhvr>
+                                        <p:cTn id="6" dur="1" fill="hold">
+                                          <p:stCondLst>
+                                            <p:cond delay="0"/>
+                                          </p:stCondLst>
+                                        </p:cTn>
+                                        <p:tgtEl>
+                                          <p:spTgt spid="2"/>
+                                        </p:tgtEl>
+                                        <p:attrNameLst>
+                                          <p:attrName>style.visibility</p:attrName>
+                                        </p:attrNameLst>
+                                      </p:cBhvr>
+                                      <p:to>
+                                        <p:strVal val="visible"/>
+                                      </p:to>
+                                    </p:set>
+                                    <p:anim calcmode="lin" valueType="num">
+                                      <p:cBhvr>
+                                        <p:cTn id="7" dur="500" fill="hold"/>
+                                        <p:tgtEl>
+                                          <p:spTgt spid="2"/>
+                                        </p:tgtEl>
+                                        <p:attrNameLst>
+                                          <p:attrName>ppt_w</p:attrName>
+                                        </p:attrNameLst>
+                                      </p:cBhvr>
+                                      <p:tavLst>
+                                        <p:tav tm="0">
+                                          <p:val>
+                                            <p:fltVal val="0"/>
+                                          </p:val>
+                                        </p:tav>
+                                        <p:tav tm="100000">
+                                          <p:val>
+                                            <p:strVal val="#ppt_w"/>
+                                          </p:val>
+                                        </p:tav>
+                                      </p:tavLst>
+                                    </p:anim>
+                                    <p:anim calcmode="lin" valueType="num">
+                                      <p:cBhvr>
+                                        <p:cTn id="8" dur="500" fill="hold"/>
+                                        <p:tgtEl>
+                                          <p:spTgt spid="2"/>
+                                        </p:tgtEl>
+                                        <p:attrNameLst>
+                                          <p:attrName>ppt_h</p:attrName>
+                                        </p:attrNameLst>
+                                      </p:cBhvr>
+                                      <p:tavLst>
+                                        <p:tav tm="0">
+                                          <p:val>
+                                            <p:fltVal val="0"/>
+                                          </p:val>
+                                        </p:tav>
+                                        <p:tav tm="100000">
+                                          <p:val>
+                                            <p:strVal val="#ppt_h"/>
+                                          </p:val>
+                                        </p:tav>
+                                      </p:tavLst>
+                                    </p:anim>
+                                    <p:animEffect transition="in" filter="fade">
+                                      <p:cBhvr>
+                                        <p:cTn id="9" dur="500"/>
+                                        <p:tgtEl>
+                                          <p:spTgt spid="2"/>
+                                        </p:tgtEl>
+                                      </p:cBhvr>
+                                    </p:animEffect>
+                                  </p:childTnLst>
+                                </p:cTn>
+                              </p:par>
+                            </p:childTnLst>
+                          </p:cTn>
+                        </p:par>
+                      </p:childTnLst>
+                    </p:cTn>
+                  </p:par>
+                  <p:par>
+                    <p:cTn id="10" fill="hold">
+                      <p:stCondLst>
+                        <p:cond delay="indefinite"/>
+                      </p:stCondLst>
+                      <p:childTnLst>
+                        <p:par>
+                          <p:cTn id="11" fill="hold">
+                            <p:stCondLst>
+                              <p:cond delay="0"/>
+                            </p:stCondLst>
+                            <p:childTnLst>
+                              <p:par>
+                                <p:cTn id="12" presetID="45" presetClass="entr" presetSubtype="0" fill="hold" nodeType="clickEffect">
+                                  <p:stCondLst>
+                                    <p:cond delay="0"/>
+                                  </p:stCondLst>
+                                  <p:childTnLst>
+                                    <p:set>
+                                      <p:cBhvr>
+                                        <p:cTn id="13" dur="1" fill="hold">
+                                          <p:stCondLst>
+                                            <p:cond delay="0"/>
+                                          </p:stCondLst>
+                                        </p:cTn>
+                                        <p:tgtEl>
+                                          <p:spTgt spid="8"/>
+                                        </p:tgtEl>
+                                        <p:attrNameLst>
+                                          <p:attrName>style.visibility</p:attrName>
+                                        </p:attrNameLst>
+                                      </p:cBhvr>
+                                      <p:to>
+                                        <p:strVal val="visible"/>
+                                      </p:to>
+                                    </p:set>
+                                    <p:animEffect transition="in" filter="fade">
+                                      <p:cBhvr>
+                                        <p:cTn id="14" dur="2000"/>
+                                        <p:tgtEl>
+                                          <p:spTgt spid="8"/>
+                                        </p:tgtEl>
+                                      </p:cBhvr>
+                                    </p:animEffect>
+                                    <p:anim calcmode="lin" valueType="num">
+                                      <p:cBhvr>
+                                        <p:cTn id="15" dur="2000" fill="hold"/>
+                                        <p:tgtEl>
+                                          <p:spTgt spid="8"/>
+                                        </p:tgtEl>
+                                        <p:attrNameLst>
+                                          <p:attrName>ppt_w</p:attrName>
+                                        </p:attrNameLst>
+                                      </p:cBhvr>
+                                      <p:tavLst>
+                                        <p:tav tm="0" fmla="#ppt_w*sin(2.5*pi*$)">
+                                          <p:val>
+                                            <p:fltVal val="0"/>
+                                          </p:val>
+                                        </p:tav>
+                                        <p:tav tm="100000">
+                                          <p:val>
+                                            <p:fltVal val="1"/>
+                                          </p:val>
+                                        </p:tav>
+                                      </p:tavLst>
+                                    </p:anim>
+                                    <p:anim calcmode="lin" valueType="num">
+                                      <p:cBhvr>
+                                        <p:cTn id="16" dur="2000" fill="hold"/>
+                                        <p:tgtEl>
+                                          <p:spTgt spid="8"/>
+                                        </p:tgtEl>
+                                        <p:attrNameLst>
+                                          <p:attrName>ppt_h</p:attrName>
+                                        </p:attrNameLst>
+                                      </p:cBhvr>
+                                      <p:tavLst>
+                                        <p:tav tm="0">
+                                          <p:val>
+                                            <p:strVal val="#ppt_h"/>
+                                          </p:val>
+                                        </p:tav>
+                                        <p:tav tm="100000">
+                                          <p:val>
+                                            <p:strVal val="#ppt_h"/>
+                                          </p:val>
+                                        </p:tav>
+                                      </p:tavLst>
+                                    </p:anim>
+                                  </p:childTnLst>
+                                </p:cTn>
+                              </p:par>
+                            </p:childTnLst>
+                          </p:cTn>
+                        </p:par>
+                      </p:childTnLst>
+                    </p:cTn>
+                  </p:par>
+                </p:childTnLst>
+              </p:cTn>
+              <p:prevCondLst>
+                <p:cond evt="onPrev" delay="0">
+                  <p:tgtEl>
+                    <p:sldTgt/>
+                  </p:tgtEl>
+                </p:cond>
+              </p:prevCondLst>
+              <p:nextCondLst>
+                <p:cond evt="onNext" delay="0">
+                  <p:tgtEl>
+                    <p:sldTgt/>
+                  </p:tgtEl>
+                </p:cond>
+              </p:nextCondLst>
+            </p:seq>
+          </p:childTnLst>
+        </p:cTn>
+      </p:par>
+    </p:tnLst>
+    <p:bldLst>
+      <p:bldP spid="2" grpId="0"/>
+    </p:bldLst>
+  </p:timing>
 </p:sld>
 </file>
 
